--- a/decks/where-did-the-afternoon-go-lesson-v2.pptx
+++ b/decks/where-did-the-afternoon-go-lesson-v2.pptx
@@ -18,6 +18,7 @@
     <p:sldId id="266" r:id="rId18"/>
     <p:sldId id="267" r:id="rId19"/>
     <p:sldId id="268" r:id="rId20"/>
+    <p:sldId id="269" r:id="rId21"/>
   </p:sldIdLst>
   <p:sldSz cx="12192000" cy="6858000" type="screen4x3"/>
   <p:notesSz cx="6858000" cy="9144000"/>
@@ -514,7 +515,7 @@
           <a:lstStyle/>
           <a:p>
             <a:r>
-              <a:t>This page and the next three are hidden. They stay in the deck for you and are skipped when you present.</a:t>
+              <a:t>This page is hidden and skipped when you present. The full plan, care notes and research are on the hidden pages at the end of the deck, if you want them.</a:t>
             </a:r>
           </a:p>
         </p:txBody>
@@ -585,6 +586,76 @@
           <a:p>
             <a:r>
               <a:t>2 MINUTES. Collect anonymously, or let students keep it. Before they go, name when to ask for more help: late or behind most days even with timers, buffers and a calendar; losing track of time hurting grades, sleep, a job or friendships; trouble feeling time pass for as long as they can remember, which can be part of ADHD. A counselor can help sort it out and talk with teachers about deadlines. Share the BVR Diner link on the slide (post it on your class page too). It has the three fixes, the backward plan, a task timer, a private check-in and who to talk to.</a:t>
+            </a:r>
+          </a:p>
+        </p:txBody>
+      </p:sp>
+      <p:sp>
+        <p:nvSpPr>
+          <p:cNvPr id="4" name="Slide Number Placeholder 3"/>
+          <p:cNvSpPr>
+            <a:spLocks noGrp="1"/>
+          </p:cNvSpPr>
+          <p:nvPr>
+            <p:ph type="sldNum" idx="5" sz="quarter"/>
+          </p:nvPr>
+        </p:nvSpPr>
+        <p:spPr/>
+      </p:sp>
+    </p:spTree>
+  </p:cSld>
+  <p:clrMapOvr>
+    <a:masterClrMapping/>
+  </p:clrMapOvr>
+</p:notes>
+</file>
+
+<file path=ppt/notesSlides/notesSlide11.xml><?xml version="1.0" encoding="utf-8"?>
+<p:notes xmlns:a="http://schemas.openxmlformats.org/drawingml/2006/main" xmlns:p="http://schemas.openxmlformats.org/presentationml/2006/main" xmlns:r="http://schemas.openxmlformats.org/officeDocument/2006/relationships">
+  <p:cSld>
+    <p:spTree>
+      <p:nvGrpSpPr>
+        <p:cNvPr id="1" name=""/>
+        <p:cNvGrpSpPr/>
+        <p:nvPr/>
+      </p:nvGrpSpPr>
+      <p:grpSpPr>
+        <a:xfrm>
+          <a:off x="0" y="0"/>
+          <a:ext cx="0" cy="0"/>
+          <a:chOff x="0" y="0"/>
+          <a:chExt cx="0" cy="0"/>
+        </a:xfrm>
+      </p:grpSpPr>
+      <p:sp>
+        <p:nvSpPr>
+          <p:cNvPr id="2" name="Slide Image Placeholder 1"/>
+          <p:cNvSpPr>
+            <a:spLocks noGrp="1"/>
+          </p:cNvSpPr>
+          <p:nvPr>
+            <p:ph type="sldImg" idx="2"/>
+          </p:nvPr>
+        </p:nvSpPr>
+        <p:spPr/>
+      </p:sp>
+      <p:sp>
+        <p:nvSpPr>
+          <p:cNvPr id="3" name="Notes Placeholder 2"/>
+          <p:cNvSpPr>
+            <a:spLocks noGrp="1"/>
+          </p:cNvSpPr>
+          <p:nvPr>
+            <p:ph type="body" idx="3" sz="quarter"/>
+          </p:nvPr>
+        </p:nvSpPr>
+        <p:spPr/>
+        <p:txBody>
+          <a:bodyPr/>
+          <a:lstStyle/>
+          <a:p>
+            <a:r>
+              <a:t>If you want more: this page and the next three are hidden and skipped when you present.</a:t>
             </a:r>
           </a:p>
         </p:txBody>
@@ -4236,7 +4307,7 @@
                 </a:solidFill>
                 <a:latin typeface="Inter Tight"/>
               </a:rPr>
-              <a:t>TEACHER PAGE  ·  skipped when you present  ·  Lesson plan</a:t>
+              <a:t>TEACHER PAGE  ·  skipped when you present  ·  Before you start</a:t>
             </a:r>
           </a:p>
         </p:txBody>
@@ -4327,8 +4398,8 @@
         </p:nvSpPr>
         <p:spPr>
           <a:xfrm>
-            <a:off x="548640" y="1828800"/>
-            <a:ext cx="5120640" cy="4389120"/>
+            <a:off x="548640" y="2011680"/>
+            <a:ext cx="11064240" cy="4206240"/>
           </a:xfrm>
           <a:prstGeom prst="rect">
             <a:avLst/>
@@ -4343,43 +4414,43 @@
           <a:p>
             <a:pPr algn="l">
               <a:spcAft>
-                <a:spcPts val="675"/>
-              </a:spcAft>
-            </a:pPr>
-            <a:r>
-              <a:rPr sz="1100" b="1" i="0">
+                <a:spcPts val="810"/>
+              </a:spcAft>
+            </a:pPr>
+            <a:r>
+              <a:rPr sz="1200" b="1" i="0">
                 <a:solidFill>
                   <a:srgbClr val="0B2D5B"/>
                 </a:solidFill>
                 <a:latin typeface="Inter Tight"/>
               </a:rPr>
-              <a:t>GOAL</a:t>
-            </a:r>
-          </a:p>
-          <a:p>
-            <a:pPr algn="l">
-              <a:spcAft>
-                <a:spcPts val="675"/>
-              </a:spcAft>
-            </a:pPr>
-            <a:r>
-              <a:rPr sz="1500" b="0" i="0">
+              <a:t>BEFORE YOU START</a:t>
+            </a:r>
+          </a:p>
+          <a:p>
+            <a:pPr algn="l">
+              <a:spcAft>
+                <a:spcPts val="810"/>
+              </a:spcAft>
+            </a:pPr>
+            <a:r>
+              <a:rPr sz="1800" b="0" i="0">
                 <a:solidFill>
                   <a:srgbClr val="1C1B19"/>
                 </a:solidFill>
                 <a:latin typeface="Source Serif 4"/>
               </a:rPr>
-              <a:t>Students can explain the planning fallacy (we plan from the inside, picturing a smooth run), name where their missing time goes, and use three fixes on a real task: unpack it, plan it backward with a buffer, and start keeping their own numbers. The aim is better data. Nobody should leave thinking running late means they don't care.</a:t>
-            </a:r>
-          </a:p>
-          <a:p>
-            <a:pPr algn="l">
-              <a:spcAft>
-                <a:spcPts val="675"/>
-              </a:spcAft>
-            </a:pPr>
-            <a:r>
-              <a:rPr sz="1500" b="0" i="0">
+              <a:t>Students learn why we plan for a perfect day, where their missing time goes, and three fixes: unpack the task, plan backward with a buffer, and keep their own numbers. Bring index cards, blame the plan instead of the student, and keep everyone's schedule private.</a:t>
+            </a:r>
+          </a:p>
+          <a:p>
+            <a:pPr algn="l">
+              <a:spcAft>
+                <a:spcPts val="810"/>
+              </a:spcAft>
+            </a:pPr>
+            <a:r>
+              <a:rPr sz="1800" b="0" i="0">
                 <a:solidFill>
                   <a:srgbClr val="1C1B19"/>
                 </a:solidFill>
@@ -4391,346 +4462,75 @@
           <a:p>
             <a:pPr algn="l">
               <a:spcAft>
-                <a:spcPts val="675"/>
-              </a:spcAft>
-            </a:pPr>
-            <a:r>
-              <a:rPr sz="1100" b="1" i="0">
+                <a:spcPts val="810"/>
+              </a:spcAft>
+            </a:pPr>
+            <a:r>
+              <a:rPr sz="1200" b="1" i="0">
                 <a:solidFill>
                   <a:srgbClr val="0B2D5B"/>
                 </a:solidFill>
                 <a:latin typeface="Inter Tight"/>
               </a:rPr>
-              <a:t>MATERIALS</a:t>
-            </a:r>
-          </a:p>
-          <a:p>
-            <a:pPr algn="l">
-              <a:spcAft>
-                <a:spcPts val="675"/>
-              </a:spcAft>
-            </a:pPr>
-            <a:r>
-              <a:rPr sz="1500" b="0" i="0">
+              <a:t>EVERY STUDENT IN THE ROOM</a:t>
+            </a:r>
+          </a:p>
+          <a:p>
+            <a:pPr algn="l">
+              <a:spcAft>
+                <a:spcPts val="810"/>
+              </a:spcAft>
+            </a:pPr>
+            <a:r>
+              <a:rPr sz="1800" b="0" i="0">
                 <a:solidFill>
                   <a:srgbClr val="1C1B19"/>
                 </a:solidFill>
                 <a:latin typeface="Source Serif 4"/>
               </a:rPr>
-              <a:t>Index cards for the opening guess and the time-thief round</a:t>
-            </a:r>
-          </a:p>
-          <a:p>
-            <a:pPr algn="l">
-              <a:spcAft>
-                <a:spcPts val="675"/>
-              </a:spcAft>
-            </a:pPr>
-            <a:r>
-              <a:rPr sz="1500" b="0" i="0">
+              <a:t>For students with ADHD, alarms and timers are the method itself, and work, siblings, two homes and faith take real time that can't move.</a:t>
+            </a:r>
+          </a:p>
+          <a:p>
+            <a:pPr algn="l">
+              <a:spcAft>
+                <a:spcPts val="810"/>
+              </a:spcAft>
+            </a:pPr>
+            <a:r>
+              <a:rPr sz="1800" b="0" i="0">
                 <a:solidFill>
                   <a:srgbClr val="1C1B19"/>
                 </a:solidFill>
                 <a:latin typeface="Source Serif 4"/>
               </a:rPr>
-              <a:t>Scrap paper for unpacking a real task</a:t>
-            </a:r>
-          </a:p>
-          <a:p>
-            <a:pPr algn="l">
-              <a:spcAft>
-                <a:spcPts val="675"/>
-              </a:spcAft>
-            </a:pPr>
-            <a:r>
-              <a:rPr sz="1500" b="0" i="0">
-                <a:solidFill>
-                  <a:srgbClr val="1C1B19"/>
-                </a:solidFill>
-                <a:latin typeface="Source Serif 4"/>
-              </a:rPr>
-              <a:t>The BVR Diner page link (last slide) to share after class</a:t>
-            </a:r>
-          </a:p>
-        </p:txBody>
-      </p:sp>
-      <p:sp>
-        <p:nvSpPr>
-          <p:cNvPr id="7" name="TextBox 6"/>
-          <p:cNvSpPr txBox="1"/>
-          <p:nvPr/>
-        </p:nvSpPr>
-        <p:spPr>
-          <a:xfrm>
-            <a:off x="6126480" y="1828800"/>
-            <a:ext cx="5486400" cy="4389120"/>
-          </a:xfrm>
-          <a:prstGeom prst="rect">
-            <a:avLst/>
-          </a:prstGeom>
-          <a:noFill/>
-        </p:spPr>
-        <p:txBody>
-          <a:bodyPr wrap="square" anchor="t" lIns="0" rIns="0" tIns="0" bIns="0">
-            <a:spAutoFit/>
-          </a:bodyPr>
-          <a:lstStyle/>
-          <a:p>
-            <a:pPr algn="l">
-              <a:spcAft>
-                <a:spcPts val="630"/>
-              </a:spcAft>
-            </a:pPr>
-            <a:r>
-              <a:rPr sz="1100" b="1" i="0">
+              <a:t/>
+            </a:r>
+          </a:p>
+          <a:p>
+            <a:pPr algn="l">
+              <a:spcAft>
+                <a:spcPts val="810"/>
+              </a:spcAft>
+            </a:pPr>
+            <a:r>
+              <a:rPr sz="1200" b="1" i="0">
                 <a:solidFill>
                   <a:srgbClr val="0B2D5B"/>
                 </a:solidFill>
                 <a:latin typeface="Inter Tight"/>
               </a:rPr>
-              <a:t>FLOW</a:t>
-            </a:r>
-          </a:p>
-          <a:p>
-            <a:pPr algn="l">
-              <a:spcAft>
-                <a:spcPts val="630"/>
-              </a:spcAft>
-            </a:pPr>
-            <a:r>
-              <a:rPr sz="1300" b="1" i="0">
-                <a:solidFill>
-                  <a:srgbClr val="F47B20"/>
-                </a:solidFill>
-                <a:latin typeface="Inter Tight"/>
-              </a:rPr>
-              <a:t>5 min   </a:t>
-            </a:r>
-            <a:r>
-              <a:rPr sz="1400" b="0" i="0">
-                <a:solidFill>
-                  <a:srgbClr val="1C1B19"/>
-                </a:solidFill>
-                <a:latin typeface="Source Serif 4"/>
-              </a:rPr>
-              <a:t>The guess (anonymous cards)</a:t>
-            </a:r>
-          </a:p>
-          <a:p>
-            <a:pPr algn="l">
-              <a:spcAft>
-                <a:spcPts val="630"/>
-              </a:spcAft>
-            </a:pPr>
-            <a:r>
-              <a:rPr sz="1300" b="1" i="0">
-                <a:solidFill>
-                  <a:srgbClr val="F47B20"/>
-                </a:solidFill>
-                <a:latin typeface="Inter Tight"/>
-              </a:rPr>
-              <a:t>6 min   </a:t>
-            </a:r>
-            <a:r>
-              <a:rPr sz="1400" b="0" i="0">
-                <a:solidFill>
-                  <a:srgbClr val="1C1B19"/>
-                </a:solidFill>
-                <a:latin typeface="Source Serif 4"/>
-              </a:rPr>
-              <a:t>The planning fallacy</a:t>
-            </a:r>
-          </a:p>
-          <a:p>
-            <a:pPr algn="l">
-              <a:spcAft>
-                <a:spcPts val="630"/>
-              </a:spcAft>
-            </a:pPr>
-            <a:r>
-              <a:rPr sz="1300" b="1" i="0">
-                <a:solidFill>
-                  <a:srgbClr val="F47B20"/>
-                </a:solidFill>
-                <a:latin typeface="Inter Tight"/>
-              </a:rPr>
-              <a:t>7 min   </a:t>
-            </a:r>
-            <a:r>
-              <a:rPr sz="1400" b="0" i="0">
-                <a:solidFill>
-                  <a:srgbClr val="1C1B19"/>
-                </a:solidFill>
-                <a:latin typeface="Source Serif 4"/>
-              </a:rPr>
-              <a:t>Why your brain lowballs time</a:t>
-            </a:r>
-          </a:p>
-          <a:p>
-            <a:pPr algn="l">
-              <a:spcAft>
-                <a:spcPts val="630"/>
-              </a:spcAft>
-            </a:pPr>
-            <a:r>
-              <a:rPr sz="1300" b="1" i="0">
-                <a:solidFill>
-                  <a:srgbClr val="F47B20"/>
-                </a:solidFill>
-                <a:latin typeface="Inter Tight"/>
-              </a:rPr>
-              <a:t>6 min   </a:t>
-            </a:r>
-            <a:r>
-              <a:rPr sz="1400" b="0" i="0">
-                <a:solidFill>
-                  <a:srgbClr val="1C1B19"/>
-                </a:solidFill>
-                <a:latin typeface="Source Serif 4"/>
-              </a:rPr>
-              <a:t>Time thieves (anonymous cards)</a:t>
-            </a:r>
-          </a:p>
-          <a:p>
-            <a:pPr algn="l">
-              <a:spcAft>
-                <a:spcPts val="630"/>
-              </a:spcAft>
-            </a:pPr>
-            <a:r>
-              <a:rPr sz="1300" b="1" i="0">
-                <a:solidFill>
-                  <a:srgbClr val="F47B20"/>
-                </a:solidFill>
-                <a:latin typeface="Inter Tight"/>
-              </a:rPr>
-              <a:t>8 min   </a:t>
-            </a:r>
-            <a:r>
-              <a:rPr sz="1400" b="0" i="0">
-                <a:solidFill>
-                  <a:srgbClr val="1C1B19"/>
-                </a:solidFill>
-                <a:latin typeface="Source Serif 4"/>
-              </a:rPr>
-              <a:t>Three plans (small groups)</a:t>
-            </a:r>
-          </a:p>
-          <a:p>
-            <a:pPr algn="l">
-              <a:spcAft>
-                <a:spcPts val="630"/>
-              </a:spcAft>
-            </a:pPr>
-            <a:r>
-              <a:rPr sz="1300" b="1" i="0">
-                <a:solidFill>
-                  <a:srgbClr val="F47B20"/>
-                </a:solidFill>
-                <a:latin typeface="Inter Tight"/>
-              </a:rPr>
-              <a:t>6 min   </a:t>
-            </a:r>
-            <a:r>
-              <a:rPr sz="1400" b="0" i="0">
-                <a:solidFill>
-                  <a:srgbClr val="1C1B19"/>
-                </a:solidFill>
-                <a:latin typeface="Source Serif 4"/>
-              </a:rPr>
-              <a:t>Three fixes that work</a:t>
-            </a:r>
-          </a:p>
-          <a:p>
-            <a:pPr algn="l">
-              <a:spcAft>
-                <a:spcPts val="630"/>
-              </a:spcAft>
-            </a:pPr>
-            <a:r>
-              <a:rPr sz="1300" b="1" i="0">
-                <a:solidFill>
-                  <a:srgbClr val="F47B20"/>
-                </a:solidFill>
-                <a:latin typeface="Inter Tight"/>
-              </a:rPr>
-              <a:t>5 min   </a:t>
-            </a:r>
-            <a:r>
-              <a:rPr sz="1400" b="0" i="0">
-                <a:solidFill>
-                  <a:srgbClr val="1C1B19"/>
-                </a:solidFill>
-                <a:latin typeface="Source Serif 4"/>
-              </a:rPr>
-              <a:t>Unpack a real task (private, then pair-share)</a:t>
-            </a:r>
-          </a:p>
-          <a:p>
-            <a:pPr algn="l">
-              <a:spcAft>
-                <a:spcPts val="630"/>
-              </a:spcAft>
-            </a:pPr>
-            <a:r>
-              <a:rPr sz="1300" b="1" i="0">
-                <a:solidFill>
-                  <a:srgbClr val="F47B20"/>
-                </a:solidFill>
-                <a:latin typeface="Inter Tight"/>
-              </a:rPr>
-              <a:t>2 min   </a:t>
-            </a:r>
-            <a:r>
-              <a:rPr sz="1400" b="0" i="0">
-                <a:solidFill>
-                  <a:srgbClr val="1C1B19"/>
-                </a:solidFill>
-                <a:latin typeface="Source Serif 4"/>
-              </a:rPr>
-              <a:t>Exit card and the BVR Diner link</a:t>
-            </a:r>
-          </a:p>
-          <a:p>
-            <a:pPr algn="l">
-              <a:spcAft>
-                <a:spcPts val="630"/>
-              </a:spcAft>
-            </a:pPr>
-            <a:r>
-              <a:rPr sz="1400" b="0" i="0">
-                <a:solidFill>
-                  <a:srgbClr val="1C1B19"/>
-                </a:solidFill>
-                <a:latin typeface="Source Serif 4"/>
-              </a:rPr>
-              <a:t/>
-            </a:r>
-          </a:p>
-          <a:p>
-            <a:pPr algn="l">
-              <a:spcAft>
-                <a:spcPts val="630"/>
-              </a:spcAft>
-            </a:pPr>
-            <a:r>
-              <a:rPr sz="1100" b="1" i="0">
-                <a:solidFill>
-                  <a:srgbClr val="0B2D5B"/>
-                </a:solidFill>
-                <a:latin typeface="Inter Tight"/>
-              </a:rPr>
               <a:t>SHORT ON TIME (20-MINUTE ADVISORY)</a:t>
             </a:r>
           </a:p>
           <a:p>
             <a:pPr algn="l">
               <a:spcAft>
-                <a:spcPts val="630"/>
-              </a:spcAft>
-            </a:pPr>
-            <a:r>
-              <a:rPr sz="1400" b="0" i="0">
+                <a:spcPts val="810"/>
+              </a:spcAft>
+            </a:pPr>
+            <a:r>
+              <a:rPr sz="1800" b="0" i="0">
                 <a:solidFill>
                   <a:srgbClr val="1C1B19"/>
                 </a:solidFill>
@@ -4845,7 +4645,7 @@
                 </a:solidFill>
                 <a:latin typeface="Inter Tight"/>
               </a:rPr>
-              <a:t>THREE PLANS</a:t>
+              <a:t>BEFORE YOU GO</a:t>
             </a:r>
           </a:p>
         </p:txBody>
@@ -4897,7 +4697,7 @@
         </p:nvSpPr>
         <p:spPr>
           <a:xfrm>
-            <a:off x="822960" y="1005840"/>
+            <a:off x="822960" y="1188720"/>
             <a:ext cx="10515600" cy="914400"/>
           </a:xfrm>
           <a:prstGeom prst="rect">
@@ -4913,31 +4713,70 @@
           <a:p>
             <a:pPr algn="l">
               <a:spcAft>
-                <a:spcPts val="1530"/>
-              </a:spcAft>
-            </a:pPr>
-            <a:r>
-              <a:rPr sz="3400" b="1" i="0">
+                <a:spcPts val="1620"/>
+              </a:spcAft>
+            </a:pPr>
+            <a:r>
+              <a:rPr sz="3600" b="1" i="0">
                 <a:solidFill>
                   <a:srgbClr val="1C1B19"/>
                 </a:solidFill>
                 <a:latin typeface="Source Serif 4"/>
               </a:rPr>
-              <a:t>Which fix would help most?</a:t>
-            </a:r>
-          </a:p>
-        </p:txBody>
-      </p:sp>
-      <p:sp>
-        <p:nvSpPr>
-          <p:cNvPr id="6" name="Rectangle 5"/>
+              <a:t>Exit card</a:t>
+            </a:r>
+          </a:p>
+        </p:txBody>
+      </p:sp>
+      <p:sp>
+        <p:nvSpPr>
+          <p:cNvPr id="6" name="TextBox 5"/>
+          <p:cNvSpPr txBox="1"/>
+          <p:nvPr/>
+        </p:nvSpPr>
+        <p:spPr>
+          <a:xfrm>
+            <a:off x="822960" y="2286000"/>
+            <a:ext cx="10515600" cy="1463040"/>
+          </a:xfrm>
+          <a:prstGeom prst="rect">
+            <a:avLst/>
+          </a:prstGeom>
+          <a:noFill/>
+        </p:spPr>
+        <p:txBody>
+          <a:bodyPr wrap="square" anchor="t" lIns="0" rIns="0" tIns="0" bIns="0">
+            <a:spAutoFit/>
+          </a:bodyPr>
+          <a:lstStyle/>
+          <a:p>
+            <a:pPr algn="l">
+              <a:spcAft>
+                <a:spcPts val="1080"/>
+              </a:spcAft>
+            </a:pPr>
+            <a:r>
+              <a:rPr sz="2400" b="0" i="0">
+                <a:solidFill>
+                  <a:srgbClr val="1C1B19"/>
+                </a:solidFill>
+                <a:latin typeface="Source Serif 4"/>
+              </a:rPr>
+              <a:t>What will you time, unpack or buffer this week?</a:t>
+            </a:r>
+          </a:p>
+        </p:txBody>
+      </p:sp>
+      <p:sp>
+        <p:nvSpPr>
+          <p:cNvPr id="7" name="Rectangle 6"/>
           <p:cNvSpPr/>
           <p:nvPr/>
         </p:nvSpPr>
         <p:spPr>
           <a:xfrm>
-            <a:off x="822960" y="2103120"/>
-            <a:ext cx="3322320" cy="3840480"/>
+            <a:off x="822960" y="4023360"/>
+            <a:ext cx="10515600" cy="1371600"/>
           </a:xfrm>
           <a:prstGeom prst="rect">
             <a:avLst/>
@@ -4947,7 +4786,7 @@
           </a:solidFill>
           <a:ln w="15875">
             <a:solidFill>
-              <a:srgbClr val="D8D2C6"/>
+              <a:srgbClr val="1C1B19"/>
             </a:solidFill>
           </a:ln>
           <a:effectLst/>
@@ -4976,14 +4815,14 @@
       </p:sp>
       <p:sp>
         <p:nvSpPr>
-          <p:cNvPr id="7" name="TextBox 6"/>
+          <p:cNvPr id="8" name="TextBox 7"/>
           <p:cNvSpPr txBox="1"/>
           <p:nvPr/>
         </p:nvSpPr>
         <p:spPr>
           <a:xfrm>
-            <a:off x="1051560" y="2286000"/>
-            <a:ext cx="2865120" cy="365760"/>
+            <a:off x="1097280" y="4206240"/>
+            <a:ext cx="10058400" cy="365760"/>
           </a:xfrm>
           <a:prstGeom prst="rect">
             <a:avLst/>
@@ -4998,31 +4837,31 @@
           <a:p>
             <a:pPr algn="l">
               <a:spcAft>
-                <a:spcPts val="585"/>
-              </a:spcAft>
-            </a:pPr>
-            <a:r>
-              <a:rPr sz="1300" b="1" i="0">
+                <a:spcPts val="540"/>
+              </a:spcAft>
+            </a:pPr>
+            <a:r>
+              <a:rPr sz="1200" b="1" i="0">
                 <a:solidFill>
                   <a:srgbClr val="0B2D5B"/>
                 </a:solidFill>
                 <a:latin typeface="Inter Tight"/>
               </a:rPr>
-              <a:t>NIA</a:t>
-            </a:r>
-          </a:p>
-        </p:txBody>
-      </p:sp>
-      <p:sp>
-        <p:nvSpPr>
-          <p:cNvPr id="8" name="TextBox 7"/>
+              <a:t>ON THE BVR DINER MENU</a:t>
+            </a:r>
+          </a:p>
+        </p:txBody>
+      </p:sp>
+      <p:sp>
+        <p:nvSpPr>
+          <p:cNvPr id="9" name="TextBox 8"/>
           <p:cNvSpPr txBox="1"/>
           <p:nvPr/>
         </p:nvSpPr>
         <p:spPr>
           <a:xfrm>
-            <a:off x="1051560" y="2743200"/>
-            <a:ext cx="2865120" cy="3017520"/>
+            <a:off x="1097280" y="4617720"/>
+            <a:ext cx="10058400" cy="640080"/>
           </a:xfrm>
           <a:prstGeom prst="rect">
             <a:avLst/>
@@ -5037,42 +4876,66 @@
           <a:p>
             <a:pPr algn="l">
               <a:spcAft>
-                <a:spcPts val="810"/>
-              </a:spcAft>
-            </a:pPr>
-            <a:r>
-              <a:rPr sz="1800" b="0" i="0">
+                <a:spcPts val="900"/>
+              </a:spcAft>
+            </a:pPr>
+            <a:r>
+              <a:rPr sz="2000" b="0" i="0">
                 <a:solidFill>
                   <a:srgbClr val="1C1B19"/>
                 </a:solidFill>
-                <a:latin typeface="Source Serif 4"/>
-              </a:rPr>
-              <a:t>Her first history research paper is due Friday. It's Tuesday. She figures "about three hours," since that's how long it would take if she knew exactly what to say.</a:t>
-            </a:r>
-          </a:p>
-        </p:txBody>
-      </p:sp>
-      <p:sp>
-        <p:nvSpPr>
-          <p:cNvPr id="9" name="Rectangle 8"/>
+                <a:latin typeface="Inter Tight"/>
+              </a:rPr>
+              <a:t>https://rmwtoolkit.github.io/bcds-toolkit/where-did-the-afternoon-go-high-school.html</a:t>
+            </a:r>
+          </a:p>
+        </p:txBody>
+      </p:sp>
+    </p:spTree>
+  </p:cSld>
+  <p:clrMapOvr>
+    <a:masterClrMapping/>
+  </p:clrMapOvr>
+</p:sld>
+</file>
+
+<file path=ppt/slides/slide11.xml><?xml version="1.0" encoding="utf-8"?>
+<p:sld xmlns:a="http://schemas.openxmlformats.org/drawingml/2006/main" xmlns:p="http://schemas.openxmlformats.org/presentationml/2006/main" xmlns:r="http://schemas.openxmlformats.org/officeDocument/2006/relationships" show="0">
+  <p:cSld>
+    <p:bg>
+      <p:bgPr>
+        <a:solidFill>
+          <a:srgbClr val="EEEBE4"/>
+        </a:solidFill>
+        <a:effectLst/>
+      </p:bgPr>
+    </p:bg>
+    <p:spTree>
+      <p:nvGrpSpPr>
+        <p:cNvPr id="1" name=""/>
+        <p:cNvGrpSpPr/>
+        <p:nvPr/>
+      </p:nvGrpSpPr>
+      <p:grpSpPr/>
+      <p:sp>
+        <p:nvSpPr>
+          <p:cNvPr id="2" name="Rectangle 1"/>
           <p:cNvSpPr/>
           <p:nvPr/>
         </p:nvSpPr>
         <p:spPr>
           <a:xfrm>
-            <a:off x="4419600" y="2103120"/>
-            <a:ext cx="3322320" cy="3840480"/>
+            <a:off x="0" y="0"/>
+            <a:ext cx="12191695" cy="384048"/>
           </a:xfrm>
           <a:prstGeom prst="rect">
             <a:avLst/>
           </a:prstGeom>
           <a:solidFill>
-            <a:srgbClr val="FFFFFF"/>
+            <a:srgbClr val="0B2D5B"/>
           </a:solidFill>
-          <a:ln w="15875">
-            <a:solidFill>
-              <a:srgbClr val="D8D2C6"/>
-            </a:solidFill>
+          <a:ln>
+            <a:noFill/>
           </a:ln>
           <a:effectLst/>
         </p:spPr>
@@ -5100,14 +4963,14 @@
       </p:sp>
       <p:sp>
         <p:nvSpPr>
-          <p:cNvPr id="10" name="TextBox 9"/>
+          <p:cNvPr id="3" name="TextBox 2"/>
           <p:cNvSpPr txBox="1"/>
           <p:nvPr/>
         </p:nvSpPr>
         <p:spPr>
           <a:xfrm>
-            <a:off x="4648200" y="2286000"/>
-            <a:ext cx="2865120" cy="365760"/>
+            <a:off x="548640" y="100584"/>
+            <a:ext cx="10972800" cy="274320"/>
           </a:xfrm>
           <a:prstGeom prst="rect">
             <a:avLst/>
@@ -5122,31 +4985,31 @@
           <a:p>
             <a:pPr algn="l">
               <a:spcAft>
-                <a:spcPts val="585"/>
-              </a:spcAft>
-            </a:pPr>
-            <a:r>
-              <a:rPr sz="1300" b="1" i="0">
-                <a:solidFill>
-                  <a:srgbClr val="0B2D5B"/>
+                <a:spcPts val="495"/>
+              </a:spcAft>
+            </a:pPr>
+            <a:r>
+              <a:rPr sz="1100" b="1" i="0">
+                <a:solidFill>
+                  <a:srgbClr val="FFFFFF"/>
                 </a:solidFill>
                 <a:latin typeface="Inter Tight"/>
               </a:rPr>
-              <a:t>JAE</a:t>
-            </a:r>
-          </a:p>
-        </p:txBody>
-      </p:sp>
-      <p:sp>
-        <p:nvSpPr>
-          <p:cNvPr id="11" name="TextBox 10"/>
+              <a:t>TEACHER PAGE  ·  skipped when you present  ·  Lesson plan</a:t>
+            </a:r>
+          </a:p>
+        </p:txBody>
+      </p:sp>
+      <p:sp>
+        <p:nvSpPr>
+          <p:cNvPr id="4" name="TextBox 3"/>
           <p:cNvSpPr txBox="1"/>
           <p:nvPr/>
         </p:nvSpPr>
         <p:spPr>
           <a:xfrm>
-            <a:off x="4648200" y="2743200"/>
-            <a:ext cx="2865120" cy="3017520"/>
+            <a:off x="548640" y="685800"/>
+            <a:ext cx="10972800" cy="731520"/>
           </a:xfrm>
           <a:prstGeom prst="rect">
             <a:avLst/>
@@ -5161,42 +5024,527 @@
           <a:p>
             <a:pPr algn="l">
               <a:spcAft>
-                <a:spcPts val="810"/>
-              </a:spcAft>
-            </a:pPr>
-            <a:r>
-              <a:rPr sz="1800" b="0" i="0">
+                <a:spcPts val="1530"/>
+              </a:spcAft>
+            </a:pPr>
+            <a:r>
+              <a:rPr sz="3400" b="1" i="0">
                 <a:solidFill>
                   <a:srgbClr val="1C1B19"/>
                 </a:solidFill>
                 <a:latin typeface="Source Serif 4"/>
               </a:rPr>
-              <a:t>Takes the city bus to school. The ride is 25 minutes, so he leaves 25 minutes before first bell. He's been late three times this month.</a:t>
-            </a:r>
-          </a:p>
-        </p:txBody>
-      </p:sp>
-      <p:sp>
-        <p:nvSpPr>
-          <p:cNvPr id="12" name="Rectangle 11"/>
+              <a:t>Where Did the Afternoon Go?</a:t>
+            </a:r>
+          </a:p>
+        </p:txBody>
+      </p:sp>
+      <p:sp>
+        <p:nvSpPr>
+          <p:cNvPr id="5" name="TextBox 4"/>
+          <p:cNvSpPr txBox="1"/>
+          <p:nvPr/>
+        </p:nvSpPr>
+        <p:spPr>
+          <a:xfrm>
+            <a:off x="548640" y="1325880"/>
+            <a:ext cx="10972800" cy="365760"/>
+          </a:xfrm>
+          <a:prstGeom prst="rect">
+            <a:avLst/>
+          </a:prstGeom>
+          <a:noFill/>
+        </p:spPr>
+        <p:txBody>
+          <a:bodyPr wrap="square" anchor="t" lIns="0" rIns="0" tIns="0" bIns="0">
+            <a:spAutoFit/>
+          </a:bodyPr>
+          <a:lstStyle/>
+          <a:p>
+            <a:pPr algn="l">
+              <a:spcAft>
+                <a:spcPts val="630"/>
+              </a:spcAft>
+            </a:pPr>
+            <a:r>
+              <a:rPr sz="1400" b="0" i="0">
+                <a:solidFill>
+                  <a:srgbClr val="5D5A54"/>
+                </a:solidFill>
+                <a:latin typeface="Inter Tight"/>
+              </a:rPr>
+              <a:t>Upper School  ·  45 minutes (20-minute advisory version below)  ·  9th grade advisory, health class, or a counselor-led group</a:t>
+            </a:r>
+          </a:p>
+        </p:txBody>
+      </p:sp>
+      <p:sp>
+        <p:nvSpPr>
+          <p:cNvPr id="6" name="TextBox 5"/>
+          <p:cNvSpPr txBox="1"/>
+          <p:nvPr/>
+        </p:nvSpPr>
+        <p:spPr>
+          <a:xfrm>
+            <a:off x="548640" y="1828800"/>
+            <a:ext cx="5120640" cy="4389120"/>
+          </a:xfrm>
+          <a:prstGeom prst="rect">
+            <a:avLst/>
+          </a:prstGeom>
+          <a:noFill/>
+        </p:spPr>
+        <p:txBody>
+          <a:bodyPr wrap="square" anchor="t" lIns="0" rIns="0" tIns="0" bIns="0">
+            <a:spAutoFit/>
+          </a:bodyPr>
+          <a:lstStyle/>
+          <a:p>
+            <a:pPr algn="l">
+              <a:spcAft>
+                <a:spcPts val="675"/>
+              </a:spcAft>
+            </a:pPr>
+            <a:r>
+              <a:rPr sz="1100" b="1" i="0">
+                <a:solidFill>
+                  <a:srgbClr val="0B2D5B"/>
+                </a:solidFill>
+                <a:latin typeface="Inter Tight"/>
+              </a:rPr>
+              <a:t>GOAL</a:t>
+            </a:r>
+          </a:p>
+          <a:p>
+            <a:pPr algn="l">
+              <a:spcAft>
+                <a:spcPts val="675"/>
+              </a:spcAft>
+            </a:pPr>
+            <a:r>
+              <a:rPr sz="1500" b="0" i="0">
+                <a:solidFill>
+                  <a:srgbClr val="1C1B19"/>
+                </a:solidFill>
+                <a:latin typeface="Source Serif 4"/>
+              </a:rPr>
+              <a:t>Students can explain the planning fallacy (we plan from the inside, picturing a smooth run), name where their missing time goes, and use three fixes on a real task: unpack it, plan it backward with a buffer, and start keeping their own numbers. The aim is better data. Nobody should leave thinking running late means they don't care.</a:t>
+            </a:r>
+          </a:p>
+          <a:p>
+            <a:pPr algn="l">
+              <a:spcAft>
+                <a:spcPts val="675"/>
+              </a:spcAft>
+            </a:pPr>
+            <a:r>
+              <a:rPr sz="1500" b="0" i="0">
+                <a:solidFill>
+                  <a:srgbClr val="1C1B19"/>
+                </a:solidFill>
+                <a:latin typeface="Source Serif 4"/>
+              </a:rPr>
+              <a:t/>
+            </a:r>
+          </a:p>
+          <a:p>
+            <a:pPr algn="l">
+              <a:spcAft>
+                <a:spcPts val="675"/>
+              </a:spcAft>
+            </a:pPr>
+            <a:r>
+              <a:rPr sz="1100" b="1" i="0">
+                <a:solidFill>
+                  <a:srgbClr val="0B2D5B"/>
+                </a:solidFill>
+                <a:latin typeface="Inter Tight"/>
+              </a:rPr>
+              <a:t>MATERIALS</a:t>
+            </a:r>
+          </a:p>
+          <a:p>
+            <a:pPr algn="l">
+              <a:spcAft>
+                <a:spcPts val="675"/>
+              </a:spcAft>
+            </a:pPr>
+            <a:r>
+              <a:rPr sz="1500" b="0" i="0">
+                <a:solidFill>
+                  <a:srgbClr val="1C1B19"/>
+                </a:solidFill>
+                <a:latin typeface="Source Serif 4"/>
+              </a:rPr>
+              <a:t>Index cards for the opening guess and the time-thief round</a:t>
+            </a:r>
+          </a:p>
+          <a:p>
+            <a:pPr algn="l">
+              <a:spcAft>
+                <a:spcPts val="675"/>
+              </a:spcAft>
+            </a:pPr>
+            <a:r>
+              <a:rPr sz="1500" b="0" i="0">
+                <a:solidFill>
+                  <a:srgbClr val="1C1B19"/>
+                </a:solidFill>
+                <a:latin typeface="Source Serif 4"/>
+              </a:rPr>
+              <a:t>Scrap paper for unpacking a real task</a:t>
+            </a:r>
+          </a:p>
+          <a:p>
+            <a:pPr algn="l">
+              <a:spcAft>
+                <a:spcPts val="675"/>
+              </a:spcAft>
+            </a:pPr>
+            <a:r>
+              <a:rPr sz="1500" b="0" i="0">
+                <a:solidFill>
+                  <a:srgbClr val="1C1B19"/>
+                </a:solidFill>
+                <a:latin typeface="Source Serif 4"/>
+              </a:rPr>
+              <a:t>The BVR Diner page link (last slide) to share after class</a:t>
+            </a:r>
+          </a:p>
+        </p:txBody>
+      </p:sp>
+      <p:sp>
+        <p:nvSpPr>
+          <p:cNvPr id="7" name="TextBox 6"/>
+          <p:cNvSpPr txBox="1"/>
+          <p:nvPr/>
+        </p:nvSpPr>
+        <p:spPr>
+          <a:xfrm>
+            <a:off x="6126480" y="1828800"/>
+            <a:ext cx="5486400" cy="4389120"/>
+          </a:xfrm>
+          <a:prstGeom prst="rect">
+            <a:avLst/>
+          </a:prstGeom>
+          <a:noFill/>
+        </p:spPr>
+        <p:txBody>
+          <a:bodyPr wrap="square" anchor="t" lIns="0" rIns="0" tIns="0" bIns="0">
+            <a:spAutoFit/>
+          </a:bodyPr>
+          <a:lstStyle/>
+          <a:p>
+            <a:pPr algn="l">
+              <a:spcAft>
+                <a:spcPts val="630"/>
+              </a:spcAft>
+            </a:pPr>
+            <a:r>
+              <a:rPr sz="1100" b="1" i="0">
+                <a:solidFill>
+                  <a:srgbClr val="0B2D5B"/>
+                </a:solidFill>
+                <a:latin typeface="Inter Tight"/>
+              </a:rPr>
+              <a:t>FLOW</a:t>
+            </a:r>
+          </a:p>
+          <a:p>
+            <a:pPr algn="l">
+              <a:spcAft>
+                <a:spcPts val="630"/>
+              </a:spcAft>
+            </a:pPr>
+            <a:r>
+              <a:rPr sz="1300" b="1" i="0">
+                <a:solidFill>
+                  <a:srgbClr val="F47B20"/>
+                </a:solidFill>
+                <a:latin typeface="Inter Tight"/>
+              </a:rPr>
+              <a:t>5 min   </a:t>
+            </a:r>
+            <a:r>
+              <a:rPr sz="1400" b="0" i="0">
+                <a:solidFill>
+                  <a:srgbClr val="1C1B19"/>
+                </a:solidFill>
+                <a:latin typeface="Source Serif 4"/>
+              </a:rPr>
+              <a:t>The guess (anonymous cards)</a:t>
+            </a:r>
+          </a:p>
+          <a:p>
+            <a:pPr algn="l">
+              <a:spcAft>
+                <a:spcPts val="630"/>
+              </a:spcAft>
+            </a:pPr>
+            <a:r>
+              <a:rPr sz="1300" b="1" i="0">
+                <a:solidFill>
+                  <a:srgbClr val="F47B20"/>
+                </a:solidFill>
+                <a:latin typeface="Inter Tight"/>
+              </a:rPr>
+              <a:t>6 min   </a:t>
+            </a:r>
+            <a:r>
+              <a:rPr sz="1400" b="0" i="0">
+                <a:solidFill>
+                  <a:srgbClr val="1C1B19"/>
+                </a:solidFill>
+                <a:latin typeface="Source Serif 4"/>
+              </a:rPr>
+              <a:t>The planning fallacy</a:t>
+            </a:r>
+          </a:p>
+          <a:p>
+            <a:pPr algn="l">
+              <a:spcAft>
+                <a:spcPts val="630"/>
+              </a:spcAft>
+            </a:pPr>
+            <a:r>
+              <a:rPr sz="1300" b="1" i="0">
+                <a:solidFill>
+                  <a:srgbClr val="F47B20"/>
+                </a:solidFill>
+                <a:latin typeface="Inter Tight"/>
+              </a:rPr>
+              <a:t>7 min   </a:t>
+            </a:r>
+            <a:r>
+              <a:rPr sz="1400" b="0" i="0">
+                <a:solidFill>
+                  <a:srgbClr val="1C1B19"/>
+                </a:solidFill>
+                <a:latin typeface="Source Serif 4"/>
+              </a:rPr>
+              <a:t>Why your brain lowballs time</a:t>
+            </a:r>
+          </a:p>
+          <a:p>
+            <a:pPr algn="l">
+              <a:spcAft>
+                <a:spcPts val="630"/>
+              </a:spcAft>
+            </a:pPr>
+            <a:r>
+              <a:rPr sz="1300" b="1" i="0">
+                <a:solidFill>
+                  <a:srgbClr val="F47B20"/>
+                </a:solidFill>
+                <a:latin typeface="Inter Tight"/>
+              </a:rPr>
+              <a:t>6 min   </a:t>
+            </a:r>
+            <a:r>
+              <a:rPr sz="1400" b="0" i="0">
+                <a:solidFill>
+                  <a:srgbClr val="1C1B19"/>
+                </a:solidFill>
+                <a:latin typeface="Source Serif 4"/>
+              </a:rPr>
+              <a:t>Time thieves (anonymous cards)</a:t>
+            </a:r>
+          </a:p>
+          <a:p>
+            <a:pPr algn="l">
+              <a:spcAft>
+                <a:spcPts val="630"/>
+              </a:spcAft>
+            </a:pPr>
+            <a:r>
+              <a:rPr sz="1300" b="1" i="0">
+                <a:solidFill>
+                  <a:srgbClr val="F47B20"/>
+                </a:solidFill>
+                <a:latin typeface="Inter Tight"/>
+              </a:rPr>
+              <a:t>8 min   </a:t>
+            </a:r>
+            <a:r>
+              <a:rPr sz="1400" b="0" i="0">
+                <a:solidFill>
+                  <a:srgbClr val="1C1B19"/>
+                </a:solidFill>
+                <a:latin typeface="Source Serif 4"/>
+              </a:rPr>
+              <a:t>Three plans (small groups)</a:t>
+            </a:r>
+          </a:p>
+          <a:p>
+            <a:pPr algn="l">
+              <a:spcAft>
+                <a:spcPts val="630"/>
+              </a:spcAft>
+            </a:pPr>
+            <a:r>
+              <a:rPr sz="1300" b="1" i="0">
+                <a:solidFill>
+                  <a:srgbClr val="F47B20"/>
+                </a:solidFill>
+                <a:latin typeface="Inter Tight"/>
+              </a:rPr>
+              <a:t>6 min   </a:t>
+            </a:r>
+            <a:r>
+              <a:rPr sz="1400" b="0" i="0">
+                <a:solidFill>
+                  <a:srgbClr val="1C1B19"/>
+                </a:solidFill>
+                <a:latin typeface="Source Serif 4"/>
+              </a:rPr>
+              <a:t>Three fixes that work</a:t>
+            </a:r>
+          </a:p>
+          <a:p>
+            <a:pPr algn="l">
+              <a:spcAft>
+                <a:spcPts val="630"/>
+              </a:spcAft>
+            </a:pPr>
+            <a:r>
+              <a:rPr sz="1300" b="1" i="0">
+                <a:solidFill>
+                  <a:srgbClr val="F47B20"/>
+                </a:solidFill>
+                <a:latin typeface="Inter Tight"/>
+              </a:rPr>
+              <a:t>5 min   </a:t>
+            </a:r>
+            <a:r>
+              <a:rPr sz="1400" b="0" i="0">
+                <a:solidFill>
+                  <a:srgbClr val="1C1B19"/>
+                </a:solidFill>
+                <a:latin typeface="Source Serif 4"/>
+              </a:rPr>
+              <a:t>Unpack a real task (private, then pair-share)</a:t>
+            </a:r>
+          </a:p>
+          <a:p>
+            <a:pPr algn="l">
+              <a:spcAft>
+                <a:spcPts val="630"/>
+              </a:spcAft>
+            </a:pPr>
+            <a:r>
+              <a:rPr sz="1300" b="1" i="0">
+                <a:solidFill>
+                  <a:srgbClr val="F47B20"/>
+                </a:solidFill>
+                <a:latin typeface="Inter Tight"/>
+              </a:rPr>
+              <a:t>2 min   </a:t>
+            </a:r>
+            <a:r>
+              <a:rPr sz="1400" b="0" i="0">
+                <a:solidFill>
+                  <a:srgbClr val="1C1B19"/>
+                </a:solidFill>
+                <a:latin typeface="Source Serif 4"/>
+              </a:rPr>
+              <a:t>Exit card and the BVR Diner link</a:t>
+            </a:r>
+          </a:p>
+          <a:p>
+            <a:pPr algn="l">
+              <a:spcAft>
+                <a:spcPts val="630"/>
+              </a:spcAft>
+            </a:pPr>
+            <a:r>
+              <a:rPr sz="1400" b="0" i="0">
+                <a:solidFill>
+                  <a:srgbClr val="1C1B19"/>
+                </a:solidFill>
+                <a:latin typeface="Source Serif 4"/>
+              </a:rPr>
+              <a:t/>
+            </a:r>
+          </a:p>
+          <a:p>
+            <a:pPr algn="l">
+              <a:spcAft>
+                <a:spcPts val="630"/>
+              </a:spcAft>
+            </a:pPr>
+            <a:r>
+              <a:rPr sz="1100" b="1" i="0">
+                <a:solidFill>
+                  <a:srgbClr val="0B2D5B"/>
+                </a:solidFill>
+                <a:latin typeface="Inter Tight"/>
+              </a:rPr>
+              <a:t>SHORT ON TIME (20-MINUTE ADVISORY)</a:t>
+            </a:r>
+          </a:p>
+          <a:p>
+            <a:pPr algn="l">
+              <a:spcAft>
+                <a:spcPts val="630"/>
+              </a:spcAft>
+            </a:pPr>
+            <a:r>
+              <a:rPr sz="1400" b="0" i="0">
+                <a:solidFill>
+                  <a:srgbClr val="1C1B19"/>
+                </a:solidFill>
+                <a:latin typeface="Source Serif 4"/>
+              </a:rPr>
+              <a:t>The guess (4), the planning fallacy and why (6), unpack a real task (7), exit card and link (3). Share the BVR Diner link so students get the backward plan, the buffers and the rest.</a:t>
+            </a:r>
+          </a:p>
+        </p:txBody>
+      </p:sp>
+    </p:spTree>
+  </p:cSld>
+  <p:clrMapOvr>
+    <a:masterClrMapping/>
+  </p:clrMapOvr>
+</p:sld>
+</file>
+
+<file path=ppt/slides/slide12.xml><?xml version="1.0" encoding="utf-8"?>
+<p:sld xmlns:a="http://schemas.openxmlformats.org/drawingml/2006/main" xmlns:p="http://schemas.openxmlformats.org/presentationml/2006/main" xmlns:r="http://schemas.openxmlformats.org/officeDocument/2006/relationships" show="0">
+  <p:cSld>
+    <p:bg>
+      <p:bgPr>
+        <a:solidFill>
+          <a:srgbClr val="EEEBE4"/>
+        </a:solidFill>
+        <a:effectLst/>
+      </p:bgPr>
+    </p:bg>
+    <p:spTree>
+      <p:nvGrpSpPr>
+        <p:cNvPr id="1" name=""/>
+        <p:cNvGrpSpPr/>
+        <p:nvPr/>
+      </p:nvGrpSpPr>
+      <p:grpSpPr/>
+      <p:sp>
+        <p:nvSpPr>
+          <p:cNvPr id="2" name="Rectangle 1"/>
           <p:cNvSpPr/>
           <p:nvPr/>
         </p:nvSpPr>
         <p:spPr>
           <a:xfrm>
-            <a:off x="8016239" y="2103120"/>
-            <a:ext cx="3322320" cy="3840480"/>
+            <a:off x="0" y="0"/>
+            <a:ext cx="12191695" cy="384048"/>
           </a:xfrm>
           <a:prstGeom prst="rect">
             <a:avLst/>
           </a:prstGeom>
           <a:solidFill>
-            <a:srgbClr val="FFFFFF"/>
+            <a:srgbClr val="0B2D5B"/>
           </a:solidFill>
-          <a:ln w="15875">
-            <a:solidFill>
-              <a:srgbClr val="D8D2C6"/>
-            </a:solidFill>
+          <a:ln>
+            <a:noFill/>
           </a:ln>
           <a:effectLst/>
         </p:spPr>
@@ -5224,14 +5572,14 @@
       </p:sp>
       <p:sp>
         <p:nvSpPr>
-          <p:cNvPr id="13" name="TextBox 12"/>
+          <p:cNvPr id="3" name="TextBox 2"/>
           <p:cNvSpPr txBox="1"/>
           <p:nvPr/>
         </p:nvSpPr>
         <p:spPr>
           <a:xfrm>
-            <a:off x="8244839" y="2286000"/>
-            <a:ext cx="2865120" cy="365760"/>
+            <a:off x="548640" y="100584"/>
+            <a:ext cx="10972800" cy="274320"/>
           </a:xfrm>
           <a:prstGeom prst="rect">
             <a:avLst/>
@@ -5246,31 +5594,31 @@
           <a:p>
             <a:pPr algn="l">
               <a:spcAft>
-                <a:spcPts val="585"/>
-              </a:spcAft>
-            </a:pPr>
-            <a:r>
-              <a:rPr sz="1300" b="1" i="0">
-                <a:solidFill>
-                  <a:srgbClr val="0B2D5B"/>
+                <a:spcPts val="495"/>
+              </a:spcAft>
+            </a:pPr>
+            <a:r>
+              <a:rPr sz="1100" b="1" i="0">
+                <a:solidFill>
+                  <a:srgbClr val="FFFFFF"/>
                 </a:solidFill>
                 <a:latin typeface="Inter Tight"/>
               </a:rPr>
-              <a:t>SOFIA</a:t>
-            </a:r>
-          </a:p>
-        </p:txBody>
-      </p:sp>
-      <p:sp>
-        <p:nvSpPr>
-          <p:cNvPr id="14" name="TextBox 13"/>
+              <a:t>TEACHER PAGE  ·  skipped when you present  ·  Before you teach</a:t>
+            </a:r>
+          </a:p>
+        </p:txBody>
+      </p:sp>
+      <p:sp>
+        <p:nvSpPr>
+          <p:cNvPr id="4" name="TextBox 3"/>
           <p:cNvSpPr txBox="1"/>
           <p:nvPr/>
         </p:nvSpPr>
         <p:spPr>
           <a:xfrm>
-            <a:off x="8244839" y="2743200"/>
-            <a:ext cx="2865120" cy="3017520"/>
+            <a:off x="548640" y="685800"/>
+            <a:ext cx="10972800" cy="640080"/>
           </a:xfrm>
           <a:prstGeom prst="rect">
             <a:avLst/>
@@ -5285,17 +5633,351 @@
           <a:p>
             <a:pPr algn="l">
               <a:spcAft>
-                <a:spcPts val="810"/>
-              </a:spcAft>
-            </a:pPr>
-            <a:r>
-              <a:rPr sz="1800" b="0" i="0">
+                <a:spcPts val="1350"/>
+              </a:spcAft>
+            </a:pPr>
+            <a:r>
+              <a:rPr sz="3000" b="1" i="0">
                 <a:solidFill>
                   <a:srgbClr val="1C1B19"/>
                 </a:solidFill>
                 <a:latin typeface="Source Serif 4"/>
               </a:rPr>
-              <a:t>Spends Sundays at her dad's apartment. She has four free hours and a list of seven things. She starts at the top, and the two biggest go untouched.</a:t>
+              <a:t>Before you teach</a:t>
+            </a:r>
+          </a:p>
+        </p:txBody>
+      </p:sp>
+      <p:sp>
+        <p:nvSpPr>
+          <p:cNvPr id="5" name="TextBox 4"/>
+          <p:cNvSpPr txBox="1"/>
+          <p:nvPr/>
+        </p:nvSpPr>
+        <p:spPr>
+          <a:xfrm>
+            <a:off x="548640" y="1463040"/>
+            <a:ext cx="5394960" cy="4937760"/>
+          </a:xfrm>
+          <a:prstGeom prst="rect">
+            <a:avLst/>
+          </a:prstGeom>
+          <a:noFill/>
+        </p:spPr>
+        <p:txBody>
+          <a:bodyPr wrap="square" anchor="t" lIns="0" rIns="0" tIns="0" bIns="0">
+            <a:spAutoFit/>
+          </a:bodyPr>
+          <a:lstStyle/>
+          <a:p>
+            <a:pPr algn="l">
+              <a:spcAft>
+                <a:spcPts val="585"/>
+              </a:spcAft>
+            </a:pPr>
+            <a:r>
+              <a:rPr sz="1500" b="1" i="0">
+                <a:solidFill>
+                  <a:srgbClr val="1C1B19"/>
+                </a:solidFill>
+                <a:latin typeface="Source Serif 4"/>
+              </a:rPr>
+              <a:t>Blame the plan.</a:t>
+            </a:r>
+          </a:p>
+          <a:p>
+            <a:pPr algn="l">
+              <a:spcAft>
+                <a:spcPts val="585"/>
+              </a:spcAft>
+            </a:pPr>
+            <a:r>
+              <a:rPr sz="1300" b="0" i="0">
+                <a:solidFill>
+                  <a:srgbClr val="1C1B19"/>
+                </a:solidFill>
+                <a:latin typeface="Source Serif 4"/>
+              </a:rPr>
+              <a:t>Many students have been told being late or behind means they don't care. Keep coming back to the research: the plan assumed a perfect day. Fix the plan, and the caring shows up on time.</a:t>
+            </a:r>
+          </a:p>
+          <a:p>
+            <a:pPr algn="l">
+              <a:spcAft>
+                <a:spcPts val="585"/>
+              </a:spcAft>
+            </a:pPr>
+            <a:r>
+              <a:rPr sz="1300" b="0" i="0">
+                <a:solidFill>
+                  <a:srgbClr val="1C1B19"/>
+                </a:solidFill>
+                <a:latin typeface="Source Serif 4"/>
+              </a:rPr>
+              <a:t/>
+            </a:r>
+          </a:p>
+          <a:p>
+            <a:pPr algn="l">
+              <a:spcAft>
+                <a:spcPts val="585"/>
+              </a:spcAft>
+            </a:pPr>
+            <a:r>
+              <a:rPr sz="1500" b="1" i="0">
+                <a:solidFill>
+                  <a:srgbClr val="1C1B19"/>
+                </a:solidFill>
+                <a:latin typeface="Source Serif 4"/>
+              </a:rPr>
+              <a:t>Keep schedules private.</a:t>
+            </a:r>
+          </a:p>
+          <a:p>
+            <a:pPr algn="l">
+              <a:spcAft>
+                <a:spcPts val="585"/>
+              </a:spcAft>
+            </a:pPr>
+            <a:r>
+              <a:rPr sz="1300" b="0" i="0">
+                <a:solidFill>
+                  <a:srgbClr val="1C1B19"/>
+                </a:solidFill>
+                <a:latin typeface="Source Serif 4"/>
+              </a:rPr>
+              <a:t>Students' afternoons hold things they may not want to share: a job, caring for siblings, time split between two homes, appointments. The unpacking stays on their own paper. The pair-share is one step and one time.</a:t>
+            </a:r>
+          </a:p>
+          <a:p>
+            <a:pPr algn="l">
+              <a:spcAft>
+                <a:spcPts val="585"/>
+              </a:spcAft>
+            </a:pPr>
+            <a:r>
+              <a:rPr sz="1300" b="0" i="0">
+                <a:solidFill>
+                  <a:srgbClr val="1C1B19"/>
+                </a:solidFill>
+                <a:latin typeface="Source Serif 4"/>
+              </a:rPr>
+              <a:t/>
+            </a:r>
+          </a:p>
+          <a:p>
+            <a:pPr algn="l">
+              <a:spcAft>
+                <a:spcPts val="585"/>
+              </a:spcAft>
+            </a:pPr>
+            <a:r>
+              <a:rPr sz="1500" b="1" i="0">
+                <a:solidFill>
+                  <a:srgbClr val="1C1B19"/>
+                </a:solidFill>
+                <a:latin typeface="Source Serif 4"/>
+              </a:rPr>
+              <a:t>Don't turn it into a phone lecture.</a:t>
+            </a:r>
+          </a:p>
+          <a:p>
+            <a:pPr algn="l">
+              <a:spcAft>
+                <a:spcPts val="585"/>
+              </a:spcAft>
+            </a:pPr>
+            <a:r>
+              <a:rPr sz="1300" b="0" i="0">
+                <a:solidFill>
+                  <a:srgbClr val="1C1B19"/>
+                </a:solidFill>
+                <a:latin typeface="Source Serif 4"/>
+              </a:rPr>
+              <a:t>"Scrolled longer than I meant to" will come up. Treat it like any other time thief: set the stop before you start, with an alarm.</a:t>
+            </a:r>
+          </a:p>
+          <a:p>
+            <a:pPr algn="l">
+              <a:spcAft>
+                <a:spcPts val="585"/>
+              </a:spcAft>
+            </a:pPr>
+            <a:r>
+              <a:rPr sz="1300" b="0" i="0">
+                <a:solidFill>
+                  <a:srgbClr val="1C1B19"/>
+                </a:solidFill>
+                <a:latin typeface="Source Serif 4"/>
+              </a:rPr>
+              <a:t/>
+            </a:r>
+          </a:p>
+        </p:txBody>
+      </p:sp>
+      <p:sp>
+        <p:nvSpPr>
+          <p:cNvPr id="6" name="TextBox 5"/>
+          <p:cNvSpPr txBox="1"/>
+          <p:nvPr/>
+        </p:nvSpPr>
+        <p:spPr>
+          <a:xfrm>
+            <a:off x="6217920" y="1463040"/>
+            <a:ext cx="5394960" cy="4937760"/>
+          </a:xfrm>
+          <a:prstGeom prst="rect">
+            <a:avLst/>
+          </a:prstGeom>
+          <a:noFill/>
+        </p:spPr>
+        <p:txBody>
+          <a:bodyPr wrap="square" anchor="t" lIns="0" rIns="0" tIns="0" bIns="0">
+            <a:spAutoFit/>
+          </a:bodyPr>
+          <a:lstStyle/>
+          <a:p>
+            <a:pPr algn="l">
+              <a:spcAft>
+                <a:spcPts val="585"/>
+              </a:spcAft>
+            </a:pPr>
+            <a:r>
+              <a:rPr sz="1500" b="1" i="0">
+                <a:solidFill>
+                  <a:srgbClr val="1C1B19"/>
+                </a:solidFill>
+                <a:latin typeface="Source Serif 4"/>
+              </a:rPr>
+              <a:t>Be honest about the research.</a:t>
+            </a:r>
+          </a:p>
+          <a:p>
+            <a:pPr algn="l">
+              <a:spcAft>
+                <a:spcPts val="585"/>
+              </a:spcAft>
+            </a:pPr>
+            <a:r>
+              <a:rPr sz="1300" b="0" i="0">
+                <a:solidFill>
+                  <a:srgbClr val="1C1B19"/>
+                </a:solidFill>
+                <a:latin typeface="Source Serif 4"/>
+              </a:rPr>
+              <a:t>Buehler's study was college seniors, and the task-unpacking study found estimates closer to the truth in two of four experiments. Say so. The fixes raise the odds.</a:t>
+            </a:r>
+          </a:p>
+          <a:p>
+            <a:pPr algn="l">
+              <a:spcAft>
+                <a:spcPts val="585"/>
+              </a:spcAft>
+            </a:pPr>
+            <a:r>
+              <a:rPr sz="1300" b="0" i="0">
+                <a:solidFill>
+                  <a:srgbClr val="1C1B19"/>
+                </a:solidFill>
+                <a:latin typeface="Source Serif 4"/>
+              </a:rPr>
+              <a:t/>
+            </a:r>
+          </a:p>
+          <a:p>
+            <a:pPr algn="l">
+              <a:spcAft>
+                <a:spcPts val="585"/>
+              </a:spcAft>
+            </a:pPr>
+            <a:r>
+              <a:rPr sz="1500" b="1" i="0">
+                <a:solidFill>
+                  <a:srgbClr val="1C1B19"/>
+                </a:solidFill>
+                <a:latin typeface="Source Serif 4"/>
+              </a:rPr>
+              <a:t>When it's more than planning.</a:t>
+            </a:r>
+          </a:p>
+          <a:p>
+            <a:pPr algn="l">
+              <a:spcAft>
+                <a:spcPts val="585"/>
+              </a:spcAft>
+            </a:pPr>
+            <a:r>
+              <a:rPr sz="1300" b="0" i="0">
+                <a:solidFill>
+                  <a:srgbClr val="1C1B19"/>
+                </a:solidFill>
+                <a:latin typeface="Source Serif 4"/>
+              </a:rPr>
+              <a:t>A student who is late or behind most days even with timers, buffers and a calendar, or who has had trouble feeling time pass for as long as they can remember, may have ADHD. Connect them with the learning specialist or a counselor.</a:t>
+            </a:r>
+          </a:p>
+          <a:p>
+            <a:pPr algn="l">
+              <a:spcAft>
+                <a:spcPts val="585"/>
+              </a:spcAft>
+            </a:pPr>
+            <a:r>
+              <a:rPr sz="1300" b="0" i="0">
+                <a:solidFill>
+                  <a:srgbClr val="1C1B19"/>
+                </a:solidFill>
+                <a:latin typeface="Source Serif 4"/>
+              </a:rPr>
+              <a:t/>
+            </a:r>
+          </a:p>
+          <a:p>
+            <a:pPr algn="l">
+              <a:spcAft>
+                <a:spcPts val="585"/>
+              </a:spcAft>
+            </a:pPr>
+            <a:r>
+              <a:rPr sz="1500" b="1" i="0">
+                <a:solidFill>
+                  <a:srgbClr val="1C1B19"/>
+                </a:solidFill>
+                <a:latin typeface="Source Serif 4"/>
+              </a:rPr>
+              <a:t>When time trouble is hurting more.</a:t>
+            </a:r>
+          </a:p>
+          <a:p>
+            <a:pPr algn="l">
+              <a:spcAft>
+                <a:spcPts val="585"/>
+              </a:spcAft>
+            </a:pPr>
+            <a:r>
+              <a:rPr sz="1300" b="0" i="0">
+                <a:solidFill>
+                  <a:srgbClr val="1C1B19"/>
+                </a:solidFill>
+                <a:latin typeface="Source Serif 4"/>
+              </a:rPr>
+              <a:t>If losing track of time is hurting a student's grades, sleep or friendships, or they sound overwhelmed, thank them and walk them to a counselor that day. A counselor can also talk with teachers about deadlines.</a:t>
+            </a:r>
+          </a:p>
+          <a:p>
+            <a:pPr algn="l">
+              <a:spcAft>
+                <a:spcPts val="585"/>
+              </a:spcAft>
+            </a:pPr>
+            <a:r>
+              <a:rPr sz="1300" b="0" i="0">
+                <a:solidFill>
+                  <a:srgbClr val="1C1B19"/>
+                </a:solidFill>
+                <a:latin typeface="Source Serif 4"/>
+              </a:rPr>
+              <a:t/>
             </a:r>
           </a:p>
         </p:txBody>
@@ -5308,7 +5990,1179 @@
 </p:sld>
 </file>
 
-<file path=ppt/slides/slide11.xml><?xml version="1.0" encoding="utf-8"?>
+<file path=ppt/slides/slide13.xml><?xml version="1.0" encoding="utf-8"?>
+<p:sld xmlns:a="http://schemas.openxmlformats.org/drawingml/2006/main" xmlns:p="http://schemas.openxmlformats.org/presentationml/2006/main" xmlns:r="http://schemas.openxmlformats.org/officeDocument/2006/relationships" show="0">
+  <p:cSld>
+    <p:bg>
+      <p:bgPr>
+        <a:solidFill>
+          <a:srgbClr val="EEEBE4"/>
+        </a:solidFill>
+        <a:effectLst/>
+      </p:bgPr>
+    </p:bg>
+    <p:spTree>
+      <p:nvGrpSpPr>
+        <p:cNvPr id="1" name=""/>
+        <p:cNvGrpSpPr/>
+        <p:nvPr/>
+      </p:nvGrpSpPr>
+      <p:grpSpPr/>
+      <p:sp>
+        <p:nvSpPr>
+          <p:cNvPr id="2" name="Rectangle 1"/>
+          <p:cNvSpPr/>
+          <p:nvPr/>
+        </p:nvSpPr>
+        <p:spPr>
+          <a:xfrm>
+            <a:off x="0" y="0"/>
+            <a:ext cx="12191695" cy="384048"/>
+          </a:xfrm>
+          <a:prstGeom prst="rect">
+            <a:avLst/>
+          </a:prstGeom>
+          <a:solidFill>
+            <a:srgbClr val="0B2D5B"/>
+          </a:solidFill>
+          <a:ln>
+            <a:noFill/>
+          </a:ln>
+          <a:effectLst/>
+        </p:spPr>
+        <p:style>
+          <a:lnRef idx="1">
+            <a:schemeClr val="accent1"/>
+          </a:lnRef>
+          <a:fillRef idx="3">
+            <a:schemeClr val="accent1"/>
+          </a:fillRef>
+          <a:effectRef idx="2">
+            <a:schemeClr val="accent1"/>
+          </a:effectRef>
+          <a:fontRef idx="minor">
+            <a:schemeClr val="lt1"/>
+          </a:fontRef>
+        </p:style>
+        <p:txBody>
+          <a:bodyPr rtlCol="0" anchor="ctr"/>
+          <a:lstStyle/>
+          <a:p>
+            <a:pPr algn="ctr"/>
+          </a:p>
+        </p:txBody>
+      </p:sp>
+      <p:sp>
+        <p:nvSpPr>
+          <p:cNvPr id="3" name="TextBox 2"/>
+          <p:cNvSpPr txBox="1"/>
+          <p:nvPr/>
+        </p:nvSpPr>
+        <p:spPr>
+          <a:xfrm>
+            <a:off x="548640" y="100584"/>
+            <a:ext cx="10972800" cy="274320"/>
+          </a:xfrm>
+          <a:prstGeom prst="rect">
+            <a:avLst/>
+          </a:prstGeom>
+          <a:noFill/>
+        </p:spPr>
+        <p:txBody>
+          <a:bodyPr wrap="square" anchor="t" lIns="0" rIns="0" tIns="0" bIns="0">
+            <a:spAutoFit/>
+          </a:bodyPr>
+          <a:lstStyle/>
+          <a:p>
+            <a:pPr algn="l">
+              <a:spcAft>
+                <a:spcPts val="495"/>
+              </a:spcAft>
+            </a:pPr>
+            <a:r>
+              <a:rPr sz="1100" b="1" i="0">
+                <a:solidFill>
+                  <a:srgbClr val="FFFFFF"/>
+                </a:solidFill>
+                <a:latin typeface="Inter Tight"/>
+              </a:rPr>
+              <a:t>TEACHER PAGE  ·  skipped when you present  ·  Every student in the room</a:t>
+            </a:r>
+          </a:p>
+        </p:txBody>
+      </p:sp>
+      <p:sp>
+        <p:nvSpPr>
+          <p:cNvPr id="4" name="TextBox 3"/>
+          <p:cNvSpPr txBox="1"/>
+          <p:nvPr/>
+        </p:nvSpPr>
+        <p:spPr>
+          <a:xfrm>
+            <a:off x="548640" y="685800"/>
+            <a:ext cx="10972800" cy="640080"/>
+          </a:xfrm>
+          <a:prstGeom prst="rect">
+            <a:avLst/>
+          </a:prstGeom>
+          <a:noFill/>
+        </p:spPr>
+        <p:txBody>
+          <a:bodyPr wrap="square" anchor="t" lIns="0" rIns="0" tIns="0" bIns="0">
+            <a:spAutoFit/>
+          </a:bodyPr>
+          <a:lstStyle/>
+          <a:p>
+            <a:pPr algn="l">
+              <a:spcAft>
+                <a:spcPts val="1350"/>
+              </a:spcAft>
+            </a:pPr>
+            <a:r>
+              <a:rPr sz="3000" b="1" i="0">
+                <a:solidFill>
+                  <a:srgbClr val="1C1B19"/>
+                </a:solidFill>
+                <a:latin typeface="Source Serif 4"/>
+              </a:rPr>
+              <a:t>Every student in the room</a:t>
+            </a:r>
+          </a:p>
+        </p:txBody>
+      </p:sp>
+      <p:sp>
+        <p:nvSpPr>
+          <p:cNvPr id="5" name="TextBox 4"/>
+          <p:cNvSpPr txBox="1"/>
+          <p:nvPr/>
+        </p:nvSpPr>
+        <p:spPr>
+          <a:xfrm>
+            <a:off x="548640" y="1325880"/>
+            <a:ext cx="10972800" cy="365760"/>
+          </a:xfrm>
+          <a:prstGeom prst="rect">
+            <a:avLst/>
+          </a:prstGeom>
+          <a:noFill/>
+        </p:spPr>
+        <p:txBody>
+          <a:bodyPr wrap="square" anchor="t" lIns="0" rIns="0" tIns="0" bIns="0">
+            <a:spAutoFit/>
+          </a:bodyPr>
+          <a:lstStyle/>
+          <a:p>
+            <a:pPr algn="l">
+              <a:spcAft>
+                <a:spcPts val="630"/>
+              </a:spcAft>
+            </a:pPr>
+            <a:r>
+              <a:rPr sz="1400" b="0" i="0">
+                <a:solidFill>
+                  <a:srgbClr val="5D5A54"/>
+                </a:solidFill>
+                <a:latin typeface="Inter Tight"/>
+              </a:rPr>
+              <a:t>Culture, family, identity, ability and money: what to keep in mind for this topic.</a:t>
+            </a:r>
+          </a:p>
+        </p:txBody>
+      </p:sp>
+      <p:sp>
+        <p:nvSpPr>
+          <p:cNvPr id="6" name="TextBox 5"/>
+          <p:cNvSpPr txBox="1"/>
+          <p:nvPr/>
+        </p:nvSpPr>
+        <p:spPr>
+          <a:xfrm>
+            <a:off x="548640" y="1828800"/>
+            <a:ext cx="5394960" cy="4572000"/>
+          </a:xfrm>
+          <a:prstGeom prst="rect">
+            <a:avLst/>
+          </a:prstGeom>
+          <a:noFill/>
+        </p:spPr>
+        <p:txBody>
+          <a:bodyPr wrap="square" anchor="t" lIns="0" rIns="0" tIns="0" bIns="0">
+            <a:spAutoFit/>
+          </a:bodyPr>
+          <a:lstStyle/>
+          <a:p>
+            <a:pPr algn="l">
+              <a:spcAft>
+                <a:spcPts val="585"/>
+              </a:spcAft>
+            </a:pPr>
+            <a:r>
+              <a:rPr sz="1500" b="1" i="0">
+                <a:solidFill>
+                  <a:srgbClr val="1C1B19"/>
+                </a:solidFill>
+                <a:latin typeface="Source Serif 4"/>
+              </a:rPr>
+              <a:t>ADHD and time blindness.</a:t>
+            </a:r>
+          </a:p>
+          <a:p>
+            <a:pPr algn="l">
+              <a:spcAft>
+                <a:spcPts val="585"/>
+              </a:spcAft>
+            </a:pPr>
+            <a:r>
+              <a:rPr sz="1300" b="0" i="0">
+                <a:solidFill>
+                  <a:srgbClr val="1C1B19"/>
+                </a:solidFill>
+                <a:latin typeface="Source Serif 4"/>
+              </a:rPr>
+              <a:t>Many people with ADHD describe two times, "now" and "not now." For them, outside tools (alarms, timers, a visible calendar) are the method, and willpower talk doesn't help. Avoid diagnoses as casual adjectives in your own examples.</a:t>
+            </a:r>
+          </a:p>
+          <a:p>
+            <a:pPr algn="l">
+              <a:spcAft>
+                <a:spcPts val="585"/>
+              </a:spcAft>
+            </a:pPr>
+            <a:r>
+              <a:rPr sz="1300" b="0" i="0">
+                <a:solidFill>
+                  <a:srgbClr val="1C1B19"/>
+                </a:solidFill>
+                <a:latin typeface="Source Serif 4"/>
+              </a:rPr>
+              <a:t/>
+            </a:r>
+          </a:p>
+          <a:p>
+            <a:pPr algn="l">
+              <a:spcAft>
+                <a:spcPts val="585"/>
+              </a:spcAft>
+            </a:pPr>
+            <a:r>
+              <a:rPr sz="1500" b="1" i="0">
+                <a:solidFill>
+                  <a:srgbClr val="1C1B19"/>
+                </a:solidFill>
+                <a:latin typeface="Source Serif 4"/>
+              </a:rPr>
+              <a:t>Afternoons aren't equal.</a:t>
+            </a:r>
+          </a:p>
+          <a:p>
+            <a:pPr algn="l">
+              <a:spcAft>
+                <a:spcPts val="585"/>
+              </a:spcAft>
+            </a:pPr>
+            <a:r>
+              <a:rPr sz="1300" b="0" i="0">
+                <a:solidFill>
+                  <a:srgbClr val="1C1B19"/>
+                </a:solidFill>
+                <a:latin typeface="Source Serif 4"/>
+              </a:rPr>
+              <a:t>Some students work, watch younger siblings, or take two buses home. Buffers and transitions matter more when there are more of them. Name those hours as real commitments that belong on the calendar.</a:t>
+            </a:r>
+          </a:p>
+          <a:p>
+            <a:pPr algn="l">
+              <a:spcAft>
+                <a:spcPts val="585"/>
+              </a:spcAft>
+            </a:pPr>
+            <a:r>
+              <a:rPr sz="1300" b="0" i="0">
+                <a:solidFill>
+                  <a:srgbClr val="1C1B19"/>
+                </a:solidFill>
+                <a:latin typeface="Source Serif 4"/>
+              </a:rPr>
+              <a:t/>
+            </a:r>
+          </a:p>
+          <a:p>
+            <a:pPr algn="l">
+              <a:spcAft>
+                <a:spcPts val="585"/>
+              </a:spcAft>
+            </a:pPr>
+            <a:r>
+              <a:rPr sz="1500" b="1" i="0">
+                <a:solidFill>
+                  <a:srgbClr val="1C1B19"/>
+                </a:solidFill>
+                <a:latin typeface="Source Serif 4"/>
+              </a:rPr>
+              <a:t>Two homes, two calendars.</a:t>
+            </a:r>
+          </a:p>
+          <a:p>
+            <a:pPr algn="l">
+              <a:spcAft>
+                <a:spcPts val="585"/>
+              </a:spcAft>
+            </a:pPr>
+            <a:r>
+              <a:rPr sz="1300" b="0" i="0">
+                <a:solidFill>
+                  <a:srgbClr val="1C1B19"/>
+                </a:solidFill>
+                <a:latin typeface="Source Serif 4"/>
+              </a:rPr>
+              <a:t>Students who split time between parents, or live with grandparents, foster parents or other relatives, may plan around different schedules each week. Sofia's scenario has this in it. Planning backward helps when the free days move around.</a:t>
+            </a:r>
+          </a:p>
+          <a:p>
+            <a:pPr algn="l">
+              <a:spcAft>
+                <a:spcPts val="585"/>
+              </a:spcAft>
+            </a:pPr>
+            <a:r>
+              <a:rPr sz="1300" b="0" i="0">
+                <a:solidFill>
+                  <a:srgbClr val="1C1B19"/>
+                </a:solidFill>
+                <a:latin typeface="Source Serif 4"/>
+              </a:rPr>
+              <a:t/>
+            </a:r>
+          </a:p>
+        </p:txBody>
+      </p:sp>
+      <p:sp>
+        <p:nvSpPr>
+          <p:cNvPr id="7" name="TextBox 6"/>
+          <p:cNvSpPr txBox="1"/>
+          <p:nvPr/>
+        </p:nvSpPr>
+        <p:spPr>
+          <a:xfrm>
+            <a:off x="6217920" y="1828800"/>
+            <a:ext cx="5394960" cy="4572000"/>
+          </a:xfrm>
+          <a:prstGeom prst="rect">
+            <a:avLst/>
+          </a:prstGeom>
+          <a:noFill/>
+        </p:spPr>
+        <p:txBody>
+          <a:bodyPr wrap="square" anchor="t" lIns="0" rIns="0" tIns="0" bIns="0">
+            <a:spAutoFit/>
+          </a:bodyPr>
+          <a:lstStyle/>
+          <a:p>
+            <a:pPr algn="l">
+              <a:spcAft>
+                <a:spcPts val="585"/>
+              </a:spcAft>
+            </a:pPr>
+            <a:r>
+              <a:rPr sz="1500" b="1" i="0">
+                <a:solidFill>
+                  <a:srgbClr val="1C1B19"/>
+                </a:solidFill>
+                <a:latin typeface="Source Serif 4"/>
+              </a:rPr>
+              <a:t>Tools cost nothing.</a:t>
+            </a:r>
+          </a:p>
+          <a:p>
+            <a:pPr algn="l">
+              <a:spcAft>
+                <a:spcPts val="585"/>
+              </a:spcAft>
+            </a:pPr>
+            <a:r>
+              <a:rPr sz="1300" b="0" i="0">
+                <a:solidFill>
+                  <a:srgbClr val="1C1B19"/>
+                </a:solidFill>
+                <a:latin typeface="Source Serif 4"/>
+              </a:rPr>
+              <a:t>Don't assume a planner app, a smartwatch, or a car. A paper calendar, a phone's free clock and timer, and the school's assignment page all work. Jae takes the city bus; buffers matter most when you don't control the ride.</a:t>
+            </a:r>
+          </a:p>
+          <a:p>
+            <a:pPr algn="l">
+              <a:spcAft>
+                <a:spcPts val="585"/>
+              </a:spcAft>
+            </a:pPr>
+            <a:r>
+              <a:rPr sz="1300" b="0" i="0">
+                <a:solidFill>
+                  <a:srgbClr val="1C1B19"/>
+                </a:solidFill>
+                <a:latin typeface="Source Serif 4"/>
+              </a:rPr>
+              <a:t/>
+            </a:r>
+          </a:p>
+          <a:p>
+            <a:pPr algn="l">
+              <a:spcAft>
+                <a:spcPts val="585"/>
+              </a:spcAft>
+            </a:pPr>
+            <a:r>
+              <a:rPr sz="1500" b="1" i="0">
+                <a:solidFill>
+                  <a:srgbClr val="1C1B19"/>
+                </a:solidFill>
+                <a:latin typeface="Source Serif 4"/>
+              </a:rPr>
+              <a:t>Different ideas of on time.</a:t>
+            </a:r>
+          </a:p>
+          <a:p>
+            <a:pPr algn="l">
+              <a:spcAft>
+                <a:spcPts val="585"/>
+              </a:spcAft>
+            </a:pPr>
+            <a:r>
+              <a:rPr sz="1300" b="0" i="0">
+                <a:solidFill>
+                  <a:srgbClr val="1C1B19"/>
+                </a:solidFill>
+                <a:latin typeface="Source Serif 4"/>
+              </a:rPr>
+              <a:t>Norms about time vary across families and cultures, and none is wrong. The lesson is about school and work deadlines, where the clock is fixed. Ask students to think privately about how time works at home.</a:t>
+            </a:r>
+          </a:p>
+          <a:p>
+            <a:pPr algn="l">
+              <a:spcAft>
+                <a:spcPts val="585"/>
+              </a:spcAft>
+            </a:pPr>
+            <a:r>
+              <a:rPr sz="1300" b="0" i="0">
+                <a:solidFill>
+                  <a:srgbClr val="1C1B19"/>
+                </a:solidFill>
+                <a:latin typeface="Source Serif 4"/>
+              </a:rPr>
+              <a:t/>
+            </a:r>
+          </a:p>
+          <a:p>
+            <a:pPr algn="l">
+              <a:spcAft>
+                <a:spcPts val="585"/>
+              </a:spcAft>
+            </a:pPr>
+            <a:r>
+              <a:rPr sz="1500" b="1" i="0">
+                <a:solidFill>
+                  <a:srgbClr val="1C1B19"/>
+                </a:solidFill>
+                <a:latin typeface="Source Serif 4"/>
+              </a:rPr>
+              <a:t>Faith, family and the calendar.</a:t>
+            </a:r>
+          </a:p>
+          <a:p>
+            <a:pPr algn="l">
+              <a:spcAft>
+                <a:spcPts val="585"/>
+              </a:spcAft>
+            </a:pPr>
+            <a:r>
+              <a:rPr sz="1300" b="0" i="0">
+                <a:solidFill>
+                  <a:srgbClr val="1C1B19"/>
+                </a:solidFill>
+                <a:latin typeface="Source Serif 4"/>
+              </a:rPr>
+              <a:t>Religious holidays, prayer times, fasting and family events take real time and often can't move. A backward plan lets students see those days coming and start earlier, instead of losing a week by surprise.</a:t>
+            </a:r>
+          </a:p>
+          <a:p>
+            <a:pPr algn="l">
+              <a:spcAft>
+                <a:spcPts val="585"/>
+              </a:spcAft>
+            </a:pPr>
+            <a:r>
+              <a:rPr sz="1300" b="0" i="0">
+                <a:solidFill>
+                  <a:srgbClr val="1C1B19"/>
+                </a:solidFill>
+                <a:latin typeface="Source Serif 4"/>
+              </a:rPr>
+              <a:t/>
+            </a:r>
+          </a:p>
+        </p:txBody>
+      </p:sp>
+    </p:spTree>
+  </p:cSld>
+  <p:clrMapOvr>
+    <a:masterClrMapping/>
+  </p:clrMapOvr>
+</p:sld>
+</file>
+
+<file path=ppt/slides/slide14.xml><?xml version="1.0" encoding="utf-8"?>
+<p:sld xmlns:a="http://schemas.openxmlformats.org/drawingml/2006/main" xmlns:p="http://schemas.openxmlformats.org/presentationml/2006/main" xmlns:r="http://schemas.openxmlformats.org/officeDocument/2006/relationships" show="0">
+  <p:cSld>
+    <p:bg>
+      <p:bgPr>
+        <a:solidFill>
+          <a:srgbClr val="EEEBE4"/>
+        </a:solidFill>
+        <a:effectLst/>
+      </p:bgPr>
+    </p:bg>
+    <p:spTree>
+      <p:nvGrpSpPr>
+        <p:cNvPr id="1" name=""/>
+        <p:cNvGrpSpPr/>
+        <p:nvPr/>
+      </p:nvGrpSpPr>
+      <p:grpSpPr/>
+      <p:sp>
+        <p:nvSpPr>
+          <p:cNvPr id="2" name="Rectangle 1"/>
+          <p:cNvSpPr/>
+          <p:nvPr/>
+        </p:nvSpPr>
+        <p:spPr>
+          <a:xfrm>
+            <a:off x="0" y="0"/>
+            <a:ext cx="12191695" cy="384048"/>
+          </a:xfrm>
+          <a:prstGeom prst="rect">
+            <a:avLst/>
+          </a:prstGeom>
+          <a:solidFill>
+            <a:srgbClr val="0B2D5B"/>
+          </a:solidFill>
+          <a:ln>
+            <a:noFill/>
+          </a:ln>
+          <a:effectLst/>
+        </p:spPr>
+        <p:style>
+          <a:lnRef idx="1">
+            <a:schemeClr val="accent1"/>
+          </a:lnRef>
+          <a:fillRef idx="3">
+            <a:schemeClr val="accent1"/>
+          </a:fillRef>
+          <a:effectRef idx="2">
+            <a:schemeClr val="accent1"/>
+          </a:effectRef>
+          <a:fontRef idx="minor">
+            <a:schemeClr val="lt1"/>
+          </a:fontRef>
+        </p:style>
+        <p:txBody>
+          <a:bodyPr rtlCol="0" anchor="ctr"/>
+          <a:lstStyle/>
+          <a:p>
+            <a:pPr algn="ctr"/>
+          </a:p>
+        </p:txBody>
+      </p:sp>
+      <p:sp>
+        <p:nvSpPr>
+          <p:cNvPr id="3" name="TextBox 2"/>
+          <p:cNvSpPr txBox="1"/>
+          <p:nvPr/>
+        </p:nvSpPr>
+        <p:spPr>
+          <a:xfrm>
+            <a:off x="548640" y="100584"/>
+            <a:ext cx="10972800" cy="274320"/>
+          </a:xfrm>
+          <a:prstGeom prst="rect">
+            <a:avLst/>
+          </a:prstGeom>
+          <a:noFill/>
+        </p:spPr>
+        <p:txBody>
+          <a:bodyPr wrap="square" anchor="t" lIns="0" rIns="0" tIns="0" bIns="0">
+            <a:spAutoFit/>
+          </a:bodyPr>
+          <a:lstStyle/>
+          <a:p>
+            <a:pPr algn="l">
+              <a:spcAft>
+                <a:spcPts val="495"/>
+              </a:spcAft>
+            </a:pPr>
+            <a:r>
+              <a:rPr sz="1100" b="1" i="0">
+                <a:solidFill>
+                  <a:srgbClr val="FFFFFF"/>
+                </a:solidFill>
+                <a:latin typeface="Inter Tight"/>
+              </a:rPr>
+              <a:t>TEACHER PAGE  ·  skipped when you present  ·  Background</a:t>
+            </a:r>
+          </a:p>
+        </p:txBody>
+      </p:sp>
+      <p:sp>
+        <p:nvSpPr>
+          <p:cNvPr id="4" name="TextBox 3"/>
+          <p:cNvSpPr txBox="1"/>
+          <p:nvPr/>
+        </p:nvSpPr>
+        <p:spPr>
+          <a:xfrm>
+            <a:off x="548640" y="685800"/>
+            <a:ext cx="10972800" cy="640080"/>
+          </a:xfrm>
+          <a:prstGeom prst="rect">
+            <a:avLst/>
+          </a:prstGeom>
+          <a:noFill/>
+        </p:spPr>
+        <p:txBody>
+          <a:bodyPr wrap="square" anchor="t" lIns="0" rIns="0" tIns="0" bIns="0">
+            <a:spAutoFit/>
+          </a:bodyPr>
+          <a:lstStyle/>
+          <a:p>
+            <a:pPr algn="l">
+              <a:spcAft>
+                <a:spcPts val="1350"/>
+              </a:spcAft>
+            </a:pPr>
+            <a:r>
+              <a:rPr sz="3000" b="1" i="0">
+                <a:solidFill>
+                  <a:srgbClr val="1C1B19"/>
+                </a:solidFill>
+                <a:latin typeface="Source Serif 4"/>
+              </a:rPr>
+              <a:t>What the research says</a:t>
+            </a:r>
+          </a:p>
+        </p:txBody>
+      </p:sp>
+      <p:sp>
+        <p:nvSpPr>
+          <p:cNvPr id="5" name="TextBox 4"/>
+          <p:cNvSpPr txBox="1"/>
+          <p:nvPr/>
+        </p:nvSpPr>
+        <p:spPr>
+          <a:xfrm>
+            <a:off x="548640" y="1463040"/>
+            <a:ext cx="5394960" cy="4937760"/>
+          </a:xfrm>
+          <a:prstGeom prst="rect">
+            <a:avLst/>
+          </a:prstGeom>
+          <a:noFill/>
+        </p:spPr>
+        <p:txBody>
+          <a:bodyPr wrap="square" anchor="t" lIns="0" rIns="0" tIns="0" bIns="0">
+            <a:spAutoFit/>
+          </a:bodyPr>
+          <a:lstStyle/>
+          <a:p>
+            <a:pPr algn="l">
+              <a:spcAft>
+                <a:spcPts val="585"/>
+              </a:spcAft>
+            </a:pPr>
+            <a:r>
+              <a:rPr sz="1300" b="0" i="0">
+                <a:solidFill>
+                  <a:srgbClr val="1C1B19"/>
+                </a:solidFill>
+                <a:latin typeface="Source Serif 4"/>
+              </a:rPr>
+              <a:t>College seniors gave a realistic, best-case and worst-case estimate for their thesis. The actual time beat even the worst case. Only about 30% finished within their own realistic estimate.</a:t>
+            </a:r>
+          </a:p>
+          <a:p>
+            <a:pPr algn="l">
+              <a:spcAft>
+                <a:spcPts val="585"/>
+              </a:spcAft>
+            </a:pPr>
+            <a:r>
+              <a:rPr sz="1050" b="0" i="0">
+                <a:solidFill>
+                  <a:srgbClr val="5D5A54"/>
+                </a:solidFill>
+                <a:latin typeface="Inter Tight"/>
+              </a:rPr>
+              <a:t>Buehler, Griffin and Ross, Journal of Personality and Social Psychology, 1994</a:t>
+            </a:r>
+          </a:p>
+          <a:p>
+            <a:pPr algn="l">
+              <a:spcAft>
+                <a:spcPts val="585"/>
+              </a:spcAft>
+            </a:pPr>
+            <a:r>
+              <a:rPr sz="1300" b="0" i="0">
+                <a:solidFill>
+                  <a:srgbClr val="1C1B19"/>
+                </a:solidFill>
+                <a:latin typeface="Source Serif 4"/>
+              </a:rPr>
+              <a:t>Buehler's students rarely thought about how long their past projects had actually taken, even though that history was the best predictor they had.</a:t>
+            </a:r>
+          </a:p>
+          <a:p>
+            <a:pPr algn="l">
+              <a:spcAft>
+                <a:spcPts val="585"/>
+              </a:spcAft>
+            </a:pPr>
+            <a:r>
+              <a:rPr sz="1050" b="0" i="0">
+                <a:solidFill>
+                  <a:srgbClr val="5D5A54"/>
+                </a:solidFill>
+                <a:latin typeface="Inter Tight"/>
+              </a:rPr>
+              <a:t>Buehler, Griffin and Ross, Journal of Personality and Social Psychology, 1994</a:t>
+            </a:r>
+          </a:p>
+          <a:p>
+            <a:pPr algn="l">
+              <a:spcAft>
+                <a:spcPts val="585"/>
+              </a:spcAft>
+            </a:pPr>
+            <a:r>
+              <a:rPr sz="1300" b="0" i="0">
+                <a:solidFill>
+                  <a:srgbClr val="1C1B19"/>
+                </a:solidFill>
+                <a:latin typeface="Source Serif 4"/>
+              </a:rPr>
+              <a:t>Kahneman and Tversky named the planning fallacy, and contrasted the inside view (picturing your plan going smoothly) with the outside view (how long this kind of thing usually takes).</a:t>
+            </a:r>
+          </a:p>
+          <a:p>
+            <a:pPr algn="l">
+              <a:spcAft>
+                <a:spcPts val="585"/>
+              </a:spcAft>
+            </a:pPr>
+            <a:r>
+              <a:rPr sz="1050" b="0" i="0">
+                <a:solidFill>
+                  <a:srgbClr val="5D5A54"/>
+                </a:solidFill>
+                <a:latin typeface="Inter Tight"/>
+              </a:rPr>
+              <a:t>Kahneman and Tversky, TIMS Studies in Management Science, 1979</a:t>
+            </a:r>
+          </a:p>
+        </p:txBody>
+      </p:sp>
+      <p:sp>
+        <p:nvSpPr>
+          <p:cNvPr id="6" name="TextBox 5"/>
+          <p:cNvSpPr txBox="1"/>
+          <p:nvPr/>
+        </p:nvSpPr>
+        <p:spPr>
+          <a:xfrm>
+            <a:off x="6217920" y="1463040"/>
+            <a:ext cx="5394960" cy="4937760"/>
+          </a:xfrm>
+          <a:prstGeom prst="rect">
+            <a:avLst/>
+          </a:prstGeom>
+          <a:noFill/>
+        </p:spPr>
+        <p:txBody>
+          <a:bodyPr wrap="square" anchor="t" lIns="0" rIns="0" tIns="0" bIns="0">
+            <a:spAutoFit/>
+          </a:bodyPr>
+          <a:lstStyle/>
+          <a:p>
+            <a:pPr algn="l">
+              <a:spcAft>
+                <a:spcPts val="585"/>
+              </a:spcAft>
+            </a:pPr>
+            <a:r>
+              <a:rPr sz="1300" b="0" i="0">
+                <a:solidFill>
+                  <a:srgbClr val="1C1B19"/>
+                </a:solidFill>
+                <a:latin typeface="Source Serif 4"/>
+              </a:rPr>
+              <a:t>People tend to underestimate how long past tasks took, then base future guesses on that memory.</a:t>
+            </a:r>
+          </a:p>
+          <a:p>
+            <a:pPr algn="l">
+              <a:spcAft>
+                <a:spcPts val="585"/>
+              </a:spcAft>
+            </a:pPr>
+            <a:r>
+              <a:rPr sz="1050" b="0" i="0">
+                <a:solidFill>
+                  <a:srgbClr val="5D5A54"/>
+                </a:solidFill>
+                <a:latin typeface="Inter Tight"/>
+              </a:rPr>
+              <a:t>Roy, Christenfeld and McKenzie, Psychological Bulletin, 2005</a:t>
+            </a:r>
+          </a:p>
+          <a:p>
+            <a:pPr algn="l">
+              <a:spcAft>
+                <a:spcPts val="585"/>
+              </a:spcAft>
+            </a:pPr>
+            <a:r>
+              <a:rPr sz="1300" b="0" i="0">
+                <a:solidFill>
+                  <a:srgbClr val="1C1B19"/>
+                </a:solidFill>
+                <a:latin typeface="Source Serif 4"/>
+              </a:rPr>
+              <a:t>People who broke tasks into parts gave longer estimates, and in two of four experiments those estimates were closer to the truth.</a:t>
+            </a:r>
+          </a:p>
+          <a:p>
+            <a:pPr algn="l">
+              <a:spcAft>
+                <a:spcPts val="585"/>
+              </a:spcAft>
+            </a:pPr>
+            <a:r>
+              <a:rPr sz="1050" b="0" i="0">
+                <a:solidFill>
+                  <a:srgbClr val="5D5A54"/>
+                </a:solidFill>
+                <a:latin typeface="Inter Tight"/>
+              </a:rPr>
+              <a:t>Kruger and Evans, Journal of Experimental Social Psychology, 2004</a:t>
+            </a:r>
+          </a:p>
+          <a:p>
+            <a:pPr algn="l">
+              <a:spcAft>
+                <a:spcPts val="585"/>
+              </a:spcAft>
+            </a:pPr>
+            <a:r>
+              <a:rPr sz="1300" b="0" i="0">
+                <a:solidFill>
+                  <a:srgbClr val="1C1B19"/>
+                </a:solidFill>
+                <a:latin typeface="Source Serif 4"/>
+              </a:rPr>
+              <a:t>Students who wrote down exactly when and where they'd do an assignment finished it more often and were interrupted less, shrinking the gap between plan and reality.</a:t>
+            </a:r>
+          </a:p>
+          <a:p>
+            <a:pPr algn="l">
+              <a:spcAft>
+                <a:spcPts val="585"/>
+              </a:spcAft>
+            </a:pPr>
+            <a:r>
+              <a:rPr sz="1050" b="0" i="0">
+                <a:solidFill>
+                  <a:srgbClr val="5D5A54"/>
+                </a:solidFill>
+                <a:latin typeface="Inter Tight"/>
+              </a:rPr>
+              <a:t>Koole and van 't Spijker, European Journal of Social Psychology, 2000</a:t>
+            </a:r>
+          </a:p>
+        </p:txBody>
+      </p:sp>
+    </p:spTree>
+  </p:cSld>
+  <p:clrMapOvr>
+    <a:masterClrMapping/>
+  </p:clrMapOvr>
+</p:sld>
+</file>
+
+<file path=ppt/slides/slide2.xml><?xml version="1.0" encoding="utf-8"?>
+<p:sld xmlns:a="http://schemas.openxmlformats.org/drawingml/2006/main" xmlns:p="http://schemas.openxmlformats.org/presentationml/2006/main" xmlns:r="http://schemas.openxmlformats.org/officeDocument/2006/relationships">
+  <p:cSld>
+    <p:bg>
+      <p:bgPr>
+        <a:solidFill>
+          <a:srgbClr val="0B2D5B"/>
+        </a:solidFill>
+        <a:effectLst/>
+      </p:bgPr>
+    </p:bg>
+    <p:spTree>
+      <p:nvGrpSpPr>
+        <p:cNvPr id="1" name=""/>
+        <p:cNvGrpSpPr/>
+        <p:nvPr/>
+      </p:nvGrpSpPr>
+      <p:grpSpPr/>
+      <p:sp>
+        <p:nvSpPr>
+          <p:cNvPr id="2" name="Rectangle 1"/>
+          <p:cNvSpPr/>
+          <p:nvPr/>
+        </p:nvSpPr>
+        <p:spPr>
+          <a:xfrm>
+            <a:off x="548640" y="502920"/>
+            <a:ext cx="457200" cy="54864"/>
+          </a:xfrm>
+          <a:prstGeom prst="rect">
+            <a:avLst/>
+          </a:prstGeom>
+          <a:solidFill>
+            <a:srgbClr val="F47B20"/>
+          </a:solidFill>
+          <a:ln>
+            <a:noFill/>
+          </a:ln>
+          <a:effectLst/>
+        </p:spPr>
+        <p:style>
+          <a:lnRef idx="1">
+            <a:schemeClr val="accent1"/>
+          </a:lnRef>
+          <a:fillRef idx="3">
+            <a:schemeClr val="accent1"/>
+          </a:fillRef>
+          <a:effectRef idx="2">
+            <a:schemeClr val="accent1"/>
+          </a:effectRef>
+          <a:fontRef idx="minor">
+            <a:schemeClr val="lt1"/>
+          </a:fontRef>
+        </p:style>
+        <p:txBody>
+          <a:bodyPr rtlCol="0" anchor="ctr"/>
+          <a:lstStyle/>
+          <a:p>
+            <a:pPr algn="ctr"/>
+          </a:p>
+        </p:txBody>
+      </p:sp>
+      <p:sp>
+        <p:nvSpPr>
+          <p:cNvPr id="3" name="TextBox 2"/>
+          <p:cNvSpPr txBox="1"/>
+          <p:nvPr/>
+        </p:nvSpPr>
+        <p:spPr>
+          <a:xfrm>
+            <a:off x="1143000" y="393192"/>
+            <a:ext cx="8229600" cy="274320"/>
+          </a:xfrm>
+          <a:prstGeom prst="rect">
+            <a:avLst/>
+          </a:prstGeom>
+          <a:noFill/>
+        </p:spPr>
+        <p:txBody>
+          <a:bodyPr wrap="square" anchor="t" lIns="0" rIns="0" tIns="0" bIns="0">
+            <a:spAutoFit/>
+          </a:bodyPr>
+          <a:lstStyle/>
+          <a:p>
+            <a:pPr algn="l">
+              <a:spcAft>
+                <a:spcPts val="540"/>
+              </a:spcAft>
+            </a:pPr>
+            <a:r>
+              <a:rPr sz="1200" b="1" i="0">
+                <a:solidFill>
+                  <a:srgbClr val="5D5A54"/>
+                </a:solidFill>
+                <a:latin typeface="Inter Tight"/>
+              </a:rPr>
+              <a:t>WHERE DID THE AFTERNOON GO?</a:t>
+            </a:r>
+          </a:p>
+        </p:txBody>
+      </p:sp>
+      <p:sp>
+        <p:nvSpPr>
+          <p:cNvPr id="4" name="TextBox 3"/>
+          <p:cNvSpPr txBox="1"/>
+          <p:nvPr/>
+        </p:nvSpPr>
+        <p:spPr>
+          <a:xfrm>
+            <a:off x="8229600" y="6400800"/>
+            <a:ext cx="3410712" cy="274320"/>
+          </a:xfrm>
+          <a:prstGeom prst="rect">
+            <a:avLst/>
+          </a:prstGeom>
+          <a:noFill/>
+        </p:spPr>
+        <p:txBody>
+          <a:bodyPr wrap="square" anchor="t" lIns="0" rIns="0" tIns="0" bIns="0">
+            <a:spAutoFit/>
+          </a:bodyPr>
+          <a:lstStyle/>
+          <a:p>
+            <a:pPr algn="r">
+              <a:spcAft>
+                <a:spcPts val="450"/>
+              </a:spcAft>
+            </a:pPr>
+            <a:r>
+              <a:rPr sz="1000" b="0" i="0">
+                <a:solidFill>
+                  <a:srgbClr val="5D5A54"/>
+                </a:solidFill>
+                <a:latin typeface="Inter Tight"/>
+              </a:rPr>
+              <a:t>Beaver Counseling</a:t>
+            </a:r>
+          </a:p>
+        </p:txBody>
+      </p:sp>
+      <p:sp>
+        <p:nvSpPr>
+          <p:cNvPr id="5" name="TextBox 4"/>
+          <p:cNvSpPr txBox="1"/>
+          <p:nvPr/>
+        </p:nvSpPr>
+        <p:spPr>
+          <a:xfrm>
+            <a:off x="822960" y="1371600"/>
+            <a:ext cx="10515600" cy="2377440"/>
+          </a:xfrm>
+          <a:prstGeom prst="rect">
+            <a:avLst/>
+          </a:prstGeom>
+          <a:noFill/>
+        </p:spPr>
+        <p:txBody>
+          <a:bodyPr wrap="square" anchor="b" lIns="0" rIns="0" tIns="0" bIns="0">
+            <a:spAutoFit/>
+          </a:bodyPr>
+          <a:lstStyle/>
+          <a:p>
+            <a:pPr algn="l">
+              <a:spcAft>
+                <a:spcPts val="2430"/>
+              </a:spcAft>
+            </a:pPr>
+            <a:r>
+              <a:rPr sz="5400" b="1" i="0">
+                <a:solidFill>
+                  <a:srgbClr val="FFFFFF"/>
+                </a:solidFill>
+                <a:latin typeface="Source Serif 4"/>
+              </a:rPr>
+              <a:t>Where Did the Afternoon Go?</a:t>
+            </a:r>
+          </a:p>
+        </p:txBody>
+      </p:sp>
+      <p:sp>
+        <p:nvSpPr>
+          <p:cNvPr id="6" name="TextBox 5"/>
+          <p:cNvSpPr txBox="1"/>
+          <p:nvPr/>
+        </p:nvSpPr>
+        <p:spPr>
+          <a:xfrm>
+            <a:off x="822960" y="3931920"/>
+            <a:ext cx="10515600" cy="914400"/>
+          </a:xfrm>
+          <a:prstGeom prst="rect">
+            <a:avLst/>
+          </a:prstGeom>
+          <a:noFill/>
+        </p:spPr>
+        <p:txBody>
+          <a:bodyPr wrap="square" anchor="t" lIns="0" rIns="0" tIns="0" bIns="0">
+            <a:spAutoFit/>
+          </a:bodyPr>
+          <a:lstStyle/>
+          <a:p>
+            <a:pPr algn="l">
+              <a:spcAft>
+                <a:spcPts val="1080"/>
+              </a:spcAft>
+            </a:pPr>
+            <a:r>
+              <a:rPr sz="2400" b="0" i="1">
+                <a:solidFill>
+                  <a:srgbClr val="E8E4DA"/>
+                </a:solidFill>
+                <a:latin typeface="Source Serif 4"/>
+              </a:rPr>
+              <a:t>"It'll take an hour." It did not take an hour.</a:t>
+            </a:r>
+          </a:p>
+        </p:txBody>
+      </p:sp>
+      <p:sp>
+        <p:nvSpPr>
+          <p:cNvPr id="7" name="TextBox 6"/>
+          <p:cNvSpPr txBox="1"/>
+          <p:nvPr/>
+        </p:nvSpPr>
+        <p:spPr>
+          <a:xfrm>
+            <a:off x="822960" y="6035040"/>
+            <a:ext cx="7315200" cy="365760"/>
+          </a:xfrm>
+          <a:prstGeom prst="rect">
+            <a:avLst/>
+          </a:prstGeom>
+          <a:noFill/>
+        </p:spPr>
+        <p:txBody>
+          <a:bodyPr wrap="square" anchor="t" lIns="0" rIns="0" tIns="0" bIns="0">
+            <a:spAutoFit/>
+          </a:bodyPr>
+          <a:lstStyle/>
+          <a:p>
+            <a:pPr algn="l">
+              <a:spcAft>
+                <a:spcPts val="585"/>
+              </a:spcAft>
+            </a:pPr>
+            <a:r>
+              <a:rPr sz="1300" b="0" i="0">
+                <a:solidFill>
+                  <a:srgbClr val="E8E4DA"/>
+                </a:solidFill>
+                <a:latin typeface="Inter Tight"/>
+              </a:rPr>
+              <a:t>Beaver Upper School · Counseling</a:t>
+            </a:r>
+          </a:p>
+        </p:txBody>
+      </p:sp>
+    </p:spTree>
+  </p:cSld>
+  <p:clrMapOvr>
+    <a:masterClrMapping/>
+  </p:clrMapOvr>
+</p:sld>
+</file>
+
+<file path=ppt/slides/slide3.xml><?xml version="1.0" encoding="utf-8"?>
 <p:sld xmlns:a="http://schemas.openxmlformats.org/drawingml/2006/main" xmlns:p="http://schemas.openxmlformats.org/presentationml/2006/main" xmlns:r="http://schemas.openxmlformats.org/officeDocument/2006/relationships">
   <p:cSld>
     <p:bg>
@@ -5404,7 +7258,7 @@
                 </a:solidFill>
                 <a:latin typeface="Inter Tight"/>
               </a:rPr>
-              <a:t>WHAT WORKS</a:t>
+              <a:t>THE GUESS</a:t>
             </a:r>
           </a:p>
         </p:txBody>
@@ -5450,14 +7304,97 @@
       </p:sp>
       <p:sp>
         <p:nvSpPr>
-          <p:cNvPr id="5" name="TextBox 4"/>
+          <p:cNvPr id="5" name="Rectangle 4"/>
+          <p:cNvSpPr/>
+          <p:nvPr/>
+        </p:nvSpPr>
+        <p:spPr>
+          <a:xfrm>
+            <a:off x="822960" y="1371600"/>
+            <a:ext cx="73152" cy="3566160"/>
+          </a:xfrm>
+          <a:prstGeom prst="rect">
+            <a:avLst/>
+          </a:prstGeom>
+          <a:solidFill>
+            <a:srgbClr val="F47B20"/>
+          </a:solidFill>
+          <a:ln>
+            <a:noFill/>
+          </a:ln>
+          <a:effectLst/>
+        </p:spPr>
+        <p:style>
+          <a:lnRef idx="1">
+            <a:schemeClr val="accent1"/>
+          </a:lnRef>
+          <a:fillRef idx="3">
+            <a:schemeClr val="accent1"/>
+          </a:fillRef>
+          <a:effectRef idx="2">
+            <a:schemeClr val="accent1"/>
+          </a:effectRef>
+          <a:fontRef idx="minor">
+            <a:schemeClr val="lt1"/>
+          </a:fontRef>
+        </p:style>
+        <p:txBody>
+          <a:bodyPr rtlCol="0" anchor="ctr"/>
+          <a:lstStyle/>
+          <a:p>
+            <a:pPr algn="ctr"/>
+          </a:p>
+        </p:txBody>
+      </p:sp>
+      <p:sp>
+        <p:nvSpPr>
+          <p:cNvPr id="6" name="TextBox 5"/>
           <p:cNvSpPr txBox="1"/>
           <p:nvPr/>
         </p:nvSpPr>
         <p:spPr>
           <a:xfrm>
-            <a:off x="822960" y="1005840"/>
-            <a:ext cx="10515600" cy="1097280"/>
+            <a:off x="1188720" y="1371600"/>
+            <a:ext cx="10058400" cy="3566160"/>
+          </a:xfrm>
+          <a:prstGeom prst="rect">
+            <a:avLst/>
+          </a:prstGeom>
+          <a:noFill/>
+        </p:spPr>
+        <p:txBody>
+          <a:bodyPr wrap="square" anchor="ctr" lIns="0" rIns="0" tIns="0" bIns="0">
+            <a:spAutoFit/>
+          </a:bodyPr>
+          <a:lstStyle/>
+          <a:p>
+            <a:pPr algn="l">
+              <a:spcAft>
+                <a:spcPts val="1800"/>
+              </a:spcAft>
+            </a:pPr>
+            <a:r>
+              <a:rPr sz="4000" b="0" i="1">
+                <a:solidFill>
+                  <a:srgbClr val="1C1B19"/>
+                </a:solidFill>
+                <a:latin typeface="Source Serif 4"/>
+              </a:rPr>
+              <a:t>What percent of college seniors finished their thesis on time?</a:t>
+            </a:r>
+          </a:p>
+        </p:txBody>
+      </p:sp>
+      <p:sp>
+        <p:nvSpPr>
+          <p:cNvPr id="7" name="TextBox 6"/>
+          <p:cNvSpPr txBox="1"/>
+          <p:nvPr/>
+        </p:nvSpPr>
+        <p:spPr>
+          <a:xfrm>
+            <a:off x="1188720" y="5120640"/>
+            <a:ext cx="10058400" cy="914400"/>
           </a:xfrm>
           <a:prstGeom prst="rect">
             <a:avLst/>
@@ -5472,393 +7409,17 @@
           <a:p>
             <a:pPr algn="l">
               <a:spcAft>
-                <a:spcPts val="1620"/>
-              </a:spcAft>
-            </a:pPr>
-            <a:r>
-              <a:rPr sz="3600" b="1" i="0">
-                <a:solidFill>
-                  <a:srgbClr val="1C1B19"/>
-                </a:solidFill>
-                <a:latin typeface="Source Serif 4"/>
-              </a:rPr>
-              <a:t>Fix the estimate, then the calendar</a:t>
-            </a:r>
-          </a:p>
-        </p:txBody>
-      </p:sp>
-      <p:sp>
-        <p:nvSpPr>
-          <p:cNvPr id="6" name="TextBox 5"/>
-          <p:cNvSpPr txBox="1"/>
-          <p:nvPr/>
-        </p:nvSpPr>
-        <p:spPr>
-          <a:xfrm>
-            <a:off x="822960" y="2194560"/>
-            <a:ext cx="548640" cy="1005840"/>
-          </a:xfrm>
-          <a:prstGeom prst="rect">
-            <a:avLst/>
-          </a:prstGeom>
-          <a:noFill/>
-        </p:spPr>
-        <p:txBody>
-          <a:bodyPr wrap="square" anchor="t" lIns="0" rIns="0" tIns="0" bIns="0">
-            <a:spAutoFit/>
-          </a:bodyPr>
-          <a:lstStyle/>
-          <a:p>
-            <a:pPr algn="l">
-              <a:spcAft>
-                <a:spcPts val="1170"/>
-              </a:spcAft>
-            </a:pPr>
-            <a:r>
-              <a:rPr sz="2600" b="1" i="0">
-                <a:solidFill>
-                  <a:srgbClr val="F47B20"/>
-                </a:solidFill>
-                <a:latin typeface="Source Serif 4"/>
-              </a:rPr>
-              <a:t>1</a:t>
-            </a:r>
-          </a:p>
-        </p:txBody>
-      </p:sp>
-      <p:sp>
-        <p:nvSpPr>
-          <p:cNvPr id="7" name="TextBox 6"/>
-          <p:cNvSpPr txBox="1"/>
-          <p:nvPr/>
-        </p:nvSpPr>
-        <p:spPr>
-          <a:xfrm>
-            <a:off x="1463040" y="2231136"/>
-            <a:ext cx="9875520" cy="1005840"/>
-          </a:xfrm>
-          <a:prstGeom prst="rect">
-            <a:avLst/>
-          </a:prstGeom>
-          <a:noFill/>
-        </p:spPr>
-        <p:txBody>
-          <a:bodyPr wrap="square" anchor="t" lIns="0" rIns="0" tIns="0" bIns="0">
-            <a:spAutoFit/>
-          </a:bodyPr>
-          <a:lstStyle/>
-          <a:p>
-            <a:pPr algn="l">
-              <a:spcAft>
-                <a:spcPts val="945"/>
-              </a:spcAft>
-            </a:pPr>
-            <a:r>
-              <a:rPr sz="2100" b="1" i="0">
-                <a:solidFill>
-                  <a:srgbClr val="1C1B19"/>
-                </a:solidFill>
-                <a:latin typeface="Source Serif 4"/>
-              </a:rPr>
-              <a:t>Use your own data.</a:t>
-            </a:r>
-          </a:p>
-          <a:p>
-            <a:pPr algn="l">
-              <a:spcAft>
-                <a:spcPts val="945"/>
-              </a:spcAft>
-            </a:pPr>
-            <a:r>
-              <a:rPr sz="1600" b="0" i="0">
+                <a:spcPts val="810"/>
+              </a:spcAft>
+            </a:pPr>
+            <a:r>
+              <a:rPr sz="1800" b="0" i="0">
                 <a:solidFill>
                   <a:srgbClr val="5D5A54"/>
                 </a:solidFill>
-                <a:latin typeface="Source Serif 4"/>
-              </a:rPr>
-              <a:t>Time a kind of task three times. Use that number.</a:t>
-            </a:r>
-          </a:p>
-        </p:txBody>
-      </p:sp>
-      <p:sp>
-        <p:nvSpPr>
-          <p:cNvPr id="8" name="TextBox 7"/>
-          <p:cNvSpPr txBox="1"/>
-          <p:nvPr/>
-        </p:nvSpPr>
-        <p:spPr>
-          <a:xfrm>
-            <a:off x="822960" y="3200400"/>
-            <a:ext cx="548640" cy="1005840"/>
-          </a:xfrm>
-          <a:prstGeom prst="rect">
-            <a:avLst/>
-          </a:prstGeom>
-          <a:noFill/>
-        </p:spPr>
-        <p:txBody>
-          <a:bodyPr wrap="square" anchor="t" lIns="0" rIns="0" tIns="0" bIns="0">
-            <a:spAutoFit/>
-          </a:bodyPr>
-          <a:lstStyle/>
-          <a:p>
-            <a:pPr algn="l">
-              <a:spcAft>
-                <a:spcPts val="1170"/>
-              </a:spcAft>
-            </a:pPr>
-            <a:r>
-              <a:rPr sz="2600" b="1" i="0">
-                <a:solidFill>
-                  <a:srgbClr val="F47B20"/>
-                </a:solidFill>
-                <a:latin typeface="Source Serif 4"/>
-              </a:rPr>
-              <a:t>2</a:t>
-            </a:r>
-          </a:p>
-        </p:txBody>
-      </p:sp>
-      <p:sp>
-        <p:nvSpPr>
-          <p:cNvPr id="9" name="TextBox 8"/>
-          <p:cNvSpPr txBox="1"/>
-          <p:nvPr/>
-        </p:nvSpPr>
-        <p:spPr>
-          <a:xfrm>
-            <a:off x="1463040" y="3236976"/>
-            <a:ext cx="9875520" cy="1005840"/>
-          </a:xfrm>
-          <a:prstGeom prst="rect">
-            <a:avLst/>
-          </a:prstGeom>
-          <a:noFill/>
-        </p:spPr>
-        <p:txBody>
-          <a:bodyPr wrap="square" anchor="t" lIns="0" rIns="0" tIns="0" bIns="0">
-            <a:spAutoFit/>
-          </a:bodyPr>
-          <a:lstStyle/>
-          <a:p>
-            <a:pPr algn="l">
-              <a:spcAft>
-                <a:spcPts val="945"/>
-              </a:spcAft>
-            </a:pPr>
-            <a:r>
-              <a:rPr sz="2100" b="1" i="0">
-                <a:solidFill>
-                  <a:srgbClr val="1C1B19"/>
-                </a:solidFill>
-                <a:latin typeface="Source Serif 4"/>
-              </a:rPr>
-              <a:t>Unpack the task.</a:t>
-            </a:r>
-          </a:p>
-          <a:p>
-            <a:pPr algn="l">
-              <a:spcAft>
-                <a:spcPts val="945"/>
-              </a:spcAft>
-            </a:pPr>
-            <a:r>
-              <a:rPr sz="1600" b="0" i="0">
-                <a:solidFill>
-                  <a:srgbClr val="5D5A54"/>
-                </a:solidFill>
-                <a:latin typeface="Source Serif 4"/>
-              </a:rPr>
-              <a:t>List every piece before you guess.</a:t>
-            </a:r>
-          </a:p>
-        </p:txBody>
-      </p:sp>
-      <p:sp>
-        <p:nvSpPr>
-          <p:cNvPr id="10" name="TextBox 9"/>
-          <p:cNvSpPr txBox="1"/>
-          <p:nvPr/>
-        </p:nvSpPr>
-        <p:spPr>
-          <a:xfrm>
-            <a:off x="822960" y="4206240"/>
-            <a:ext cx="548640" cy="1005840"/>
-          </a:xfrm>
-          <a:prstGeom prst="rect">
-            <a:avLst/>
-          </a:prstGeom>
-          <a:noFill/>
-        </p:spPr>
-        <p:txBody>
-          <a:bodyPr wrap="square" anchor="t" lIns="0" rIns="0" tIns="0" bIns="0">
-            <a:spAutoFit/>
-          </a:bodyPr>
-          <a:lstStyle/>
-          <a:p>
-            <a:pPr algn="l">
-              <a:spcAft>
-                <a:spcPts val="1170"/>
-              </a:spcAft>
-            </a:pPr>
-            <a:r>
-              <a:rPr sz="2600" b="1" i="0">
-                <a:solidFill>
-                  <a:srgbClr val="F47B20"/>
-                </a:solidFill>
-                <a:latin typeface="Source Serif 4"/>
-              </a:rPr>
-              <a:t>3</a:t>
-            </a:r>
-          </a:p>
-        </p:txBody>
-      </p:sp>
-      <p:sp>
-        <p:nvSpPr>
-          <p:cNvPr id="11" name="TextBox 10"/>
-          <p:cNvSpPr txBox="1"/>
-          <p:nvPr/>
-        </p:nvSpPr>
-        <p:spPr>
-          <a:xfrm>
-            <a:off x="1463040" y="4242816"/>
-            <a:ext cx="9875520" cy="1005840"/>
-          </a:xfrm>
-          <a:prstGeom prst="rect">
-            <a:avLst/>
-          </a:prstGeom>
-          <a:noFill/>
-        </p:spPr>
-        <p:txBody>
-          <a:bodyPr wrap="square" anchor="t" lIns="0" rIns="0" tIns="0" bIns="0">
-            <a:spAutoFit/>
-          </a:bodyPr>
-          <a:lstStyle/>
-          <a:p>
-            <a:pPr algn="l">
-              <a:spcAft>
-                <a:spcPts val="945"/>
-              </a:spcAft>
-            </a:pPr>
-            <a:r>
-              <a:rPr sz="2100" b="1" i="0">
-                <a:solidFill>
-                  <a:srgbClr val="1C1B19"/>
-                </a:solidFill>
-                <a:latin typeface="Source Serif 4"/>
-              </a:rPr>
-              <a:t>Decide where and when.</a:t>
-            </a:r>
-          </a:p>
-          <a:p>
-            <a:pPr algn="l">
-              <a:spcAft>
-                <a:spcPts val="945"/>
-              </a:spcAft>
-            </a:pPr>
-            <a:r>
-              <a:rPr sz="1600" b="0" i="0">
-                <a:solidFill>
-                  <a:srgbClr val="5D5A54"/>
-                </a:solidFill>
-                <a:latin typeface="Source Serif 4"/>
-              </a:rPr>
-              <a:t>"Tuesday, 4:00, library" beats "sometime this week."</a:t>
-            </a:r>
-          </a:p>
-        </p:txBody>
-      </p:sp>
-      <p:sp>
-        <p:nvSpPr>
-          <p:cNvPr id="12" name="TextBox 11"/>
-          <p:cNvSpPr txBox="1"/>
-          <p:nvPr/>
-        </p:nvSpPr>
-        <p:spPr>
-          <a:xfrm>
-            <a:off x="822960" y="5212080"/>
-            <a:ext cx="548640" cy="1005840"/>
-          </a:xfrm>
-          <a:prstGeom prst="rect">
-            <a:avLst/>
-          </a:prstGeom>
-          <a:noFill/>
-        </p:spPr>
-        <p:txBody>
-          <a:bodyPr wrap="square" anchor="t" lIns="0" rIns="0" tIns="0" bIns="0">
-            <a:spAutoFit/>
-          </a:bodyPr>
-          <a:lstStyle/>
-          <a:p>
-            <a:pPr algn="l">
-              <a:spcAft>
-                <a:spcPts val="1170"/>
-              </a:spcAft>
-            </a:pPr>
-            <a:r>
-              <a:rPr sz="2600" b="1" i="0">
-                <a:solidFill>
-                  <a:srgbClr val="F47B20"/>
-                </a:solidFill>
-                <a:latin typeface="Source Serif 4"/>
-              </a:rPr>
-              <a:t>4</a:t>
-            </a:r>
-          </a:p>
-        </p:txBody>
-      </p:sp>
-      <p:sp>
-        <p:nvSpPr>
-          <p:cNvPr id="13" name="TextBox 12"/>
-          <p:cNvSpPr txBox="1"/>
-          <p:nvPr/>
-        </p:nvSpPr>
-        <p:spPr>
-          <a:xfrm>
-            <a:off x="1463040" y="5248656"/>
-            <a:ext cx="9875520" cy="1005840"/>
-          </a:xfrm>
-          <a:prstGeom prst="rect">
-            <a:avLst/>
-          </a:prstGeom>
-          <a:noFill/>
-        </p:spPr>
-        <p:txBody>
-          <a:bodyPr wrap="square" anchor="t" lIns="0" rIns="0" tIns="0" bIns="0">
-            <a:spAutoFit/>
-          </a:bodyPr>
-          <a:lstStyle/>
-          <a:p>
-            <a:pPr algn="l">
-              <a:spcAft>
-                <a:spcPts val="945"/>
-              </a:spcAft>
-            </a:pPr>
-            <a:r>
-              <a:rPr sz="2100" b="1" i="0">
-                <a:solidFill>
-                  <a:srgbClr val="1C1B19"/>
-                </a:solidFill>
-                <a:latin typeface="Source Serif 4"/>
-              </a:rPr>
-              <a:t>Plan backward, with a buffer.</a:t>
-            </a:r>
-          </a:p>
-          <a:p>
-            <a:pPr algn="l">
-              <a:spcAft>
-                <a:spcPts val="945"/>
-              </a:spcAft>
-            </a:pPr>
-            <a:r>
-              <a:rPr sz="1600" b="0" i="0">
-                <a:solidFill>
-                  <a:srgbClr val="5D5A54"/>
-                </a:solidFill>
-                <a:latin typeface="Source Serif 4"/>
-              </a:rPr>
-              <a:t>Start at the due date. Leave open time before it.</a:t>
+                <a:latin typeface="Inter Tight"/>
+              </a:rPr>
+              <a:t>On time means within their own realistic estimate. Write a number on your card. No names.</a:t>
             </a:r>
           </a:p>
         </p:txBody>
@@ -5871,7 +7432,7 @@
 </p:sld>
 </file>
 
-<file path=ppt/slides/slide12.xml><?xml version="1.0" encoding="utf-8"?>
+<file path=ppt/slides/slide4.xml><?xml version="1.0" encoding="utf-8"?>
 <p:sld xmlns:a="http://schemas.openxmlformats.org/drawingml/2006/main" xmlns:p="http://schemas.openxmlformats.org/presentationml/2006/main" xmlns:r="http://schemas.openxmlformats.org/officeDocument/2006/relationships">
   <p:cSld>
     <p:bg>
@@ -5967,7 +7528,7 @@
                 </a:solidFill>
                 <a:latin typeface="Inter Tight"/>
               </a:rPr>
-              <a:t>TRY IT</a:t>
+              <a:t>THE PLANNING FALLACY</a:t>
             </a:r>
           </a:p>
         </p:txBody>
@@ -6013,45 +7574,40 @@
       </p:sp>
       <p:sp>
         <p:nvSpPr>
-          <p:cNvPr id="5" name="Rectangle 4"/>
-          <p:cNvSpPr/>
+          <p:cNvPr id="5" name="TextBox 4"/>
+          <p:cNvSpPr txBox="1"/>
           <p:nvPr/>
         </p:nvSpPr>
         <p:spPr>
           <a:xfrm>
-            <a:off x="822960" y="1371600"/>
-            <a:ext cx="73152" cy="3566160"/>
-          </a:xfrm>
-          <a:prstGeom prst="rect">
-            <a:avLst/>
-          </a:prstGeom>
-          <a:solidFill>
-            <a:srgbClr val="F47B20"/>
-          </a:solidFill>
-          <a:ln>
-            <a:noFill/>
-          </a:ln>
-          <a:effectLst/>
-        </p:spPr>
-        <p:style>
-          <a:lnRef idx="1">
-            <a:schemeClr val="accent1"/>
-          </a:lnRef>
-          <a:fillRef idx="3">
-            <a:schemeClr val="accent1"/>
-          </a:fillRef>
-          <a:effectRef idx="2">
-            <a:schemeClr val="accent1"/>
-          </a:effectRef>
-          <a:fontRef idx="minor">
-            <a:schemeClr val="lt1"/>
-          </a:fontRef>
-        </p:style>
-        <p:txBody>
-          <a:bodyPr rtlCol="0" anchor="ctr"/>
-          <a:lstStyle/>
-          <a:p>
-            <a:pPr algn="ctr"/>
+            <a:off x="822960" y="1463040"/>
+            <a:ext cx="10515600" cy="3291840"/>
+          </a:xfrm>
+          <a:prstGeom prst="rect">
+            <a:avLst/>
+          </a:prstGeom>
+          <a:noFill/>
+        </p:spPr>
+        <p:txBody>
+          <a:bodyPr wrap="square" anchor="ctr" lIns="0" rIns="0" tIns="0" bIns="0">
+            <a:spAutoFit/>
+          </a:bodyPr>
+          <a:lstStyle/>
+          <a:p>
+            <a:pPr algn="l">
+              <a:spcAft>
+                <a:spcPts val="2070"/>
+              </a:spcAft>
+            </a:pPr>
+            <a:r>
+              <a:rPr sz="4600" b="1" i="0">
+                <a:solidFill>
+                  <a:srgbClr val="1C1B19"/>
+                </a:solidFill>
+                <a:latin typeface="Source Serif 4"/>
+              </a:rPr>
+              <a:t>Even the worst case was too hopeful.</a:t>
+            </a:r>
           </a:p>
         </p:txBody>
       </p:sp>
@@ -6063,47 +7619,8 @@
         </p:nvSpPr>
         <p:spPr>
           <a:xfrm>
-            <a:off x="1188720" y="1371600"/>
-            <a:ext cx="10058400" cy="3566160"/>
-          </a:xfrm>
-          <a:prstGeom prst="rect">
-            <a:avLst/>
-          </a:prstGeom>
-          <a:noFill/>
-        </p:spPr>
-        <p:txBody>
-          <a:bodyPr wrap="square" anchor="ctr" lIns="0" rIns="0" tIns="0" bIns="0">
-            <a:spAutoFit/>
-          </a:bodyPr>
-          <a:lstStyle/>
-          <a:p>
-            <a:pPr algn="l">
-              <a:spcAft>
-                <a:spcPts val="1800"/>
-              </a:spcAft>
-            </a:pPr>
-            <a:r>
-              <a:rPr sz="4000" b="0" i="1">
-                <a:solidFill>
-                  <a:srgbClr val="1C1B19"/>
-                </a:solidFill>
-                <a:latin typeface="Source Serif 4"/>
-              </a:rPr>
-              <a:t>Pick a real task. Break it into pieces. Guess each one.</a:t>
-            </a:r>
-          </a:p>
-        </p:txBody>
-      </p:sp>
-      <p:sp>
-        <p:nvSpPr>
-          <p:cNvPr id="7" name="TextBox 6"/>
-          <p:cNvSpPr txBox="1"/>
-          <p:nvPr/>
-        </p:nvSpPr>
-        <p:spPr>
-          <a:xfrm>
-            <a:off x="1188720" y="5120640"/>
-            <a:ext cx="10058400" cy="914400"/>
+            <a:off x="822960" y="4846320"/>
+            <a:ext cx="10515600" cy="1097280"/>
           </a:xfrm>
           <a:prstGeom prst="rect">
             <a:avLst/>
@@ -6118,17 +7635,17 @@
           <a:p>
             <a:pPr algn="l">
               <a:spcAft>
-                <a:spcPts val="810"/>
-              </a:spcAft>
-            </a:pPr>
-            <a:r>
-              <a:rPr sz="1800" b="0" i="0">
+                <a:spcPts val="990"/>
+              </a:spcAft>
+            </a:pPr>
+            <a:r>
+              <a:rPr sz="2200" b="0" i="1">
                 <a:solidFill>
                   <a:srgbClr val="5D5A54"/>
                 </a:solidFill>
-                <a:latin typeface="Inter Tight"/>
-              </a:rPr>
-              <a:t>Add them up. Then plan backward from the due date and add a buffer.</a:t>
+                <a:latin typeface="Source Serif 4"/>
+              </a:rPr>
+              <a:t>Seniors gave a best case, a realistic case and a worst case. The real time beat the worst case.</a:t>
             </a:r>
           </a:p>
         </p:txBody>
@@ -6141,7 +7658,7 @@
 </p:sld>
 </file>
 
-<file path=ppt/slides/slide13.xml><?xml version="1.0" encoding="utf-8"?>
+<file path=ppt/slides/slide5.xml><?xml version="1.0" encoding="utf-8"?>
 <p:sld xmlns:a="http://schemas.openxmlformats.org/drawingml/2006/main" xmlns:p="http://schemas.openxmlformats.org/presentationml/2006/main" xmlns:r="http://schemas.openxmlformats.org/officeDocument/2006/relationships">
   <p:cSld>
     <p:bg>
@@ -6237,7 +7754,7 @@
                 </a:solidFill>
                 <a:latin typeface="Inter Tight"/>
               </a:rPr>
-              <a:t>BEFORE YOU GO</a:t>
+              <a:t>WHY IT HAPPENS</a:t>
             </a:r>
           </a:p>
         </p:txBody>
@@ -6289,8 +7806,8 @@
         </p:nvSpPr>
         <p:spPr>
           <a:xfrm>
-            <a:off x="822960" y="1188720"/>
-            <a:ext cx="10515600" cy="914400"/>
+            <a:off x="822960" y="1005840"/>
+            <a:ext cx="10515600" cy="1097280"/>
           </a:xfrm>
           <a:prstGeom prst="rect">
             <a:avLst/>
@@ -6315,7 +7832,7 @@
                 </a:solidFill>
                 <a:latin typeface="Source Serif 4"/>
               </a:rPr>
-              <a:t>Exit card</a:t>
+              <a:t>Why your brain lowballs time</a:t>
             </a:r>
           </a:p>
         </p:txBody>
@@ -6328,8 +7845,8 @@
         </p:nvSpPr>
         <p:spPr>
           <a:xfrm>
-            <a:off x="822960" y="2286000"/>
-            <a:ext cx="10515600" cy="1463040"/>
+            <a:off x="822960" y="2194560"/>
+            <a:ext cx="548640" cy="1005840"/>
           </a:xfrm>
           <a:prstGeom prst="rect">
             <a:avLst/>
@@ -6344,64 +7861,73 @@
           <a:p>
             <a:pPr algn="l">
               <a:spcAft>
-                <a:spcPts val="1080"/>
-              </a:spcAft>
-            </a:pPr>
-            <a:r>
-              <a:rPr sz="2400" b="0" i="0">
+                <a:spcPts val="1170"/>
+              </a:spcAft>
+            </a:pPr>
+            <a:r>
+              <a:rPr sz="2600" b="1" i="0">
+                <a:solidFill>
+                  <a:srgbClr val="F47B20"/>
+                </a:solidFill>
+                <a:latin typeface="Source Serif 4"/>
+              </a:rPr>
+              <a:t>1</a:t>
+            </a:r>
+          </a:p>
+        </p:txBody>
+      </p:sp>
+      <p:sp>
+        <p:nvSpPr>
+          <p:cNvPr id="7" name="TextBox 6"/>
+          <p:cNvSpPr txBox="1"/>
+          <p:nvPr/>
+        </p:nvSpPr>
+        <p:spPr>
+          <a:xfrm>
+            <a:off x="1463040" y="2231136"/>
+            <a:ext cx="9875520" cy="1005840"/>
+          </a:xfrm>
+          <a:prstGeom prst="rect">
+            <a:avLst/>
+          </a:prstGeom>
+          <a:noFill/>
+        </p:spPr>
+        <p:txBody>
+          <a:bodyPr wrap="square" anchor="t" lIns="0" rIns="0" tIns="0" bIns="0">
+            <a:spAutoFit/>
+          </a:bodyPr>
+          <a:lstStyle/>
+          <a:p>
+            <a:pPr algn="l">
+              <a:spcAft>
+                <a:spcPts val="945"/>
+              </a:spcAft>
+            </a:pPr>
+            <a:r>
+              <a:rPr sz="2100" b="1" i="0">
                 <a:solidFill>
                   <a:srgbClr val="1C1B19"/>
                 </a:solidFill>
                 <a:latin typeface="Source Serif 4"/>
               </a:rPr>
-              <a:t>What will you time, unpack or buffer this week?</a:t>
-            </a:r>
-          </a:p>
-        </p:txBody>
-      </p:sp>
-      <p:sp>
-        <p:nvSpPr>
-          <p:cNvPr id="7" name="Rectangle 6"/>
-          <p:cNvSpPr/>
-          <p:nvPr/>
-        </p:nvSpPr>
-        <p:spPr>
-          <a:xfrm>
-            <a:off x="822960" y="4023360"/>
-            <a:ext cx="10515600" cy="1371600"/>
-          </a:xfrm>
-          <a:prstGeom prst="rect">
-            <a:avLst/>
-          </a:prstGeom>
-          <a:solidFill>
-            <a:srgbClr val="FFFFFF"/>
-          </a:solidFill>
-          <a:ln w="15875">
-            <a:solidFill>
-              <a:srgbClr val="1C1B19"/>
-            </a:solidFill>
-          </a:ln>
-          <a:effectLst/>
-        </p:spPr>
-        <p:style>
-          <a:lnRef idx="1">
-            <a:schemeClr val="accent1"/>
-          </a:lnRef>
-          <a:fillRef idx="3">
-            <a:schemeClr val="accent1"/>
-          </a:fillRef>
-          <a:effectRef idx="2">
-            <a:schemeClr val="accent1"/>
-          </a:effectRef>
-          <a:fontRef idx="minor">
-            <a:schemeClr val="lt1"/>
-          </a:fontRef>
-        </p:style>
-        <p:txBody>
-          <a:bodyPr rtlCol="0" anchor="ctr"/>
-          <a:lstStyle/>
-          <a:p>
-            <a:pPr algn="ctr"/>
+              <a:t>You plan from the inside.</a:t>
+            </a:r>
+          </a:p>
+          <a:p>
+            <a:pPr algn="l">
+              <a:spcAft>
+                <a:spcPts val="945"/>
+              </a:spcAft>
+            </a:pPr>
+            <a:r>
+              <a:rPr sz="1600" b="0" i="0">
+                <a:solidFill>
+                  <a:srgbClr val="5D5A54"/>
+                </a:solidFill>
+                <a:latin typeface="Source Serif 4"/>
+              </a:rPr>
+              <a:t>You picture every step going smoothly.</a:t>
+            </a:r>
           </a:p>
         </p:txBody>
       </p:sp>
@@ -6413,8 +7939,8 @@
         </p:nvSpPr>
         <p:spPr>
           <a:xfrm>
-            <a:off x="1097280" y="4206240"/>
-            <a:ext cx="10058400" cy="365760"/>
+            <a:off x="822960" y="3200400"/>
+            <a:ext cx="548640" cy="1005840"/>
           </a:xfrm>
           <a:prstGeom prst="rect">
             <a:avLst/>
@@ -6429,17 +7955,17 @@
           <a:p>
             <a:pPr algn="l">
               <a:spcAft>
-                <a:spcPts val="540"/>
-              </a:spcAft>
-            </a:pPr>
-            <a:r>
-              <a:rPr sz="1200" b="1" i="0">
-                <a:solidFill>
-                  <a:srgbClr val="0B2D5B"/>
-                </a:solidFill>
-                <a:latin typeface="Inter Tight"/>
-              </a:rPr>
-              <a:t>ON THE BVR DINER MENU</a:t>
+                <a:spcPts val="1170"/>
+              </a:spcAft>
+            </a:pPr>
+            <a:r>
+              <a:rPr sz="2600" b="1" i="0">
+                <a:solidFill>
+                  <a:srgbClr val="F47B20"/>
+                </a:solidFill>
+                <a:latin typeface="Source Serif 4"/>
+              </a:rPr>
+              <a:t>2</a:t>
             </a:r>
           </a:p>
         </p:txBody>
@@ -6452,8 +7978,8 @@
         </p:nvSpPr>
         <p:spPr>
           <a:xfrm>
-            <a:off x="1097280" y="4617720"/>
-            <a:ext cx="10058400" cy="640080"/>
+            <a:off x="1463040" y="3236976"/>
+            <a:ext cx="9875520" cy="1005840"/>
           </a:xfrm>
           <a:prstGeom prst="rect">
             <a:avLst/>
@@ -6468,101 +7994,47 @@
           <a:p>
             <a:pPr algn="l">
               <a:spcAft>
-                <a:spcPts val="900"/>
-              </a:spcAft>
-            </a:pPr>
-            <a:r>
-              <a:rPr sz="2000" b="0" i="0">
+                <a:spcPts val="945"/>
+              </a:spcAft>
+            </a:pPr>
+            <a:r>
+              <a:rPr sz="2100" b="1" i="0">
                 <a:solidFill>
                   <a:srgbClr val="1C1B19"/>
                 </a:solidFill>
-                <a:latin typeface="Inter Tight"/>
-              </a:rPr>
-              <a:t>https://rmwtoolkit.github.io/bcds-toolkit/where-did-the-afternoon-go-high-school.html</a:t>
-            </a:r>
-          </a:p>
-        </p:txBody>
-      </p:sp>
-    </p:spTree>
-  </p:cSld>
-  <p:clrMapOvr>
-    <a:masterClrMapping/>
-  </p:clrMapOvr>
-</p:sld>
-</file>
-
-<file path=ppt/slides/slide2.xml><?xml version="1.0" encoding="utf-8"?>
-<p:sld xmlns:a="http://schemas.openxmlformats.org/drawingml/2006/main" xmlns:p="http://schemas.openxmlformats.org/presentationml/2006/main" xmlns:r="http://schemas.openxmlformats.org/officeDocument/2006/relationships" show="0">
-  <p:cSld>
-    <p:bg>
-      <p:bgPr>
-        <a:solidFill>
-          <a:srgbClr val="EEEBE4"/>
-        </a:solidFill>
-        <a:effectLst/>
-      </p:bgPr>
-    </p:bg>
-    <p:spTree>
-      <p:nvGrpSpPr>
-        <p:cNvPr id="1" name=""/>
-        <p:cNvGrpSpPr/>
-        <p:nvPr/>
-      </p:nvGrpSpPr>
-      <p:grpSpPr/>
-      <p:sp>
-        <p:nvSpPr>
-          <p:cNvPr id="2" name="Rectangle 1"/>
-          <p:cNvSpPr/>
-          <p:nvPr/>
-        </p:nvSpPr>
-        <p:spPr>
-          <a:xfrm>
-            <a:off x="0" y="0"/>
-            <a:ext cx="12191695" cy="384048"/>
-          </a:xfrm>
-          <a:prstGeom prst="rect">
-            <a:avLst/>
-          </a:prstGeom>
-          <a:solidFill>
-            <a:srgbClr val="0B2D5B"/>
-          </a:solidFill>
-          <a:ln>
-            <a:noFill/>
-          </a:ln>
-          <a:effectLst/>
-        </p:spPr>
-        <p:style>
-          <a:lnRef idx="1">
-            <a:schemeClr val="accent1"/>
-          </a:lnRef>
-          <a:fillRef idx="3">
-            <a:schemeClr val="accent1"/>
-          </a:fillRef>
-          <a:effectRef idx="2">
-            <a:schemeClr val="accent1"/>
-          </a:effectRef>
-          <a:fontRef idx="minor">
-            <a:schemeClr val="lt1"/>
-          </a:fontRef>
-        </p:style>
-        <p:txBody>
-          <a:bodyPr rtlCol="0" anchor="ctr"/>
-          <a:lstStyle/>
-          <a:p>
-            <a:pPr algn="ctr"/>
-          </a:p>
-        </p:txBody>
-      </p:sp>
-      <p:sp>
-        <p:nvSpPr>
-          <p:cNvPr id="3" name="TextBox 2"/>
+                <a:latin typeface="Source Serif 4"/>
+              </a:rPr>
+              <a:t>You remember past tasks as shorter.</a:t>
+            </a:r>
+          </a:p>
+          <a:p>
+            <a:pPr algn="l">
+              <a:spcAft>
+                <a:spcPts val="945"/>
+              </a:spcAft>
+            </a:pPr>
+            <a:r>
+              <a:rPr sz="1600" b="0" i="0">
+                <a:solidFill>
+                  <a:srgbClr val="5D5A54"/>
+                </a:solidFill>
+                <a:latin typeface="Source Serif 4"/>
+              </a:rPr>
+              <a:t>A bad memory feeds a bad plan.</a:t>
+            </a:r>
+          </a:p>
+        </p:txBody>
+      </p:sp>
+      <p:sp>
+        <p:nvSpPr>
+          <p:cNvPr id="10" name="TextBox 9"/>
           <p:cNvSpPr txBox="1"/>
           <p:nvPr/>
         </p:nvSpPr>
         <p:spPr>
           <a:xfrm>
-            <a:off x="548640" y="100584"/>
-            <a:ext cx="10972800" cy="274320"/>
+            <a:off x="822960" y="4206240"/>
+            <a:ext cx="548640" cy="1005840"/>
           </a:xfrm>
           <a:prstGeom prst="rect">
             <a:avLst/>
@@ -6577,31 +8049,31 @@
           <a:p>
             <a:pPr algn="l">
               <a:spcAft>
-                <a:spcPts val="495"/>
-              </a:spcAft>
-            </a:pPr>
-            <a:r>
-              <a:rPr sz="1100" b="1" i="0">
-                <a:solidFill>
-                  <a:srgbClr val="FFFFFF"/>
-                </a:solidFill>
-                <a:latin typeface="Inter Tight"/>
-              </a:rPr>
-              <a:t>TEACHER PAGE  ·  skipped when you present  ·  Before you teach</a:t>
-            </a:r>
-          </a:p>
-        </p:txBody>
-      </p:sp>
-      <p:sp>
-        <p:nvSpPr>
-          <p:cNvPr id="4" name="TextBox 3"/>
+                <a:spcPts val="1170"/>
+              </a:spcAft>
+            </a:pPr>
+            <a:r>
+              <a:rPr sz="2600" b="1" i="0">
+                <a:solidFill>
+                  <a:srgbClr val="F47B20"/>
+                </a:solidFill>
+                <a:latin typeface="Source Serif 4"/>
+              </a:rPr>
+              <a:t>3</a:t>
+            </a:r>
+          </a:p>
+        </p:txBody>
+      </p:sp>
+      <p:sp>
+        <p:nvSpPr>
+          <p:cNvPr id="11" name="TextBox 10"/>
           <p:cNvSpPr txBox="1"/>
           <p:nvPr/>
         </p:nvSpPr>
         <p:spPr>
           <a:xfrm>
-            <a:off x="548640" y="685800"/>
-            <a:ext cx="10972800" cy="640080"/>
+            <a:off x="1463040" y="4242816"/>
+            <a:ext cx="9875520" cy="1005840"/>
           </a:xfrm>
           <a:prstGeom prst="rect">
             <a:avLst/>
@@ -6616,31 +8088,47 @@
           <a:p>
             <a:pPr algn="l">
               <a:spcAft>
-                <a:spcPts val="1350"/>
-              </a:spcAft>
-            </a:pPr>
-            <a:r>
-              <a:rPr sz="3000" b="1" i="0">
+                <a:spcPts val="945"/>
+              </a:spcAft>
+            </a:pPr>
+            <a:r>
+              <a:rPr sz="2100" b="1" i="0">
                 <a:solidFill>
                   <a:srgbClr val="1C1B19"/>
                 </a:solidFill>
                 <a:latin typeface="Source Serif 4"/>
               </a:rPr>
-              <a:t>Before you teach</a:t>
-            </a:r>
-          </a:p>
-        </p:txBody>
-      </p:sp>
-      <p:sp>
-        <p:nvSpPr>
-          <p:cNvPr id="5" name="TextBox 4"/>
+              <a:t>Interruptions never make the plan.</a:t>
+            </a:r>
+          </a:p>
+          <a:p>
+            <a:pPr algn="l">
+              <a:spcAft>
+                <a:spcPts val="945"/>
+              </a:spcAft>
+            </a:pPr>
+            <a:r>
+              <a:rPr sz="1600" b="0" i="0">
+                <a:solidFill>
+                  <a:srgbClr val="5D5A54"/>
+                </a:solidFill>
+                <a:latin typeface="Source Serif 4"/>
+              </a:rPr>
+              <a:t>The text, the snack, finding the file.</a:t>
+            </a:r>
+          </a:p>
+        </p:txBody>
+      </p:sp>
+      <p:sp>
+        <p:nvSpPr>
+          <p:cNvPr id="12" name="TextBox 11"/>
           <p:cNvSpPr txBox="1"/>
           <p:nvPr/>
         </p:nvSpPr>
         <p:spPr>
           <a:xfrm>
-            <a:off x="548640" y="1463040"/>
-            <a:ext cx="5394960" cy="4937760"/>
+            <a:off x="822960" y="5212080"/>
+            <a:ext cx="548640" cy="1005840"/>
           </a:xfrm>
           <a:prstGeom prst="rect">
             <a:avLst/>
@@ -6655,159 +8143,31 @@
           <a:p>
             <a:pPr algn="l">
               <a:spcAft>
-                <a:spcPts val="585"/>
-              </a:spcAft>
-            </a:pPr>
-            <a:r>
-              <a:rPr sz="1500" b="1" i="0">
-                <a:solidFill>
-                  <a:srgbClr val="1C1B19"/>
+                <a:spcPts val="1170"/>
+              </a:spcAft>
+            </a:pPr>
+            <a:r>
+              <a:rPr sz="2600" b="1" i="0">
+                <a:solidFill>
+                  <a:srgbClr val="F47B20"/>
                 </a:solidFill>
                 <a:latin typeface="Source Serif 4"/>
               </a:rPr>
-              <a:t>Blame the plan.</a:t>
-            </a:r>
-          </a:p>
-          <a:p>
-            <a:pPr algn="l">
-              <a:spcAft>
-                <a:spcPts val="585"/>
-              </a:spcAft>
-            </a:pPr>
-            <a:r>
-              <a:rPr sz="1300" b="0" i="0">
-                <a:solidFill>
-                  <a:srgbClr val="1C1B19"/>
-                </a:solidFill>
-                <a:latin typeface="Source Serif 4"/>
-              </a:rPr>
-              <a:t>Many students have been told being late or behind means they don't care. Keep coming back to the research: the plan assumed a perfect day. Fix the plan, and the caring shows up on time.</a:t>
-            </a:r>
-          </a:p>
-          <a:p>
-            <a:pPr algn="l">
-              <a:spcAft>
-                <a:spcPts val="585"/>
-              </a:spcAft>
-            </a:pPr>
-            <a:r>
-              <a:rPr sz="1300" b="0" i="0">
-                <a:solidFill>
-                  <a:srgbClr val="1C1B19"/>
-                </a:solidFill>
-                <a:latin typeface="Source Serif 4"/>
-              </a:rPr>
-              <a:t/>
-            </a:r>
-          </a:p>
-          <a:p>
-            <a:pPr algn="l">
-              <a:spcAft>
-                <a:spcPts val="585"/>
-              </a:spcAft>
-            </a:pPr>
-            <a:r>
-              <a:rPr sz="1500" b="1" i="0">
-                <a:solidFill>
-                  <a:srgbClr val="1C1B19"/>
-                </a:solidFill>
-                <a:latin typeface="Source Serif 4"/>
-              </a:rPr>
-              <a:t>Keep schedules private.</a:t>
-            </a:r>
-          </a:p>
-          <a:p>
-            <a:pPr algn="l">
-              <a:spcAft>
-                <a:spcPts val="585"/>
-              </a:spcAft>
-            </a:pPr>
-            <a:r>
-              <a:rPr sz="1300" b="0" i="0">
-                <a:solidFill>
-                  <a:srgbClr val="1C1B19"/>
-                </a:solidFill>
-                <a:latin typeface="Source Serif 4"/>
-              </a:rPr>
-              <a:t>Students' afternoons hold things they may not want to share: a job, caring for siblings, time split between two homes, appointments. The unpacking stays on their own paper. The pair-share is one step and one time.</a:t>
-            </a:r>
-          </a:p>
-          <a:p>
-            <a:pPr algn="l">
-              <a:spcAft>
-                <a:spcPts val="585"/>
-              </a:spcAft>
-            </a:pPr>
-            <a:r>
-              <a:rPr sz="1300" b="0" i="0">
-                <a:solidFill>
-                  <a:srgbClr val="1C1B19"/>
-                </a:solidFill>
-                <a:latin typeface="Source Serif 4"/>
-              </a:rPr>
-              <a:t/>
-            </a:r>
-          </a:p>
-          <a:p>
-            <a:pPr algn="l">
-              <a:spcAft>
-                <a:spcPts val="585"/>
-              </a:spcAft>
-            </a:pPr>
-            <a:r>
-              <a:rPr sz="1500" b="1" i="0">
-                <a:solidFill>
-                  <a:srgbClr val="1C1B19"/>
-                </a:solidFill>
-                <a:latin typeface="Source Serif 4"/>
-              </a:rPr>
-              <a:t>Don't turn it into a phone lecture.</a:t>
-            </a:r>
-          </a:p>
-          <a:p>
-            <a:pPr algn="l">
-              <a:spcAft>
-                <a:spcPts val="585"/>
-              </a:spcAft>
-            </a:pPr>
-            <a:r>
-              <a:rPr sz="1300" b="0" i="0">
-                <a:solidFill>
-                  <a:srgbClr val="1C1B19"/>
-                </a:solidFill>
-                <a:latin typeface="Source Serif 4"/>
-              </a:rPr>
-              <a:t>"Scrolled longer than I meant to" will come up. Treat it like any other time thief: set the stop before you start, with an alarm.</a:t>
-            </a:r>
-          </a:p>
-          <a:p>
-            <a:pPr algn="l">
-              <a:spcAft>
-                <a:spcPts val="585"/>
-              </a:spcAft>
-            </a:pPr>
-            <a:r>
-              <a:rPr sz="1300" b="0" i="0">
-                <a:solidFill>
-                  <a:srgbClr val="1C1B19"/>
-                </a:solidFill>
-                <a:latin typeface="Source Serif 4"/>
-              </a:rPr>
-              <a:t/>
-            </a:r>
-          </a:p>
-        </p:txBody>
-      </p:sp>
-      <p:sp>
-        <p:nvSpPr>
-          <p:cNvPr id="6" name="TextBox 5"/>
+              <a:t>4</a:t>
+            </a:r>
+          </a:p>
+        </p:txBody>
+      </p:sp>
+      <p:sp>
+        <p:nvSpPr>
+          <p:cNvPr id="13" name="TextBox 12"/>
           <p:cNvSpPr txBox="1"/>
           <p:nvPr/>
         </p:nvSpPr>
         <p:spPr>
           <a:xfrm>
-            <a:off x="6217920" y="1463040"/>
-            <a:ext cx="5394960" cy="4937760"/>
+            <a:off x="1463040" y="5248656"/>
+            <a:ext cx="9875520" cy="1005840"/>
           </a:xfrm>
           <a:prstGeom prst="rect">
             <a:avLst/>
@@ -6822,1317 +8182,33 @@
           <a:p>
             <a:pPr algn="l">
               <a:spcAft>
-                <a:spcPts val="585"/>
-              </a:spcAft>
-            </a:pPr>
-            <a:r>
-              <a:rPr sz="1500" b="1" i="0">
+                <a:spcPts val="945"/>
+              </a:spcAft>
+            </a:pPr>
+            <a:r>
+              <a:rPr sz="2100" b="1" i="0">
                 <a:solidFill>
                   <a:srgbClr val="1C1B19"/>
                 </a:solidFill>
                 <a:latin typeface="Source Serif 4"/>
               </a:rPr>
-              <a:t>Be honest about the research.</a:t>
-            </a:r>
-          </a:p>
-          <a:p>
-            <a:pPr algn="l">
-              <a:spcAft>
-                <a:spcPts val="585"/>
-              </a:spcAft>
-            </a:pPr>
-            <a:r>
-              <a:rPr sz="1300" b="0" i="0">
-                <a:solidFill>
-                  <a:srgbClr val="1C1B19"/>
+              <a:t>Some brains feel time less.</a:t>
+            </a:r>
+          </a:p>
+          <a:p>
+            <a:pPr algn="l">
+              <a:spcAft>
+                <a:spcPts val="945"/>
+              </a:spcAft>
+            </a:pPr>
+            <a:r>
+              <a:rPr sz="1600" b="0" i="0">
+                <a:solidFill>
+                  <a:srgbClr val="5D5A54"/>
                 </a:solidFill>
                 <a:latin typeface="Source Serif 4"/>
               </a:rPr>
-              <a:t>Buehler's study was college seniors, and the task-unpacking study found estimates closer to the truth in two of four experiments. Say so. The fixes raise the odds.</a:t>
-            </a:r>
-          </a:p>
-          <a:p>
-            <a:pPr algn="l">
-              <a:spcAft>
-                <a:spcPts val="585"/>
-              </a:spcAft>
-            </a:pPr>
-            <a:r>
-              <a:rPr sz="1300" b="0" i="0">
-                <a:solidFill>
-                  <a:srgbClr val="1C1B19"/>
-                </a:solidFill>
-                <a:latin typeface="Source Serif 4"/>
-              </a:rPr>
-              <a:t/>
-            </a:r>
-          </a:p>
-          <a:p>
-            <a:pPr algn="l">
-              <a:spcAft>
-                <a:spcPts val="585"/>
-              </a:spcAft>
-            </a:pPr>
-            <a:r>
-              <a:rPr sz="1500" b="1" i="0">
-                <a:solidFill>
-                  <a:srgbClr val="1C1B19"/>
-                </a:solidFill>
-                <a:latin typeface="Source Serif 4"/>
-              </a:rPr>
-              <a:t>When it's more than planning.</a:t>
-            </a:r>
-          </a:p>
-          <a:p>
-            <a:pPr algn="l">
-              <a:spcAft>
-                <a:spcPts val="585"/>
-              </a:spcAft>
-            </a:pPr>
-            <a:r>
-              <a:rPr sz="1300" b="0" i="0">
-                <a:solidFill>
-                  <a:srgbClr val="1C1B19"/>
-                </a:solidFill>
-                <a:latin typeface="Source Serif 4"/>
-              </a:rPr>
-              <a:t>A student who is late or behind most days even with timers, buffers and a calendar, or who has had trouble feeling time pass for as long as they can remember, may have ADHD. Connect them with the learning specialist or a counselor.</a:t>
-            </a:r>
-          </a:p>
-          <a:p>
-            <a:pPr algn="l">
-              <a:spcAft>
-                <a:spcPts val="585"/>
-              </a:spcAft>
-            </a:pPr>
-            <a:r>
-              <a:rPr sz="1300" b="0" i="0">
-                <a:solidFill>
-                  <a:srgbClr val="1C1B19"/>
-                </a:solidFill>
-                <a:latin typeface="Source Serif 4"/>
-              </a:rPr>
-              <a:t/>
-            </a:r>
-          </a:p>
-          <a:p>
-            <a:pPr algn="l">
-              <a:spcAft>
-                <a:spcPts val="585"/>
-              </a:spcAft>
-            </a:pPr>
-            <a:r>
-              <a:rPr sz="1500" b="1" i="0">
-                <a:solidFill>
-                  <a:srgbClr val="1C1B19"/>
-                </a:solidFill>
-                <a:latin typeface="Source Serif 4"/>
-              </a:rPr>
-              <a:t>When time trouble is hurting more.</a:t>
-            </a:r>
-          </a:p>
-          <a:p>
-            <a:pPr algn="l">
-              <a:spcAft>
-                <a:spcPts val="585"/>
-              </a:spcAft>
-            </a:pPr>
-            <a:r>
-              <a:rPr sz="1300" b="0" i="0">
-                <a:solidFill>
-                  <a:srgbClr val="1C1B19"/>
-                </a:solidFill>
-                <a:latin typeface="Source Serif 4"/>
-              </a:rPr>
-              <a:t>If losing track of time is hurting a student's grades, sleep or friendships, or they sound overwhelmed, thank them and walk them to a counselor that day. A counselor can also talk with teachers about deadlines.</a:t>
-            </a:r>
-          </a:p>
-          <a:p>
-            <a:pPr algn="l">
-              <a:spcAft>
-                <a:spcPts val="585"/>
-              </a:spcAft>
-            </a:pPr>
-            <a:r>
-              <a:rPr sz="1300" b="0" i="0">
-                <a:solidFill>
-                  <a:srgbClr val="1C1B19"/>
-                </a:solidFill>
-                <a:latin typeface="Source Serif 4"/>
-              </a:rPr>
-              <a:t/>
-            </a:r>
-          </a:p>
-        </p:txBody>
-      </p:sp>
-    </p:spTree>
-  </p:cSld>
-  <p:clrMapOvr>
-    <a:masterClrMapping/>
-  </p:clrMapOvr>
-</p:sld>
-</file>
-
-<file path=ppt/slides/slide3.xml><?xml version="1.0" encoding="utf-8"?>
-<p:sld xmlns:a="http://schemas.openxmlformats.org/drawingml/2006/main" xmlns:p="http://schemas.openxmlformats.org/presentationml/2006/main" xmlns:r="http://schemas.openxmlformats.org/officeDocument/2006/relationships" show="0">
-  <p:cSld>
-    <p:bg>
-      <p:bgPr>
-        <a:solidFill>
-          <a:srgbClr val="EEEBE4"/>
-        </a:solidFill>
-        <a:effectLst/>
-      </p:bgPr>
-    </p:bg>
-    <p:spTree>
-      <p:nvGrpSpPr>
-        <p:cNvPr id="1" name=""/>
-        <p:cNvGrpSpPr/>
-        <p:nvPr/>
-      </p:nvGrpSpPr>
-      <p:grpSpPr/>
-      <p:sp>
-        <p:nvSpPr>
-          <p:cNvPr id="2" name="Rectangle 1"/>
-          <p:cNvSpPr/>
-          <p:nvPr/>
-        </p:nvSpPr>
-        <p:spPr>
-          <a:xfrm>
-            <a:off x="0" y="0"/>
-            <a:ext cx="12191695" cy="384048"/>
-          </a:xfrm>
-          <a:prstGeom prst="rect">
-            <a:avLst/>
-          </a:prstGeom>
-          <a:solidFill>
-            <a:srgbClr val="0B2D5B"/>
-          </a:solidFill>
-          <a:ln>
-            <a:noFill/>
-          </a:ln>
-          <a:effectLst/>
-        </p:spPr>
-        <p:style>
-          <a:lnRef idx="1">
-            <a:schemeClr val="accent1"/>
-          </a:lnRef>
-          <a:fillRef idx="3">
-            <a:schemeClr val="accent1"/>
-          </a:fillRef>
-          <a:effectRef idx="2">
-            <a:schemeClr val="accent1"/>
-          </a:effectRef>
-          <a:fontRef idx="minor">
-            <a:schemeClr val="lt1"/>
-          </a:fontRef>
-        </p:style>
-        <p:txBody>
-          <a:bodyPr rtlCol="0" anchor="ctr"/>
-          <a:lstStyle/>
-          <a:p>
-            <a:pPr algn="ctr"/>
-          </a:p>
-        </p:txBody>
-      </p:sp>
-      <p:sp>
-        <p:nvSpPr>
-          <p:cNvPr id="3" name="TextBox 2"/>
-          <p:cNvSpPr txBox="1"/>
-          <p:nvPr/>
-        </p:nvSpPr>
-        <p:spPr>
-          <a:xfrm>
-            <a:off x="548640" y="100584"/>
-            <a:ext cx="10972800" cy="274320"/>
-          </a:xfrm>
-          <a:prstGeom prst="rect">
-            <a:avLst/>
-          </a:prstGeom>
-          <a:noFill/>
-        </p:spPr>
-        <p:txBody>
-          <a:bodyPr wrap="square" anchor="t" lIns="0" rIns="0" tIns="0" bIns="0">
-            <a:spAutoFit/>
-          </a:bodyPr>
-          <a:lstStyle/>
-          <a:p>
-            <a:pPr algn="l">
-              <a:spcAft>
-                <a:spcPts val="495"/>
-              </a:spcAft>
-            </a:pPr>
-            <a:r>
-              <a:rPr sz="1100" b="1" i="0">
-                <a:solidFill>
-                  <a:srgbClr val="FFFFFF"/>
-                </a:solidFill>
-                <a:latin typeface="Inter Tight"/>
-              </a:rPr>
-              <a:t>TEACHER PAGE  ·  skipped when you present  ·  Every student in the room</a:t>
-            </a:r>
-          </a:p>
-        </p:txBody>
-      </p:sp>
-      <p:sp>
-        <p:nvSpPr>
-          <p:cNvPr id="4" name="TextBox 3"/>
-          <p:cNvSpPr txBox="1"/>
-          <p:nvPr/>
-        </p:nvSpPr>
-        <p:spPr>
-          <a:xfrm>
-            <a:off x="548640" y="685800"/>
-            <a:ext cx="10972800" cy="640080"/>
-          </a:xfrm>
-          <a:prstGeom prst="rect">
-            <a:avLst/>
-          </a:prstGeom>
-          <a:noFill/>
-        </p:spPr>
-        <p:txBody>
-          <a:bodyPr wrap="square" anchor="t" lIns="0" rIns="0" tIns="0" bIns="0">
-            <a:spAutoFit/>
-          </a:bodyPr>
-          <a:lstStyle/>
-          <a:p>
-            <a:pPr algn="l">
-              <a:spcAft>
-                <a:spcPts val="1350"/>
-              </a:spcAft>
-            </a:pPr>
-            <a:r>
-              <a:rPr sz="3000" b="1" i="0">
-                <a:solidFill>
-                  <a:srgbClr val="1C1B19"/>
-                </a:solidFill>
-                <a:latin typeface="Source Serif 4"/>
-              </a:rPr>
-              <a:t>Every student in the room</a:t>
-            </a:r>
-          </a:p>
-        </p:txBody>
-      </p:sp>
-      <p:sp>
-        <p:nvSpPr>
-          <p:cNvPr id="5" name="TextBox 4"/>
-          <p:cNvSpPr txBox="1"/>
-          <p:nvPr/>
-        </p:nvSpPr>
-        <p:spPr>
-          <a:xfrm>
-            <a:off x="548640" y="1325880"/>
-            <a:ext cx="10972800" cy="365760"/>
-          </a:xfrm>
-          <a:prstGeom prst="rect">
-            <a:avLst/>
-          </a:prstGeom>
-          <a:noFill/>
-        </p:spPr>
-        <p:txBody>
-          <a:bodyPr wrap="square" anchor="t" lIns="0" rIns="0" tIns="0" bIns="0">
-            <a:spAutoFit/>
-          </a:bodyPr>
-          <a:lstStyle/>
-          <a:p>
-            <a:pPr algn="l">
-              <a:spcAft>
-                <a:spcPts val="630"/>
-              </a:spcAft>
-            </a:pPr>
-            <a:r>
-              <a:rPr sz="1400" b="0" i="0">
-                <a:solidFill>
-                  <a:srgbClr val="5D5A54"/>
-                </a:solidFill>
-                <a:latin typeface="Inter Tight"/>
-              </a:rPr>
-              <a:t>Culture, family, identity, ability and money: what to keep in mind for this topic.</a:t>
-            </a:r>
-          </a:p>
-        </p:txBody>
-      </p:sp>
-      <p:sp>
-        <p:nvSpPr>
-          <p:cNvPr id="6" name="TextBox 5"/>
-          <p:cNvSpPr txBox="1"/>
-          <p:nvPr/>
-        </p:nvSpPr>
-        <p:spPr>
-          <a:xfrm>
-            <a:off x="548640" y="1828800"/>
-            <a:ext cx="5394960" cy="4572000"/>
-          </a:xfrm>
-          <a:prstGeom prst="rect">
-            <a:avLst/>
-          </a:prstGeom>
-          <a:noFill/>
-        </p:spPr>
-        <p:txBody>
-          <a:bodyPr wrap="square" anchor="t" lIns="0" rIns="0" tIns="0" bIns="0">
-            <a:spAutoFit/>
-          </a:bodyPr>
-          <a:lstStyle/>
-          <a:p>
-            <a:pPr algn="l">
-              <a:spcAft>
-                <a:spcPts val="585"/>
-              </a:spcAft>
-            </a:pPr>
-            <a:r>
-              <a:rPr sz="1500" b="1" i="0">
-                <a:solidFill>
-                  <a:srgbClr val="1C1B19"/>
-                </a:solidFill>
-                <a:latin typeface="Source Serif 4"/>
-              </a:rPr>
-              <a:t>ADHD and time blindness.</a:t>
-            </a:r>
-          </a:p>
-          <a:p>
-            <a:pPr algn="l">
-              <a:spcAft>
-                <a:spcPts val="585"/>
-              </a:spcAft>
-            </a:pPr>
-            <a:r>
-              <a:rPr sz="1300" b="0" i="0">
-                <a:solidFill>
-                  <a:srgbClr val="1C1B19"/>
-                </a:solidFill>
-                <a:latin typeface="Source Serif 4"/>
-              </a:rPr>
-              <a:t>Many people with ADHD describe two times, "now" and "not now." For them, outside tools (alarms, timers, a visible calendar) are the method, and willpower talk doesn't help. Avoid diagnoses as casual adjectives in your own examples.</a:t>
-            </a:r>
-          </a:p>
-          <a:p>
-            <a:pPr algn="l">
-              <a:spcAft>
-                <a:spcPts val="585"/>
-              </a:spcAft>
-            </a:pPr>
-            <a:r>
-              <a:rPr sz="1300" b="0" i="0">
-                <a:solidFill>
-                  <a:srgbClr val="1C1B19"/>
-                </a:solidFill>
-                <a:latin typeface="Source Serif 4"/>
-              </a:rPr>
-              <a:t/>
-            </a:r>
-          </a:p>
-          <a:p>
-            <a:pPr algn="l">
-              <a:spcAft>
-                <a:spcPts val="585"/>
-              </a:spcAft>
-            </a:pPr>
-            <a:r>
-              <a:rPr sz="1500" b="1" i="0">
-                <a:solidFill>
-                  <a:srgbClr val="1C1B19"/>
-                </a:solidFill>
-                <a:latin typeface="Source Serif 4"/>
-              </a:rPr>
-              <a:t>Afternoons aren't equal.</a:t>
-            </a:r>
-          </a:p>
-          <a:p>
-            <a:pPr algn="l">
-              <a:spcAft>
-                <a:spcPts val="585"/>
-              </a:spcAft>
-            </a:pPr>
-            <a:r>
-              <a:rPr sz="1300" b="0" i="0">
-                <a:solidFill>
-                  <a:srgbClr val="1C1B19"/>
-                </a:solidFill>
-                <a:latin typeface="Source Serif 4"/>
-              </a:rPr>
-              <a:t>Some students work, watch younger siblings, or take two buses home. Buffers and transitions matter more when there are more of them. Name those hours as real commitments that belong on the calendar.</a:t>
-            </a:r>
-          </a:p>
-          <a:p>
-            <a:pPr algn="l">
-              <a:spcAft>
-                <a:spcPts val="585"/>
-              </a:spcAft>
-            </a:pPr>
-            <a:r>
-              <a:rPr sz="1300" b="0" i="0">
-                <a:solidFill>
-                  <a:srgbClr val="1C1B19"/>
-                </a:solidFill>
-                <a:latin typeface="Source Serif 4"/>
-              </a:rPr>
-              <a:t/>
-            </a:r>
-          </a:p>
-          <a:p>
-            <a:pPr algn="l">
-              <a:spcAft>
-                <a:spcPts val="585"/>
-              </a:spcAft>
-            </a:pPr>
-            <a:r>
-              <a:rPr sz="1500" b="1" i="0">
-                <a:solidFill>
-                  <a:srgbClr val="1C1B19"/>
-                </a:solidFill>
-                <a:latin typeface="Source Serif 4"/>
-              </a:rPr>
-              <a:t>Two homes, two calendars.</a:t>
-            </a:r>
-          </a:p>
-          <a:p>
-            <a:pPr algn="l">
-              <a:spcAft>
-                <a:spcPts val="585"/>
-              </a:spcAft>
-            </a:pPr>
-            <a:r>
-              <a:rPr sz="1300" b="0" i="0">
-                <a:solidFill>
-                  <a:srgbClr val="1C1B19"/>
-                </a:solidFill>
-                <a:latin typeface="Source Serif 4"/>
-              </a:rPr>
-              <a:t>Students who split time between parents, or live with grandparents, foster parents or other relatives, may plan around different schedules each week. Sofia's scenario has this in it. Planning backward helps when the free days move around.</a:t>
-            </a:r>
-          </a:p>
-          <a:p>
-            <a:pPr algn="l">
-              <a:spcAft>
-                <a:spcPts val="585"/>
-              </a:spcAft>
-            </a:pPr>
-            <a:r>
-              <a:rPr sz="1300" b="0" i="0">
-                <a:solidFill>
-                  <a:srgbClr val="1C1B19"/>
-                </a:solidFill>
-                <a:latin typeface="Source Serif 4"/>
-              </a:rPr>
-              <a:t/>
-            </a:r>
-          </a:p>
-        </p:txBody>
-      </p:sp>
-      <p:sp>
-        <p:nvSpPr>
-          <p:cNvPr id="7" name="TextBox 6"/>
-          <p:cNvSpPr txBox="1"/>
-          <p:nvPr/>
-        </p:nvSpPr>
-        <p:spPr>
-          <a:xfrm>
-            <a:off x="6217920" y="1828800"/>
-            <a:ext cx="5394960" cy="4572000"/>
-          </a:xfrm>
-          <a:prstGeom prst="rect">
-            <a:avLst/>
-          </a:prstGeom>
-          <a:noFill/>
-        </p:spPr>
-        <p:txBody>
-          <a:bodyPr wrap="square" anchor="t" lIns="0" rIns="0" tIns="0" bIns="0">
-            <a:spAutoFit/>
-          </a:bodyPr>
-          <a:lstStyle/>
-          <a:p>
-            <a:pPr algn="l">
-              <a:spcAft>
-                <a:spcPts val="585"/>
-              </a:spcAft>
-            </a:pPr>
-            <a:r>
-              <a:rPr sz="1500" b="1" i="0">
-                <a:solidFill>
-                  <a:srgbClr val="1C1B19"/>
-                </a:solidFill>
-                <a:latin typeface="Source Serif 4"/>
-              </a:rPr>
-              <a:t>Tools cost nothing.</a:t>
-            </a:r>
-          </a:p>
-          <a:p>
-            <a:pPr algn="l">
-              <a:spcAft>
-                <a:spcPts val="585"/>
-              </a:spcAft>
-            </a:pPr>
-            <a:r>
-              <a:rPr sz="1300" b="0" i="0">
-                <a:solidFill>
-                  <a:srgbClr val="1C1B19"/>
-                </a:solidFill>
-                <a:latin typeface="Source Serif 4"/>
-              </a:rPr>
-              <a:t>Don't assume a planner app, a smartwatch, or a car. A paper calendar, a phone's free clock and timer, and the school's assignment page all work. Jae takes the city bus; buffers matter most when you don't control the ride.</a:t>
-            </a:r>
-          </a:p>
-          <a:p>
-            <a:pPr algn="l">
-              <a:spcAft>
-                <a:spcPts val="585"/>
-              </a:spcAft>
-            </a:pPr>
-            <a:r>
-              <a:rPr sz="1300" b="0" i="0">
-                <a:solidFill>
-                  <a:srgbClr val="1C1B19"/>
-                </a:solidFill>
-                <a:latin typeface="Source Serif 4"/>
-              </a:rPr>
-              <a:t/>
-            </a:r>
-          </a:p>
-          <a:p>
-            <a:pPr algn="l">
-              <a:spcAft>
-                <a:spcPts val="585"/>
-              </a:spcAft>
-            </a:pPr>
-            <a:r>
-              <a:rPr sz="1500" b="1" i="0">
-                <a:solidFill>
-                  <a:srgbClr val="1C1B19"/>
-                </a:solidFill>
-                <a:latin typeface="Source Serif 4"/>
-              </a:rPr>
-              <a:t>Different ideas of on time.</a:t>
-            </a:r>
-          </a:p>
-          <a:p>
-            <a:pPr algn="l">
-              <a:spcAft>
-                <a:spcPts val="585"/>
-              </a:spcAft>
-            </a:pPr>
-            <a:r>
-              <a:rPr sz="1300" b="0" i="0">
-                <a:solidFill>
-                  <a:srgbClr val="1C1B19"/>
-                </a:solidFill>
-                <a:latin typeface="Source Serif 4"/>
-              </a:rPr>
-              <a:t>Norms about time vary across families and cultures, and none is wrong. The lesson is about school and work deadlines, where the clock is fixed. Ask students to think privately about how time works at home.</a:t>
-            </a:r>
-          </a:p>
-          <a:p>
-            <a:pPr algn="l">
-              <a:spcAft>
-                <a:spcPts val="585"/>
-              </a:spcAft>
-            </a:pPr>
-            <a:r>
-              <a:rPr sz="1300" b="0" i="0">
-                <a:solidFill>
-                  <a:srgbClr val="1C1B19"/>
-                </a:solidFill>
-                <a:latin typeface="Source Serif 4"/>
-              </a:rPr>
-              <a:t/>
-            </a:r>
-          </a:p>
-          <a:p>
-            <a:pPr algn="l">
-              <a:spcAft>
-                <a:spcPts val="585"/>
-              </a:spcAft>
-            </a:pPr>
-            <a:r>
-              <a:rPr sz="1500" b="1" i="0">
-                <a:solidFill>
-                  <a:srgbClr val="1C1B19"/>
-                </a:solidFill>
-                <a:latin typeface="Source Serif 4"/>
-              </a:rPr>
-              <a:t>Faith, family and the calendar.</a:t>
-            </a:r>
-          </a:p>
-          <a:p>
-            <a:pPr algn="l">
-              <a:spcAft>
-                <a:spcPts val="585"/>
-              </a:spcAft>
-            </a:pPr>
-            <a:r>
-              <a:rPr sz="1300" b="0" i="0">
-                <a:solidFill>
-                  <a:srgbClr val="1C1B19"/>
-                </a:solidFill>
-                <a:latin typeface="Source Serif 4"/>
-              </a:rPr>
-              <a:t>Religious holidays, prayer times, fasting and family events take real time and often can't move. A backward plan lets students see those days coming and start earlier, instead of losing a week by surprise.</a:t>
-            </a:r>
-          </a:p>
-          <a:p>
-            <a:pPr algn="l">
-              <a:spcAft>
-                <a:spcPts val="585"/>
-              </a:spcAft>
-            </a:pPr>
-            <a:r>
-              <a:rPr sz="1300" b="0" i="0">
-                <a:solidFill>
-                  <a:srgbClr val="1C1B19"/>
-                </a:solidFill>
-                <a:latin typeface="Source Serif 4"/>
-              </a:rPr>
-              <a:t/>
-            </a:r>
-          </a:p>
-        </p:txBody>
-      </p:sp>
-    </p:spTree>
-  </p:cSld>
-  <p:clrMapOvr>
-    <a:masterClrMapping/>
-  </p:clrMapOvr>
-</p:sld>
-</file>
-
-<file path=ppt/slides/slide4.xml><?xml version="1.0" encoding="utf-8"?>
-<p:sld xmlns:a="http://schemas.openxmlformats.org/drawingml/2006/main" xmlns:p="http://schemas.openxmlformats.org/presentationml/2006/main" xmlns:r="http://schemas.openxmlformats.org/officeDocument/2006/relationships" show="0">
-  <p:cSld>
-    <p:bg>
-      <p:bgPr>
-        <a:solidFill>
-          <a:srgbClr val="EEEBE4"/>
-        </a:solidFill>
-        <a:effectLst/>
-      </p:bgPr>
-    </p:bg>
-    <p:spTree>
-      <p:nvGrpSpPr>
-        <p:cNvPr id="1" name=""/>
-        <p:cNvGrpSpPr/>
-        <p:nvPr/>
-      </p:nvGrpSpPr>
-      <p:grpSpPr/>
-      <p:sp>
-        <p:nvSpPr>
-          <p:cNvPr id="2" name="Rectangle 1"/>
-          <p:cNvSpPr/>
-          <p:nvPr/>
-        </p:nvSpPr>
-        <p:spPr>
-          <a:xfrm>
-            <a:off x="0" y="0"/>
-            <a:ext cx="12191695" cy="384048"/>
-          </a:xfrm>
-          <a:prstGeom prst="rect">
-            <a:avLst/>
-          </a:prstGeom>
-          <a:solidFill>
-            <a:srgbClr val="0B2D5B"/>
-          </a:solidFill>
-          <a:ln>
-            <a:noFill/>
-          </a:ln>
-          <a:effectLst/>
-        </p:spPr>
-        <p:style>
-          <a:lnRef idx="1">
-            <a:schemeClr val="accent1"/>
-          </a:lnRef>
-          <a:fillRef idx="3">
-            <a:schemeClr val="accent1"/>
-          </a:fillRef>
-          <a:effectRef idx="2">
-            <a:schemeClr val="accent1"/>
-          </a:effectRef>
-          <a:fontRef idx="minor">
-            <a:schemeClr val="lt1"/>
-          </a:fontRef>
-        </p:style>
-        <p:txBody>
-          <a:bodyPr rtlCol="0" anchor="ctr"/>
-          <a:lstStyle/>
-          <a:p>
-            <a:pPr algn="ctr"/>
-          </a:p>
-        </p:txBody>
-      </p:sp>
-      <p:sp>
-        <p:nvSpPr>
-          <p:cNvPr id="3" name="TextBox 2"/>
-          <p:cNvSpPr txBox="1"/>
-          <p:nvPr/>
-        </p:nvSpPr>
-        <p:spPr>
-          <a:xfrm>
-            <a:off x="548640" y="100584"/>
-            <a:ext cx="10972800" cy="274320"/>
-          </a:xfrm>
-          <a:prstGeom prst="rect">
-            <a:avLst/>
-          </a:prstGeom>
-          <a:noFill/>
-        </p:spPr>
-        <p:txBody>
-          <a:bodyPr wrap="square" anchor="t" lIns="0" rIns="0" tIns="0" bIns="0">
-            <a:spAutoFit/>
-          </a:bodyPr>
-          <a:lstStyle/>
-          <a:p>
-            <a:pPr algn="l">
-              <a:spcAft>
-                <a:spcPts val="495"/>
-              </a:spcAft>
-            </a:pPr>
-            <a:r>
-              <a:rPr sz="1100" b="1" i="0">
-                <a:solidFill>
-                  <a:srgbClr val="FFFFFF"/>
-                </a:solidFill>
-                <a:latin typeface="Inter Tight"/>
-              </a:rPr>
-              <a:t>TEACHER PAGE  ·  skipped when you present  ·  Background</a:t>
-            </a:r>
-          </a:p>
-        </p:txBody>
-      </p:sp>
-      <p:sp>
-        <p:nvSpPr>
-          <p:cNvPr id="4" name="TextBox 3"/>
-          <p:cNvSpPr txBox="1"/>
-          <p:nvPr/>
-        </p:nvSpPr>
-        <p:spPr>
-          <a:xfrm>
-            <a:off x="548640" y="685800"/>
-            <a:ext cx="10972800" cy="640080"/>
-          </a:xfrm>
-          <a:prstGeom prst="rect">
-            <a:avLst/>
-          </a:prstGeom>
-          <a:noFill/>
-        </p:spPr>
-        <p:txBody>
-          <a:bodyPr wrap="square" anchor="t" lIns="0" rIns="0" tIns="0" bIns="0">
-            <a:spAutoFit/>
-          </a:bodyPr>
-          <a:lstStyle/>
-          <a:p>
-            <a:pPr algn="l">
-              <a:spcAft>
-                <a:spcPts val="1350"/>
-              </a:spcAft>
-            </a:pPr>
-            <a:r>
-              <a:rPr sz="3000" b="1" i="0">
-                <a:solidFill>
-                  <a:srgbClr val="1C1B19"/>
-                </a:solidFill>
-                <a:latin typeface="Source Serif 4"/>
-              </a:rPr>
-              <a:t>What the research says</a:t>
-            </a:r>
-          </a:p>
-        </p:txBody>
-      </p:sp>
-      <p:sp>
-        <p:nvSpPr>
-          <p:cNvPr id="5" name="TextBox 4"/>
-          <p:cNvSpPr txBox="1"/>
-          <p:nvPr/>
-        </p:nvSpPr>
-        <p:spPr>
-          <a:xfrm>
-            <a:off x="548640" y="1463040"/>
-            <a:ext cx="5394960" cy="4937760"/>
-          </a:xfrm>
-          <a:prstGeom prst="rect">
-            <a:avLst/>
-          </a:prstGeom>
-          <a:noFill/>
-        </p:spPr>
-        <p:txBody>
-          <a:bodyPr wrap="square" anchor="t" lIns="0" rIns="0" tIns="0" bIns="0">
-            <a:spAutoFit/>
-          </a:bodyPr>
-          <a:lstStyle/>
-          <a:p>
-            <a:pPr algn="l">
-              <a:spcAft>
-                <a:spcPts val="585"/>
-              </a:spcAft>
-            </a:pPr>
-            <a:r>
-              <a:rPr sz="1300" b="0" i="0">
-                <a:solidFill>
-                  <a:srgbClr val="1C1B19"/>
-                </a:solidFill>
-                <a:latin typeface="Source Serif 4"/>
-              </a:rPr>
-              <a:t>College seniors gave a realistic, best-case and worst-case estimate for their thesis. The actual time beat even the worst case. Only about 30% finished within their own realistic estimate.</a:t>
-            </a:r>
-          </a:p>
-          <a:p>
-            <a:pPr algn="l">
-              <a:spcAft>
-                <a:spcPts val="585"/>
-              </a:spcAft>
-            </a:pPr>
-            <a:r>
-              <a:rPr sz="1050" b="0" i="0">
-                <a:solidFill>
-                  <a:srgbClr val="5D5A54"/>
-                </a:solidFill>
-                <a:latin typeface="Inter Tight"/>
-              </a:rPr>
-              <a:t>Buehler, Griffin and Ross, Journal of Personality and Social Psychology, 1994</a:t>
-            </a:r>
-          </a:p>
-          <a:p>
-            <a:pPr algn="l">
-              <a:spcAft>
-                <a:spcPts val="585"/>
-              </a:spcAft>
-            </a:pPr>
-            <a:r>
-              <a:rPr sz="1300" b="0" i="0">
-                <a:solidFill>
-                  <a:srgbClr val="1C1B19"/>
-                </a:solidFill>
-                <a:latin typeface="Source Serif 4"/>
-              </a:rPr>
-              <a:t>Buehler's students rarely thought about how long their past projects had actually taken, even though that history was the best predictor they had.</a:t>
-            </a:r>
-          </a:p>
-          <a:p>
-            <a:pPr algn="l">
-              <a:spcAft>
-                <a:spcPts val="585"/>
-              </a:spcAft>
-            </a:pPr>
-            <a:r>
-              <a:rPr sz="1050" b="0" i="0">
-                <a:solidFill>
-                  <a:srgbClr val="5D5A54"/>
-                </a:solidFill>
-                <a:latin typeface="Inter Tight"/>
-              </a:rPr>
-              <a:t>Buehler, Griffin and Ross, Journal of Personality and Social Psychology, 1994</a:t>
-            </a:r>
-          </a:p>
-          <a:p>
-            <a:pPr algn="l">
-              <a:spcAft>
-                <a:spcPts val="585"/>
-              </a:spcAft>
-            </a:pPr>
-            <a:r>
-              <a:rPr sz="1300" b="0" i="0">
-                <a:solidFill>
-                  <a:srgbClr val="1C1B19"/>
-                </a:solidFill>
-                <a:latin typeface="Source Serif 4"/>
-              </a:rPr>
-              <a:t>Kahneman and Tversky named the planning fallacy, and contrasted the inside view (picturing your plan going smoothly) with the outside view (how long this kind of thing usually takes).</a:t>
-            </a:r>
-          </a:p>
-          <a:p>
-            <a:pPr algn="l">
-              <a:spcAft>
-                <a:spcPts val="585"/>
-              </a:spcAft>
-            </a:pPr>
-            <a:r>
-              <a:rPr sz="1050" b="0" i="0">
-                <a:solidFill>
-                  <a:srgbClr val="5D5A54"/>
-                </a:solidFill>
-                <a:latin typeface="Inter Tight"/>
-              </a:rPr>
-              <a:t>Kahneman and Tversky, TIMS Studies in Management Science, 1979</a:t>
-            </a:r>
-          </a:p>
-        </p:txBody>
-      </p:sp>
-      <p:sp>
-        <p:nvSpPr>
-          <p:cNvPr id="6" name="TextBox 5"/>
-          <p:cNvSpPr txBox="1"/>
-          <p:nvPr/>
-        </p:nvSpPr>
-        <p:spPr>
-          <a:xfrm>
-            <a:off x="6217920" y="1463040"/>
-            <a:ext cx="5394960" cy="4937760"/>
-          </a:xfrm>
-          <a:prstGeom prst="rect">
-            <a:avLst/>
-          </a:prstGeom>
-          <a:noFill/>
-        </p:spPr>
-        <p:txBody>
-          <a:bodyPr wrap="square" anchor="t" lIns="0" rIns="0" tIns="0" bIns="0">
-            <a:spAutoFit/>
-          </a:bodyPr>
-          <a:lstStyle/>
-          <a:p>
-            <a:pPr algn="l">
-              <a:spcAft>
-                <a:spcPts val="585"/>
-              </a:spcAft>
-            </a:pPr>
-            <a:r>
-              <a:rPr sz="1300" b="0" i="0">
-                <a:solidFill>
-                  <a:srgbClr val="1C1B19"/>
-                </a:solidFill>
-                <a:latin typeface="Source Serif 4"/>
-              </a:rPr>
-              <a:t>People tend to underestimate how long past tasks took, then base future guesses on that memory.</a:t>
-            </a:r>
-          </a:p>
-          <a:p>
-            <a:pPr algn="l">
-              <a:spcAft>
-                <a:spcPts val="585"/>
-              </a:spcAft>
-            </a:pPr>
-            <a:r>
-              <a:rPr sz="1050" b="0" i="0">
-                <a:solidFill>
-                  <a:srgbClr val="5D5A54"/>
-                </a:solidFill>
-                <a:latin typeface="Inter Tight"/>
-              </a:rPr>
-              <a:t>Roy, Christenfeld and McKenzie, Psychological Bulletin, 2005</a:t>
-            </a:r>
-          </a:p>
-          <a:p>
-            <a:pPr algn="l">
-              <a:spcAft>
-                <a:spcPts val="585"/>
-              </a:spcAft>
-            </a:pPr>
-            <a:r>
-              <a:rPr sz="1300" b="0" i="0">
-                <a:solidFill>
-                  <a:srgbClr val="1C1B19"/>
-                </a:solidFill>
-                <a:latin typeface="Source Serif 4"/>
-              </a:rPr>
-              <a:t>People who broke tasks into parts gave longer estimates, and in two of four experiments those estimates were closer to the truth.</a:t>
-            </a:r>
-          </a:p>
-          <a:p>
-            <a:pPr algn="l">
-              <a:spcAft>
-                <a:spcPts val="585"/>
-              </a:spcAft>
-            </a:pPr>
-            <a:r>
-              <a:rPr sz="1050" b="0" i="0">
-                <a:solidFill>
-                  <a:srgbClr val="5D5A54"/>
-                </a:solidFill>
-                <a:latin typeface="Inter Tight"/>
-              </a:rPr>
-              <a:t>Kruger and Evans, Journal of Experimental Social Psychology, 2004</a:t>
-            </a:r>
-          </a:p>
-          <a:p>
-            <a:pPr algn="l">
-              <a:spcAft>
-                <a:spcPts val="585"/>
-              </a:spcAft>
-            </a:pPr>
-            <a:r>
-              <a:rPr sz="1300" b="0" i="0">
-                <a:solidFill>
-                  <a:srgbClr val="1C1B19"/>
-                </a:solidFill>
-                <a:latin typeface="Source Serif 4"/>
-              </a:rPr>
-              <a:t>Students who wrote down exactly when and where they'd do an assignment finished it more often and were interrupted less, shrinking the gap between plan and reality.</a:t>
-            </a:r>
-          </a:p>
-          <a:p>
-            <a:pPr algn="l">
-              <a:spcAft>
-                <a:spcPts val="585"/>
-              </a:spcAft>
-            </a:pPr>
-            <a:r>
-              <a:rPr sz="1050" b="0" i="0">
-                <a:solidFill>
-                  <a:srgbClr val="5D5A54"/>
-                </a:solidFill>
-                <a:latin typeface="Inter Tight"/>
-              </a:rPr>
-              <a:t>Koole and van 't Spijker, European Journal of Social Psychology, 2000</a:t>
-            </a:r>
-          </a:p>
-        </p:txBody>
-      </p:sp>
-    </p:spTree>
-  </p:cSld>
-  <p:clrMapOvr>
-    <a:masterClrMapping/>
-  </p:clrMapOvr>
-</p:sld>
-</file>
-
-<file path=ppt/slides/slide5.xml><?xml version="1.0" encoding="utf-8"?>
-<p:sld xmlns:a="http://schemas.openxmlformats.org/drawingml/2006/main" xmlns:p="http://schemas.openxmlformats.org/presentationml/2006/main" xmlns:r="http://schemas.openxmlformats.org/officeDocument/2006/relationships">
-  <p:cSld>
-    <p:bg>
-      <p:bgPr>
-        <a:solidFill>
-          <a:srgbClr val="0B2D5B"/>
-        </a:solidFill>
-        <a:effectLst/>
-      </p:bgPr>
-    </p:bg>
-    <p:spTree>
-      <p:nvGrpSpPr>
-        <p:cNvPr id="1" name=""/>
-        <p:cNvGrpSpPr/>
-        <p:nvPr/>
-      </p:nvGrpSpPr>
-      <p:grpSpPr/>
-      <p:sp>
-        <p:nvSpPr>
-          <p:cNvPr id="2" name="Rectangle 1"/>
-          <p:cNvSpPr/>
-          <p:nvPr/>
-        </p:nvSpPr>
-        <p:spPr>
-          <a:xfrm>
-            <a:off x="548640" y="502920"/>
-            <a:ext cx="457200" cy="54864"/>
-          </a:xfrm>
-          <a:prstGeom prst="rect">
-            <a:avLst/>
-          </a:prstGeom>
-          <a:solidFill>
-            <a:srgbClr val="F47B20"/>
-          </a:solidFill>
-          <a:ln>
-            <a:noFill/>
-          </a:ln>
-          <a:effectLst/>
-        </p:spPr>
-        <p:style>
-          <a:lnRef idx="1">
-            <a:schemeClr val="accent1"/>
-          </a:lnRef>
-          <a:fillRef idx="3">
-            <a:schemeClr val="accent1"/>
-          </a:fillRef>
-          <a:effectRef idx="2">
-            <a:schemeClr val="accent1"/>
-          </a:effectRef>
-          <a:fontRef idx="minor">
-            <a:schemeClr val="lt1"/>
-          </a:fontRef>
-        </p:style>
-        <p:txBody>
-          <a:bodyPr rtlCol="0" anchor="ctr"/>
-          <a:lstStyle/>
-          <a:p>
-            <a:pPr algn="ctr"/>
-          </a:p>
-        </p:txBody>
-      </p:sp>
-      <p:sp>
-        <p:nvSpPr>
-          <p:cNvPr id="3" name="TextBox 2"/>
-          <p:cNvSpPr txBox="1"/>
-          <p:nvPr/>
-        </p:nvSpPr>
-        <p:spPr>
-          <a:xfrm>
-            <a:off x="1143000" y="393192"/>
-            <a:ext cx="8229600" cy="274320"/>
-          </a:xfrm>
-          <a:prstGeom prst="rect">
-            <a:avLst/>
-          </a:prstGeom>
-          <a:noFill/>
-        </p:spPr>
-        <p:txBody>
-          <a:bodyPr wrap="square" anchor="t" lIns="0" rIns="0" tIns="0" bIns="0">
-            <a:spAutoFit/>
-          </a:bodyPr>
-          <a:lstStyle/>
-          <a:p>
-            <a:pPr algn="l">
-              <a:spcAft>
-                <a:spcPts val="540"/>
-              </a:spcAft>
-            </a:pPr>
-            <a:r>
-              <a:rPr sz="1200" b="1" i="0">
-                <a:solidFill>
-                  <a:srgbClr val="5D5A54"/>
-                </a:solidFill>
-                <a:latin typeface="Inter Tight"/>
-              </a:rPr>
-              <a:t>WHERE DID THE AFTERNOON GO?</a:t>
-            </a:r>
-          </a:p>
-        </p:txBody>
-      </p:sp>
-      <p:sp>
-        <p:nvSpPr>
-          <p:cNvPr id="4" name="TextBox 3"/>
-          <p:cNvSpPr txBox="1"/>
-          <p:nvPr/>
-        </p:nvSpPr>
-        <p:spPr>
-          <a:xfrm>
-            <a:off x="8229600" y="6400800"/>
-            <a:ext cx="3410712" cy="274320"/>
-          </a:xfrm>
-          <a:prstGeom prst="rect">
-            <a:avLst/>
-          </a:prstGeom>
-          <a:noFill/>
-        </p:spPr>
-        <p:txBody>
-          <a:bodyPr wrap="square" anchor="t" lIns="0" rIns="0" tIns="0" bIns="0">
-            <a:spAutoFit/>
-          </a:bodyPr>
-          <a:lstStyle/>
-          <a:p>
-            <a:pPr algn="r">
-              <a:spcAft>
-                <a:spcPts val="450"/>
-              </a:spcAft>
-            </a:pPr>
-            <a:r>
-              <a:rPr sz="1000" b="0" i="0">
-                <a:solidFill>
-                  <a:srgbClr val="5D5A54"/>
-                </a:solidFill>
-                <a:latin typeface="Inter Tight"/>
-              </a:rPr>
-              <a:t>Beaver Counseling</a:t>
-            </a:r>
-          </a:p>
-        </p:txBody>
-      </p:sp>
-      <p:sp>
-        <p:nvSpPr>
-          <p:cNvPr id="5" name="TextBox 4"/>
-          <p:cNvSpPr txBox="1"/>
-          <p:nvPr/>
-        </p:nvSpPr>
-        <p:spPr>
-          <a:xfrm>
-            <a:off x="822960" y="1371600"/>
-            <a:ext cx="10515600" cy="2377440"/>
-          </a:xfrm>
-          <a:prstGeom prst="rect">
-            <a:avLst/>
-          </a:prstGeom>
-          <a:noFill/>
-        </p:spPr>
-        <p:txBody>
-          <a:bodyPr wrap="square" anchor="b" lIns="0" rIns="0" tIns="0" bIns="0">
-            <a:spAutoFit/>
-          </a:bodyPr>
-          <a:lstStyle/>
-          <a:p>
-            <a:pPr algn="l">
-              <a:spcAft>
-                <a:spcPts val="2430"/>
-              </a:spcAft>
-            </a:pPr>
-            <a:r>
-              <a:rPr sz="5400" b="1" i="0">
-                <a:solidFill>
-                  <a:srgbClr val="FFFFFF"/>
-                </a:solidFill>
-                <a:latin typeface="Source Serif 4"/>
-              </a:rPr>
-              <a:t>Where Did the Afternoon Go?</a:t>
-            </a:r>
-          </a:p>
-        </p:txBody>
-      </p:sp>
-      <p:sp>
-        <p:nvSpPr>
-          <p:cNvPr id="6" name="TextBox 5"/>
-          <p:cNvSpPr txBox="1"/>
-          <p:nvPr/>
-        </p:nvSpPr>
-        <p:spPr>
-          <a:xfrm>
-            <a:off x="822960" y="3931920"/>
-            <a:ext cx="10515600" cy="914400"/>
-          </a:xfrm>
-          <a:prstGeom prst="rect">
-            <a:avLst/>
-          </a:prstGeom>
-          <a:noFill/>
-        </p:spPr>
-        <p:txBody>
-          <a:bodyPr wrap="square" anchor="t" lIns="0" rIns="0" tIns="0" bIns="0">
-            <a:spAutoFit/>
-          </a:bodyPr>
-          <a:lstStyle/>
-          <a:p>
-            <a:pPr algn="l">
-              <a:spcAft>
-                <a:spcPts val="1080"/>
-              </a:spcAft>
-            </a:pPr>
-            <a:r>
-              <a:rPr sz="2400" b="0" i="1">
-                <a:solidFill>
-                  <a:srgbClr val="E8E4DA"/>
-                </a:solidFill>
-                <a:latin typeface="Source Serif 4"/>
-              </a:rPr>
-              <a:t>"It'll take an hour." It did not take an hour.</a:t>
-            </a:r>
-          </a:p>
-        </p:txBody>
-      </p:sp>
-      <p:sp>
-        <p:nvSpPr>
-          <p:cNvPr id="7" name="TextBox 6"/>
-          <p:cNvSpPr txBox="1"/>
-          <p:nvPr/>
-        </p:nvSpPr>
-        <p:spPr>
-          <a:xfrm>
-            <a:off x="822960" y="6035040"/>
-            <a:ext cx="7315200" cy="365760"/>
-          </a:xfrm>
-          <a:prstGeom prst="rect">
-            <a:avLst/>
-          </a:prstGeom>
-          <a:noFill/>
-        </p:spPr>
-        <p:txBody>
-          <a:bodyPr wrap="square" anchor="t" lIns="0" rIns="0" tIns="0" bIns="0">
-            <a:spAutoFit/>
-          </a:bodyPr>
-          <a:lstStyle/>
-          <a:p>
-            <a:pPr algn="l">
-              <a:spcAft>
-                <a:spcPts val="585"/>
-              </a:spcAft>
-            </a:pPr>
-            <a:r>
-              <a:rPr sz="1300" b="0" i="0">
-                <a:solidFill>
-                  <a:srgbClr val="E8E4DA"/>
-                </a:solidFill>
-                <a:latin typeface="Inter Tight"/>
-              </a:rPr>
-              <a:t>Beaver Upper School · Counseling</a:t>
+              <a:t>"Now" and "not now" can feel like the only two times.</a:t>
             </a:r>
           </a:p>
         </p:txBody>
@@ -8241,7 +8317,7 @@
                 </a:solidFill>
                 <a:latin typeface="Inter Tight"/>
               </a:rPr>
-              <a:t>THE GUESS</a:t>
+              <a:t>TIME THIEVES</a:t>
             </a:r>
           </a:p>
         </p:txBody>
@@ -8363,7 +8439,7 @@
                 </a:solidFill>
                 <a:latin typeface="Source Serif 4"/>
               </a:rPr>
-              <a:t>What percent of college seniors finished their thesis on time?</a:t>
+              <a:t>What eats your time that never makes it into the plan?</a:t>
             </a:r>
           </a:p>
         </p:txBody>
@@ -8402,7 +8478,7 @@
                 </a:solidFill>
                 <a:latin typeface="Inter Tight"/>
               </a:rPr>
-              <a:t>On time means within their own realistic estimate. Write a number on your card. No names.</a:t>
+              <a:t>One per card. No names.</a:t>
             </a:r>
           </a:p>
         </p:txBody>
@@ -8511,7 +8587,7 @@
                 </a:solidFill>
                 <a:latin typeface="Inter Tight"/>
               </a:rPr>
-              <a:t>THE PLANNING FALLACY</a:t>
+              <a:t>THREE PLANS</a:t>
             </a:r>
           </a:p>
         </p:txBody>
@@ -8563,47 +8639,8 @@
         </p:nvSpPr>
         <p:spPr>
           <a:xfrm>
-            <a:off x="822960" y="1463040"/>
-            <a:ext cx="10515600" cy="3291840"/>
-          </a:xfrm>
-          <a:prstGeom prst="rect">
-            <a:avLst/>
-          </a:prstGeom>
-          <a:noFill/>
-        </p:spPr>
-        <p:txBody>
-          <a:bodyPr wrap="square" anchor="ctr" lIns="0" rIns="0" tIns="0" bIns="0">
-            <a:spAutoFit/>
-          </a:bodyPr>
-          <a:lstStyle/>
-          <a:p>
-            <a:pPr algn="l">
-              <a:spcAft>
-                <a:spcPts val="2070"/>
-              </a:spcAft>
-            </a:pPr>
-            <a:r>
-              <a:rPr sz="4600" b="1" i="0">
-                <a:solidFill>
-                  <a:srgbClr val="1C1B19"/>
-                </a:solidFill>
-                <a:latin typeface="Source Serif 4"/>
-              </a:rPr>
-              <a:t>Even the worst case was too hopeful.</a:t>
-            </a:r>
-          </a:p>
-        </p:txBody>
-      </p:sp>
-      <p:sp>
-        <p:nvSpPr>
-          <p:cNvPr id="6" name="TextBox 5"/>
-          <p:cNvSpPr txBox="1"/>
-          <p:nvPr/>
-        </p:nvSpPr>
-        <p:spPr>
-          <a:xfrm>
-            <a:off x="822960" y="4846320"/>
-            <a:ext cx="10515600" cy="1097280"/>
+            <a:off x="822960" y="1005840"/>
+            <a:ext cx="10515600" cy="914400"/>
           </a:xfrm>
           <a:prstGeom prst="rect">
             <a:avLst/>
@@ -8618,17 +8655,389 @@
           <a:p>
             <a:pPr algn="l">
               <a:spcAft>
-                <a:spcPts val="990"/>
-              </a:spcAft>
-            </a:pPr>
-            <a:r>
-              <a:rPr sz="2200" b="0" i="1">
-                <a:solidFill>
-                  <a:srgbClr val="5D5A54"/>
+                <a:spcPts val="1530"/>
+              </a:spcAft>
+            </a:pPr>
+            <a:r>
+              <a:rPr sz="3400" b="1" i="0">
+                <a:solidFill>
+                  <a:srgbClr val="1C1B19"/>
                 </a:solidFill>
                 <a:latin typeface="Source Serif 4"/>
               </a:rPr>
-              <a:t>Seniors gave a best case, a realistic case and a worst case. The real time beat the worst case.</a:t>
+              <a:t>Which fix would help most?</a:t>
+            </a:r>
+          </a:p>
+        </p:txBody>
+      </p:sp>
+      <p:sp>
+        <p:nvSpPr>
+          <p:cNvPr id="6" name="Rectangle 5"/>
+          <p:cNvSpPr/>
+          <p:nvPr/>
+        </p:nvSpPr>
+        <p:spPr>
+          <a:xfrm>
+            <a:off x="822960" y="2103120"/>
+            <a:ext cx="3322320" cy="3840480"/>
+          </a:xfrm>
+          <a:prstGeom prst="rect">
+            <a:avLst/>
+          </a:prstGeom>
+          <a:solidFill>
+            <a:srgbClr val="FFFFFF"/>
+          </a:solidFill>
+          <a:ln w="15875">
+            <a:solidFill>
+              <a:srgbClr val="D8D2C6"/>
+            </a:solidFill>
+          </a:ln>
+          <a:effectLst/>
+        </p:spPr>
+        <p:style>
+          <a:lnRef idx="1">
+            <a:schemeClr val="accent1"/>
+          </a:lnRef>
+          <a:fillRef idx="3">
+            <a:schemeClr val="accent1"/>
+          </a:fillRef>
+          <a:effectRef idx="2">
+            <a:schemeClr val="accent1"/>
+          </a:effectRef>
+          <a:fontRef idx="minor">
+            <a:schemeClr val="lt1"/>
+          </a:fontRef>
+        </p:style>
+        <p:txBody>
+          <a:bodyPr rtlCol="0" anchor="ctr"/>
+          <a:lstStyle/>
+          <a:p>
+            <a:pPr algn="ctr"/>
+          </a:p>
+        </p:txBody>
+      </p:sp>
+      <p:sp>
+        <p:nvSpPr>
+          <p:cNvPr id="7" name="TextBox 6"/>
+          <p:cNvSpPr txBox="1"/>
+          <p:nvPr/>
+        </p:nvSpPr>
+        <p:spPr>
+          <a:xfrm>
+            <a:off x="1051560" y="2286000"/>
+            <a:ext cx="2865120" cy="365760"/>
+          </a:xfrm>
+          <a:prstGeom prst="rect">
+            <a:avLst/>
+          </a:prstGeom>
+          <a:noFill/>
+        </p:spPr>
+        <p:txBody>
+          <a:bodyPr wrap="square" anchor="t" lIns="0" rIns="0" tIns="0" bIns="0">
+            <a:spAutoFit/>
+          </a:bodyPr>
+          <a:lstStyle/>
+          <a:p>
+            <a:pPr algn="l">
+              <a:spcAft>
+                <a:spcPts val="585"/>
+              </a:spcAft>
+            </a:pPr>
+            <a:r>
+              <a:rPr sz="1300" b="1" i="0">
+                <a:solidFill>
+                  <a:srgbClr val="0B2D5B"/>
+                </a:solidFill>
+                <a:latin typeface="Inter Tight"/>
+              </a:rPr>
+              <a:t>NIA</a:t>
+            </a:r>
+          </a:p>
+        </p:txBody>
+      </p:sp>
+      <p:sp>
+        <p:nvSpPr>
+          <p:cNvPr id="8" name="TextBox 7"/>
+          <p:cNvSpPr txBox="1"/>
+          <p:nvPr/>
+        </p:nvSpPr>
+        <p:spPr>
+          <a:xfrm>
+            <a:off x="1051560" y="2743200"/>
+            <a:ext cx="2865120" cy="3017520"/>
+          </a:xfrm>
+          <a:prstGeom prst="rect">
+            <a:avLst/>
+          </a:prstGeom>
+          <a:noFill/>
+        </p:spPr>
+        <p:txBody>
+          <a:bodyPr wrap="square" anchor="t" lIns="0" rIns="0" tIns="0" bIns="0">
+            <a:spAutoFit/>
+          </a:bodyPr>
+          <a:lstStyle/>
+          <a:p>
+            <a:pPr algn="l">
+              <a:spcAft>
+                <a:spcPts val="810"/>
+              </a:spcAft>
+            </a:pPr>
+            <a:r>
+              <a:rPr sz="1800" b="0" i="0">
+                <a:solidFill>
+                  <a:srgbClr val="1C1B19"/>
+                </a:solidFill>
+                <a:latin typeface="Source Serif 4"/>
+              </a:rPr>
+              <a:t>Her first history research paper is due Friday. It's Tuesday. She figures "about three hours," since that's how long it would take if she knew exactly what to say.</a:t>
+            </a:r>
+          </a:p>
+        </p:txBody>
+      </p:sp>
+      <p:sp>
+        <p:nvSpPr>
+          <p:cNvPr id="9" name="Rectangle 8"/>
+          <p:cNvSpPr/>
+          <p:nvPr/>
+        </p:nvSpPr>
+        <p:spPr>
+          <a:xfrm>
+            <a:off x="4419600" y="2103120"/>
+            <a:ext cx="3322320" cy="3840480"/>
+          </a:xfrm>
+          <a:prstGeom prst="rect">
+            <a:avLst/>
+          </a:prstGeom>
+          <a:solidFill>
+            <a:srgbClr val="FFFFFF"/>
+          </a:solidFill>
+          <a:ln w="15875">
+            <a:solidFill>
+              <a:srgbClr val="D8D2C6"/>
+            </a:solidFill>
+          </a:ln>
+          <a:effectLst/>
+        </p:spPr>
+        <p:style>
+          <a:lnRef idx="1">
+            <a:schemeClr val="accent1"/>
+          </a:lnRef>
+          <a:fillRef idx="3">
+            <a:schemeClr val="accent1"/>
+          </a:fillRef>
+          <a:effectRef idx="2">
+            <a:schemeClr val="accent1"/>
+          </a:effectRef>
+          <a:fontRef idx="minor">
+            <a:schemeClr val="lt1"/>
+          </a:fontRef>
+        </p:style>
+        <p:txBody>
+          <a:bodyPr rtlCol="0" anchor="ctr"/>
+          <a:lstStyle/>
+          <a:p>
+            <a:pPr algn="ctr"/>
+          </a:p>
+        </p:txBody>
+      </p:sp>
+      <p:sp>
+        <p:nvSpPr>
+          <p:cNvPr id="10" name="TextBox 9"/>
+          <p:cNvSpPr txBox="1"/>
+          <p:nvPr/>
+        </p:nvSpPr>
+        <p:spPr>
+          <a:xfrm>
+            <a:off x="4648200" y="2286000"/>
+            <a:ext cx="2865120" cy="365760"/>
+          </a:xfrm>
+          <a:prstGeom prst="rect">
+            <a:avLst/>
+          </a:prstGeom>
+          <a:noFill/>
+        </p:spPr>
+        <p:txBody>
+          <a:bodyPr wrap="square" anchor="t" lIns="0" rIns="0" tIns="0" bIns="0">
+            <a:spAutoFit/>
+          </a:bodyPr>
+          <a:lstStyle/>
+          <a:p>
+            <a:pPr algn="l">
+              <a:spcAft>
+                <a:spcPts val="585"/>
+              </a:spcAft>
+            </a:pPr>
+            <a:r>
+              <a:rPr sz="1300" b="1" i="0">
+                <a:solidFill>
+                  <a:srgbClr val="0B2D5B"/>
+                </a:solidFill>
+                <a:latin typeface="Inter Tight"/>
+              </a:rPr>
+              <a:t>JAE</a:t>
+            </a:r>
+          </a:p>
+        </p:txBody>
+      </p:sp>
+      <p:sp>
+        <p:nvSpPr>
+          <p:cNvPr id="11" name="TextBox 10"/>
+          <p:cNvSpPr txBox="1"/>
+          <p:nvPr/>
+        </p:nvSpPr>
+        <p:spPr>
+          <a:xfrm>
+            <a:off x="4648200" y="2743200"/>
+            <a:ext cx="2865120" cy="3017520"/>
+          </a:xfrm>
+          <a:prstGeom prst="rect">
+            <a:avLst/>
+          </a:prstGeom>
+          <a:noFill/>
+        </p:spPr>
+        <p:txBody>
+          <a:bodyPr wrap="square" anchor="t" lIns="0" rIns="0" tIns="0" bIns="0">
+            <a:spAutoFit/>
+          </a:bodyPr>
+          <a:lstStyle/>
+          <a:p>
+            <a:pPr algn="l">
+              <a:spcAft>
+                <a:spcPts val="810"/>
+              </a:spcAft>
+            </a:pPr>
+            <a:r>
+              <a:rPr sz="1800" b="0" i="0">
+                <a:solidFill>
+                  <a:srgbClr val="1C1B19"/>
+                </a:solidFill>
+                <a:latin typeface="Source Serif 4"/>
+              </a:rPr>
+              <a:t>Takes the city bus to school. The ride is 25 minutes, so he leaves 25 minutes before first bell. He's been late three times this month.</a:t>
+            </a:r>
+          </a:p>
+        </p:txBody>
+      </p:sp>
+      <p:sp>
+        <p:nvSpPr>
+          <p:cNvPr id="12" name="Rectangle 11"/>
+          <p:cNvSpPr/>
+          <p:nvPr/>
+        </p:nvSpPr>
+        <p:spPr>
+          <a:xfrm>
+            <a:off x="8016239" y="2103120"/>
+            <a:ext cx="3322320" cy="3840480"/>
+          </a:xfrm>
+          <a:prstGeom prst="rect">
+            <a:avLst/>
+          </a:prstGeom>
+          <a:solidFill>
+            <a:srgbClr val="FFFFFF"/>
+          </a:solidFill>
+          <a:ln w="15875">
+            <a:solidFill>
+              <a:srgbClr val="D8D2C6"/>
+            </a:solidFill>
+          </a:ln>
+          <a:effectLst/>
+        </p:spPr>
+        <p:style>
+          <a:lnRef idx="1">
+            <a:schemeClr val="accent1"/>
+          </a:lnRef>
+          <a:fillRef idx="3">
+            <a:schemeClr val="accent1"/>
+          </a:fillRef>
+          <a:effectRef idx="2">
+            <a:schemeClr val="accent1"/>
+          </a:effectRef>
+          <a:fontRef idx="minor">
+            <a:schemeClr val="lt1"/>
+          </a:fontRef>
+        </p:style>
+        <p:txBody>
+          <a:bodyPr rtlCol="0" anchor="ctr"/>
+          <a:lstStyle/>
+          <a:p>
+            <a:pPr algn="ctr"/>
+          </a:p>
+        </p:txBody>
+      </p:sp>
+      <p:sp>
+        <p:nvSpPr>
+          <p:cNvPr id="13" name="TextBox 12"/>
+          <p:cNvSpPr txBox="1"/>
+          <p:nvPr/>
+        </p:nvSpPr>
+        <p:spPr>
+          <a:xfrm>
+            <a:off x="8244839" y="2286000"/>
+            <a:ext cx="2865120" cy="365760"/>
+          </a:xfrm>
+          <a:prstGeom prst="rect">
+            <a:avLst/>
+          </a:prstGeom>
+          <a:noFill/>
+        </p:spPr>
+        <p:txBody>
+          <a:bodyPr wrap="square" anchor="t" lIns="0" rIns="0" tIns="0" bIns="0">
+            <a:spAutoFit/>
+          </a:bodyPr>
+          <a:lstStyle/>
+          <a:p>
+            <a:pPr algn="l">
+              <a:spcAft>
+                <a:spcPts val="585"/>
+              </a:spcAft>
+            </a:pPr>
+            <a:r>
+              <a:rPr sz="1300" b="1" i="0">
+                <a:solidFill>
+                  <a:srgbClr val="0B2D5B"/>
+                </a:solidFill>
+                <a:latin typeface="Inter Tight"/>
+              </a:rPr>
+              <a:t>SOFIA</a:t>
+            </a:r>
+          </a:p>
+        </p:txBody>
+      </p:sp>
+      <p:sp>
+        <p:nvSpPr>
+          <p:cNvPr id="14" name="TextBox 13"/>
+          <p:cNvSpPr txBox="1"/>
+          <p:nvPr/>
+        </p:nvSpPr>
+        <p:spPr>
+          <a:xfrm>
+            <a:off x="8244839" y="2743200"/>
+            <a:ext cx="2865120" cy="3017520"/>
+          </a:xfrm>
+          <a:prstGeom prst="rect">
+            <a:avLst/>
+          </a:prstGeom>
+          <a:noFill/>
+        </p:spPr>
+        <p:txBody>
+          <a:bodyPr wrap="square" anchor="t" lIns="0" rIns="0" tIns="0" bIns="0">
+            <a:spAutoFit/>
+          </a:bodyPr>
+          <a:lstStyle/>
+          <a:p>
+            <a:pPr algn="l">
+              <a:spcAft>
+                <a:spcPts val="810"/>
+              </a:spcAft>
+            </a:pPr>
+            <a:r>
+              <a:rPr sz="1800" b="0" i="0">
+                <a:solidFill>
+                  <a:srgbClr val="1C1B19"/>
+                </a:solidFill>
+                <a:latin typeface="Source Serif 4"/>
+              </a:rPr>
+              <a:t>Spends Sundays at her dad's apartment. She has four free hours and a list of seven things. She starts at the top, and the two biggest go untouched.</a:t>
             </a:r>
           </a:p>
         </p:txBody>
@@ -8737,7 +9146,7 @@
                 </a:solidFill>
                 <a:latin typeface="Inter Tight"/>
               </a:rPr>
-              <a:t>WHY IT HAPPENS</a:t>
+              <a:t>WHAT WORKS</a:t>
             </a:r>
           </a:p>
         </p:txBody>
@@ -8815,7 +9224,7 @@
                 </a:solidFill>
                 <a:latin typeface="Source Serif 4"/>
               </a:rPr>
-              <a:t>Why your brain lowballs time</a:t>
+              <a:t>Fix the estimate, then the calendar</a:t>
             </a:r>
           </a:p>
         </p:txBody>
@@ -8893,7 +9302,7 @@
                 </a:solidFill>
                 <a:latin typeface="Source Serif 4"/>
               </a:rPr>
-              <a:t>You plan from the inside.</a:t>
+              <a:t>Use your own data.</a:t>
             </a:r>
           </a:p>
           <a:p>
@@ -8909,7 +9318,7 @@
                 </a:solidFill>
                 <a:latin typeface="Source Serif 4"/>
               </a:rPr>
-              <a:t>You picture every step going smoothly.</a:t>
+              <a:t>Time a kind of task three times. Use that number.</a:t>
             </a:r>
           </a:p>
         </p:txBody>
@@ -8987,7 +9396,7 @@
                 </a:solidFill>
                 <a:latin typeface="Source Serif 4"/>
               </a:rPr>
-              <a:t>You remember past tasks as shorter.</a:t>
+              <a:t>Unpack the task.</a:t>
             </a:r>
           </a:p>
           <a:p>
@@ -9003,7 +9412,7 @@
                 </a:solidFill>
                 <a:latin typeface="Source Serif 4"/>
               </a:rPr>
-              <a:t>A bad memory feeds a bad plan.</a:t>
+              <a:t>List every piece before you guess.</a:t>
             </a:r>
           </a:p>
         </p:txBody>
@@ -9081,7 +9490,7 @@
                 </a:solidFill>
                 <a:latin typeface="Source Serif 4"/>
               </a:rPr>
-              <a:t>Interruptions never make the plan.</a:t>
+              <a:t>Decide where and when.</a:t>
             </a:r>
           </a:p>
           <a:p>
@@ -9097,7 +9506,7 @@
                 </a:solidFill>
                 <a:latin typeface="Source Serif 4"/>
               </a:rPr>
-              <a:t>The text, the snack, finding the file.</a:t>
+              <a:t>"Tuesday, 4:00, library" beats "sometime this week."</a:t>
             </a:r>
           </a:p>
         </p:txBody>
@@ -9175,7 +9584,7 @@
                 </a:solidFill>
                 <a:latin typeface="Source Serif 4"/>
               </a:rPr>
-              <a:t>Some brains feel time less.</a:t>
+              <a:t>Plan backward, with a buffer.</a:t>
             </a:r>
           </a:p>
           <a:p>
@@ -9191,7 +9600,7 @@
                 </a:solidFill>
                 <a:latin typeface="Source Serif 4"/>
               </a:rPr>
-              <a:t>"Now" and "not now" can feel like the only two times.</a:t>
+              <a:t>Start at the due date. Leave open time before it.</a:t>
             </a:r>
           </a:p>
         </p:txBody>
@@ -9300,7 +9709,7 @@
                 </a:solidFill>
                 <a:latin typeface="Inter Tight"/>
               </a:rPr>
-              <a:t>TIME THIEVES</a:t>
+              <a:t>TRY IT</a:t>
             </a:r>
           </a:p>
         </p:txBody>
@@ -9422,7 +9831,7 @@
                 </a:solidFill>
                 <a:latin typeface="Source Serif 4"/>
               </a:rPr>
-              <a:t>What eats your time that never makes it into the plan?</a:t>
+              <a:t>Pick a real task. Break it into pieces. Guess each one.</a:t>
             </a:r>
           </a:p>
         </p:txBody>
@@ -9461,7 +9870,7 @@
                 </a:solidFill>
                 <a:latin typeface="Inter Tight"/>
               </a:rPr>
-              <a:t>One per card. No names.</a:t>
+              <a:t>Add them up. Then plan backward from the due date and add a buffer.</a:t>
             </a:r>
           </a:p>
         </p:txBody>

--- a/decks/where-did-the-afternoon-go-lesson-v2.pptx
+++ b/decks/where-did-the-afternoon-go-lesson-v2.pptx
@@ -7150,6 +7150,45 @@
                 <a:latin typeface="Inter Tight"/>
               </a:rPr>
               <a:t>Beaver Upper School · Counseling</a:t>
+            </a:r>
+          </a:p>
+        </p:txBody>
+      </p:sp>
+      <p:sp>
+        <p:nvSpPr>
+          <p:cNvPr id="8" name="TextBox 7"/>
+          <p:cNvSpPr txBox="1"/>
+          <p:nvPr/>
+        </p:nvSpPr>
+        <p:spPr>
+          <a:xfrm>
+            <a:off x="6766560" y="5897880"/>
+            <a:ext cx="4846320" cy="640080"/>
+          </a:xfrm>
+          <a:prstGeom prst="rect">
+            <a:avLst/>
+          </a:prstGeom>
+          <a:noFill/>
+        </p:spPr>
+        <p:txBody>
+          <a:bodyPr wrap="square" anchor="t" lIns="0" rIns="0" tIns="0" bIns="0">
+            <a:spAutoFit/>
+          </a:bodyPr>
+          <a:lstStyle/>
+          <a:p>
+            <a:pPr algn="r">
+              <a:spcAft>
+                <a:spcPts val="495"/>
+              </a:spcAft>
+            </a:pPr>
+            <a:r>
+              <a:rPr sz="1100" b="0" i="0">
+                <a:solidFill>
+                  <a:srgbClr val="E8E4DA"/>
+                </a:solidFill>
+                <a:latin typeface="Inter Tight"/>
+              </a:rPr>
+              <a:t>Written by Dr. Rick Wilson, with AI-assisted drafting. Every lesson is reviewed and edited by Dr. Wilson.</a:t>
             </a:r>
           </a:p>
         </p:txBody>
